--- a/the_heist/docs/MILESTONE_3_presentation.pptx
+++ b/the_heist/docs/MILESTONE_3_presentation.pptx
@@ -4,16 +4,19 @@
   <p:sldMasterIdLst>
     <p:sldMasterId id="2147483648" r:id="rId1"/>
   </p:sldMasterIdLst>
+  <p:notesMasterIdLst>
+    <p:notesMasterId r:id="rId9"/>
+  </p:notesMasterIdLst>
   <p:sldIdLst>
-    <p:sldId id="256" r:id="rId7"/>
-    <p:sldId id="257" r:id="rId9"/>
-    <p:sldId id="258" r:id="rId10"/>
-    <p:sldId id="259" r:id="rId11"/>
-    <p:sldId id="260" r:id="rId12"/>
-    <p:sldId id="261" r:id="rId13"/>
-    <p:sldId id="262" r:id="rId14"/>
+    <p:sldId id="256" r:id="rId2"/>
+    <p:sldId id="257" r:id="rId3"/>
+    <p:sldId id="258" r:id="rId4"/>
+    <p:sldId id="260" r:id="rId5"/>
+    <p:sldId id="261" r:id="rId6"/>
+    <p:sldId id="259" r:id="rId7"/>
+    <p:sldId id="262" r:id="rId8"/>
   </p:sldIdLst>
-  <p:sldSz cx="12191695" cy="6858000" type="screen4x3"/>
+  <p:sldSz cx="12192000" cy="6858000"/>
   <p:notesSz cx="6858000" cy="9144000"/>
   <p:defaultTextStyle>
     <a:defPPr>
@@ -110,11 +113,27 @@
       </a:defRPr>
     </a:lvl9pPr>
   </p:defaultTextStyle>
+  <p:extLst>
+    <p:ext uri="{EFAFB233-063F-42B5-8137-9DF3F51BA10A}">
+      <p15:sldGuideLst xmlns:p15="http://schemas.microsoft.com/office/powerpoint/2012/main">
+        <p15:guide id="1" orient="horz" pos="2160">
+          <p15:clr>
+            <a:srgbClr val="A4A3A4"/>
+          </p15:clr>
+        </p15:guide>
+        <p15:guide id="2" pos="2880">
+          <p15:clr>
+            <a:srgbClr val="A4A3A4"/>
+          </p15:clr>
+        </p15:guide>
+      </p15:sldGuideLst>
+    </p:ext>
+  </p:extLst>
 </p:presentation>
 </file>
 
 <file path=ppt/notesMasters/notesMaster1.xml><?xml version="1.0" encoding="utf-8"?>
-<p:notesMaster xmlns:a="http://schemas.openxmlformats.org/drawingml/2006/main" xmlns:p="http://schemas.openxmlformats.org/presentationml/2006/main" xmlns:r="http://schemas.openxmlformats.org/officeDocument/2006/relationships">
+<p:notesMaster xmlns:a="http://schemas.openxmlformats.org/drawingml/2006/main" xmlns:r="http://schemas.openxmlformats.org/officeDocument/2006/relationships" xmlns:p="http://schemas.openxmlformats.org/presentationml/2006/main">
   <p:cSld>
     <p:bg>
       <p:bgRef idx="1001">
@@ -135,241 +154,16 @@
           <a:chExt cx="0" cy="0"/>
         </a:xfrm>
       </p:grpSpPr>
-      <p:sp>
-        <p:nvSpPr>
-          <p:cNvPr id="2" name="Header Placeholder 1"/>
-          <p:cNvSpPr>
-            <a:spLocks noGrp="1"/>
-          </p:cNvSpPr>
-          <p:nvPr>
-            <p:ph type="hdr" sz="quarter"/>
-          </p:nvPr>
-        </p:nvSpPr>
-        <p:spPr>
-          <a:xfrm>
-            <a:off x="0" y="0"/>
-            <a:ext cx="2971800" cy="457200"/>
-          </a:xfrm>
-          <a:prstGeom prst="rect">
-            <a:avLst/>
-          </a:prstGeom>
-        </p:spPr>
-        <p:txBody>
-          <a:bodyPr vert="horz" lIns="91440" tIns="45720" rIns="91440" bIns="45720" rtlCol="0"/>
-          <a:lstStyle>
-            <a:lvl1pPr algn="l">
-              <a:defRPr sz="1200"/>
-            </a:lvl1pPr>
-          </a:lstStyle>
-          <a:p>
-            <a:endParaRPr lang="en-US"/>
-          </a:p>
-        </p:txBody>
-      </p:sp>
-      <p:sp>
-        <p:nvSpPr>
-          <p:cNvPr id="3" name="Date Placeholder 2"/>
-          <p:cNvSpPr>
-            <a:spLocks noGrp="1"/>
-          </p:cNvSpPr>
-          <p:nvPr>
-            <p:ph type="dt" idx="1"/>
-          </p:nvPr>
-        </p:nvSpPr>
-        <p:spPr>
-          <a:xfrm>
-            <a:off x="3884613" y="0"/>
-            <a:ext cx="2971800" cy="457200"/>
-          </a:xfrm>
-          <a:prstGeom prst="rect">
-            <a:avLst/>
-          </a:prstGeom>
-        </p:spPr>
-        <p:txBody>
-          <a:bodyPr vert="horz" lIns="91440" tIns="45720" rIns="91440" bIns="45720" rtlCol="0"/>
-          <a:lstStyle>
-            <a:lvl1pPr algn="r">
-              <a:defRPr sz="1200"/>
-            </a:lvl1pPr>
-          </a:lstStyle>
-          <a:p>
-            <a:fld id="{0F89C1C7-3DCD-1040-A9CF-14679D8B5DDD}" type="datetimeFigureOut">
-              <a:rPr lang="en-US" smtClean="0"/>
-              <a:t>10/17/16</a:t>
-            </a:fld>
-            <a:endParaRPr lang="en-US"/>
-          </a:p>
-        </p:txBody>
-      </p:sp>
-      <p:sp>
-        <p:nvSpPr>
-          <p:cNvPr id="4" name="Slide Image Placeholder 3"/>
-          <p:cNvSpPr>
-            <a:spLocks noGrp="1" noRot="1" noChangeAspect="1"/>
-          </p:cNvSpPr>
-          <p:nvPr>
-            <p:ph type="sldImg" idx="2"/>
-          </p:nvPr>
-        </p:nvSpPr>
-        <p:spPr>
-          <a:xfrm>
-            <a:off x="1143000" y="685800"/>
-            <a:ext cx="4572000" cy="3429000"/>
-          </a:xfrm>
-          <a:prstGeom prst="rect">
-            <a:avLst/>
-          </a:prstGeom>
-          <a:noFill/>
-          <a:ln w="12700">
-            <a:solidFill>
-              <a:prstClr val="black"/>
-            </a:solidFill>
-          </a:ln>
-        </p:spPr>
-        <p:txBody>
-          <a:bodyPr vert="horz" lIns="91440" tIns="45720" rIns="91440" bIns="45720" rtlCol="0" anchor="ctr"/>
-          <a:lstStyle/>
-          <a:p>
-            <a:endParaRPr lang="en-US"/>
-          </a:p>
-        </p:txBody>
-      </p:sp>
-      <p:sp>
-        <p:nvSpPr>
-          <p:cNvPr id="5" name="Notes Placeholder 4"/>
-          <p:cNvSpPr>
-            <a:spLocks noGrp="1"/>
-          </p:cNvSpPr>
-          <p:nvPr>
-            <p:ph type="body" sz="quarter" idx="3"/>
-          </p:nvPr>
-        </p:nvSpPr>
-        <p:spPr>
-          <a:xfrm>
-            <a:off x="685800" y="4343400"/>
-            <a:ext cx="5486400" cy="4114800"/>
-          </a:xfrm>
-          <a:prstGeom prst="rect">
-            <a:avLst/>
-          </a:prstGeom>
-        </p:spPr>
-        <p:txBody>
-          <a:bodyPr vert="horz" lIns="91440" tIns="45720" rIns="91440" bIns="45720" rtlCol="0"/>
-          <a:lstStyle/>
-          <a:p>
-            <a:pPr lvl="0"/>
-            <a:r>
-              <a:rPr lang="en-US" smtClean="0"/>
-              <a:t>Click to edit Master text styles</a:t>
-            </a:r>
-          </a:p>
-          <a:p>
-            <a:pPr lvl="1"/>
-            <a:r>
-              <a:rPr lang="en-US" smtClean="0"/>
-              <a:t>Second level</a:t>
-            </a:r>
-          </a:p>
-          <a:p>
-            <a:pPr lvl="2"/>
-            <a:r>
-              <a:rPr lang="en-US" smtClean="0"/>
-              <a:t>Third level</a:t>
-            </a:r>
-          </a:p>
-          <a:p>
-            <a:pPr lvl="3"/>
-            <a:r>
-              <a:rPr lang="en-US" smtClean="0"/>
-              <a:t>Fourth level</a:t>
-            </a:r>
-          </a:p>
-          <a:p>
-            <a:pPr lvl="4"/>
-            <a:r>
-              <a:rPr lang="en-US" smtClean="0"/>
-              <a:t>Fifth level</a:t>
-            </a:r>
-            <a:endParaRPr lang="en-US"/>
-          </a:p>
-        </p:txBody>
-      </p:sp>
-      <p:sp>
-        <p:nvSpPr>
-          <p:cNvPr id="6" name="Footer Placeholder 5"/>
-          <p:cNvSpPr>
-            <a:spLocks noGrp="1"/>
-          </p:cNvSpPr>
-          <p:nvPr>
-            <p:ph type="ftr" sz="quarter" idx="4"/>
-          </p:nvPr>
-        </p:nvSpPr>
-        <p:spPr>
-          <a:xfrm>
-            <a:off x="0" y="8685213"/>
-            <a:ext cx="2971800" cy="457200"/>
-          </a:xfrm>
-          <a:prstGeom prst="rect">
-            <a:avLst/>
-          </a:prstGeom>
-        </p:spPr>
-        <p:txBody>
-          <a:bodyPr vert="horz" lIns="91440" tIns="45720" rIns="91440" bIns="45720" rtlCol="0" anchor="b"/>
-          <a:lstStyle>
-            <a:lvl1pPr algn="l">
-              <a:defRPr sz="1200"/>
-            </a:lvl1pPr>
-          </a:lstStyle>
-          <a:p>
-            <a:endParaRPr lang="en-US"/>
-          </a:p>
-        </p:txBody>
-      </p:sp>
-      <p:sp>
-        <p:nvSpPr>
-          <p:cNvPr id="7" name="Slide Number Placeholder 6"/>
-          <p:cNvSpPr>
-            <a:spLocks noGrp="1"/>
-          </p:cNvSpPr>
-          <p:nvPr>
-            <p:ph type="sldNum" sz="quarter" idx="5"/>
-          </p:nvPr>
-        </p:nvSpPr>
-        <p:spPr>
-          <a:xfrm>
-            <a:off x="3884613" y="8685213"/>
-            <a:ext cx="2971800" cy="457200"/>
-          </a:xfrm>
-          <a:prstGeom prst="rect">
-            <a:avLst/>
-          </a:prstGeom>
-        </p:spPr>
-        <p:txBody>
-          <a:bodyPr vert="horz" lIns="91440" tIns="45720" rIns="91440" bIns="45720" rtlCol="0" anchor="b"/>
-          <a:lstStyle>
-            <a:lvl1pPr algn="r">
-              <a:defRPr sz="1200"/>
-            </a:lvl1pPr>
-          </a:lstStyle>
-          <a:p>
-            <a:fld id="{BB5E49A5-4136-284D-997B-48E1D791AD67}" type="slidenum">
-              <a:rPr lang="en-US" smtClean="0"/>
-              <a:t>‹#›</a:t>
-            </a:fld>
-            <a:endParaRPr lang="en-US"/>
-          </a:p>
-        </p:txBody>
-      </p:sp>
     </p:spTree>
     <p:extLst>
       <p:ext uri="{BB962C8B-B14F-4D97-AF65-F5344CB8AC3E}">
-        <p14:creationId xmlns:p14="http://schemas.microsoft.com/office/powerpoint/2010/main" val="2623252185"/>
+        <p14:creationId xmlns:p14="http://schemas.microsoft.com/office/powerpoint/2010/main" val="1124847398"/>
       </p:ext>
     </p:extLst>
   </p:cSld>
   <p:clrMap bg1="lt1" tx1="dk1" bg2="lt2" tx2="dk2" accent1="accent1" accent2="accent2" accent3="accent3" accent4="accent4" accent5="accent5" accent6="accent6" hlink="hlink" folHlink="folHlink"/>
   <p:notesStyle>
-    <a:lvl1pPr marL="0" algn="l" defTabSz="457200" rtl="0" eaLnBrk="1" latinLnBrk="0" hangingPunct="1">
+    <a:lvl1pPr marL="0" algn="l" defTabSz="914400" rtl="0" eaLnBrk="1" latinLnBrk="0" hangingPunct="1">
       <a:defRPr sz="1200" kern="1200">
         <a:solidFill>
           <a:schemeClr val="tx1"/>
@@ -379,7 +173,7 @@
         <a:cs typeface="+mn-cs"/>
       </a:defRPr>
     </a:lvl1pPr>
-    <a:lvl2pPr marL="457200" algn="l" defTabSz="457200" rtl="0" eaLnBrk="1" latinLnBrk="0" hangingPunct="1">
+    <a:lvl2pPr marL="457200" algn="l" defTabSz="914400" rtl="0" eaLnBrk="1" latinLnBrk="0" hangingPunct="1">
       <a:defRPr sz="1200" kern="1200">
         <a:solidFill>
           <a:schemeClr val="tx1"/>
@@ -389,7 +183,7 @@
         <a:cs typeface="+mn-cs"/>
       </a:defRPr>
     </a:lvl2pPr>
-    <a:lvl3pPr marL="914400" algn="l" defTabSz="457200" rtl="0" eaLnBrk="1" latinLnBrk="0" hangingPunct="1">
+    <a:lvl3pPr marL="914400" algn="l" defTabSz="914400" rtl="0" eaLnBrk="1" latinLnBrk="0" hangingPunct="1">
       <a:defRPr sz="1200" kern="1200">
         <a:solidFill>
           <a:schemeClr val="tx1"/>
@@ -399,7 +193,7 @@
         <a:cs typeface="+mn-cs"/>
       </a:defRPr>
     </a:lvl3pPr>
-    <a:lvl4pPr marL="1371600" algn="l" defTabSz="457200" rtl="0" eaLnBrk="1" latinLnBrk="0" hangingPunct="1">
+    <a:lvl4pPr marL="1371600" algn="l" defTabSz="914400" rtl="0" eaLnBrk="1" latinLnBrk="0" hangingPunct="1">
       <a:defRPr sz="1200" kern="1200">
         <a:solidFill>
           <a:schemeClr val="tx1"/>
@@ -409,7 +203,7 @@
         <a:cs typeface="+mn-cs"/>
       </a:defRPr>
     </a:lvl4pPr>
-    <a:lvl5pPr marL="1828800" algn="l" defTabSz="457200" rtl="0" eaLnBrk="1" latinLnBrk="0" hangingPunct="1">
+    <a:lvl5pPr marL="1828800" algn="l" defTabSz="914400" rtl="0" eaLnBrk="1" latinLnBrk="0" hangingPunct="1">
       <a:defRPr sz="1200" kern="1200">
         <a:solidFill>
           <a:schemeClr val="tx1"/>
@@ -419,7 +213,7 @@
         <a:cs typeface="+mn-cs"/>
       </a:defRPr>
     </a:lvl5pPr>
-    <a:lvl6pPr marL="2286000" algn="l" defTabSz="457200" rtl="0" eaLnBrk="1" latinLnBrk="0" hangingPunct="1">
+    <a:lvl6pPr marL="2286000" algn="l" defTabSz="914400" rtl="0" eaLnBrk="1" latinLnBrk="0" hangingPunct="1">
       <a:defRPr sz="1200" kern="1200">
         <a:solidFill>
           <a:schemeClr val="tx1"/>
@@ -429,7 +223,7 @@
         <a:cs typeface="+mn-cs"/>
       </a:defRPr>
     </a:lvl6pPr>
-    <a:lvl7pPr marL="2743200" algn="l" defTabSz="457200" rtl="0" eaLnBrk="1" latinLnBrk="0" hangingPunct="1">
+    <a:lvl7pPr marL="2743200" algn="l" defTabSz="914400" rtl="0" eaLnBrk="1" latinLnBrk="0" hangingPunct="1">
       <a:defRPr sz="1200" kern="1200">
         <a:solidFill>
           <a:schemeClr val="tx1"/>
@@ -439,7 +233,7 @@
         <a:cs typeface="+mn-cs"/>
       </a:defRPr>
     </a:lvl7pPr>
-    <a:lvl8pPr marL="3200400" algn="l" defTabSz="457200" rtl="0" eaLnBrk="1" latinLnBrk="0" hangingPunct="1">
+    <a:lvl8pPr marL="3200400" algn="l" defTabSz="914400" rtl="0" eaLnBrk="1" latinLnBrk="0" hangingPunct="1">
       <a:defRPr sz="1200" kern="1200">
         <a:solidFill>
           <a:schemeClr val="tx1"/>
@@ -449,7 +243,7 @@
         <a:cs typeface="+mn-cs"/>
       </a:defRPr>
     </a:lvl8pPr>
-    <a:lvl9pPr marL="3657600" algn="l" defTabSz="457200" rtl="0" eaLnBrk="1" latinLnBrk="0" hangingPunct="1">
+    <a:lvl9pPr marL="3657600" algn="l" defTabSz="914400" rtl="0" eaLnBrk="1" latinLnBrk="0" hangingPunct="1">
       <a:defRPr sz="1200" kern="1200">
         <a:solidFill>
           <a:schemeClr val="tx1"/>
@@ -464,7 +258,7 @@
 </file>
 
 <file path=ppt/notesSlides/notesSlide1.xml><?xml version="1.0" encoding="utf-8"?>
-<p:notes xmlns:a="http://schemas.openxmlformats.org/drawingml/2006/main" xmlns:p="http://schemas.openxmlformats.org/presentationml/2006/main" xmlns:r="http://schemas.openxmlformats.org/officeDocument/2006/relationships">
+<p:notes xmlns:a="http://schemas.openxmlformats.org/drawingml/2006/main" xmlns:r="http://schemas.openxmlformats.org/officeDocument/2006/relationships" xmlns:p="http://schemas.openxmlformats.org/presentationml/2006/main">
   <p:cSld>
     <p:spTree>
       <p:nvGrpSpPr>
@@ -484,7 +278,7 @@
         <p:nvSpPr>
           <p:cNvPr id="2" name="Slide Image Placeholder 1"/>
           <p:cNvSpPr>
-            <a:spLocks noGrp="1"/>
+            <a:spLocks noGrp="1" noRot="1" noChangeAspect="1"/>
           </p:cNvSpPr>
           <p:nvPr>
             <p:ph type="sldImg" idx="2"/>
@@ -499,7 +293,7 @@
             <a:spLocks noGrp="1"/>
           </p:cNvSpPr>
           <p:nvPr>
-            <p:ph type="body" idx="3" sz="quarter"/>
+            <p:ph type="body" sz="quarter" idx="3"/>
           </p:nvPr>
         </p:nvSpPr>
         <p:spPr/>
@@ -511,7 +305,9 @@
               <a:t>SPEAKER: Thomas (P5, intro)  ·  ~30s</a:t>
             </a:r>
           </a:p>
-          <a:p/>
+          <a:p>
+            <a:endParaRPr/>
+          </a:p>
           <a:p>
             <a:r>
               <a:t>Bonjour, on est l'équipe sur The Heist, le projet Milestone 3 de MOD8.</a:t>
@@ -542,7 +338,9 @@
               <a:t>- Les défis qu'on a rencontrés en route</a:t>
             </a:r>
           </a:p>
-          <a:p/>
+          <a:p>
+            <a:endParaRPr/>
+          </a:p>
           <a:p>
             <a:r>
               <a:t>C'est parti.</a:t>
@@ -557,7 +355,7 @@
             <a:spLocks noGrp="1"/>
           </p:cNvSpPr>
           <p:nvPr>
-            <p:ph type="sldNum" idx="5" sz="quarter"/>
+            <p:ph type="sldNum" sz="quarter" idx="5"/>
           </p:nvPr>
         </p:nvSpPr>
         <p:spPr/>
@@ -571,7 +369,7 @@
 </file>
 
 <file path=ppt/notesSlides/notesSlide2.xml><?xml version="1.0" encoding="utf-8"?>
-<p:notes xmlns:a="http://schemas.openxmlformats.org/drawingml/2006/main" xmlns:p="http://schemas.openxmlformats.org/presentationml/2006/main" xmlns:r="http://schemas.openxmlformats.org/officeDocument/2006/relationships">
+<p:notes xmlns:a="http://schemas.openxmlformats.org/drawingml/2006/main" xmlns:r="http://schemas.openxmlformats.org/officeDocument/2006/relationships" xmlns:p="http://schemas.openxmlformats.org/presentationml/2006/main">
   <p:cSld>
     <p:spTree>
       <p:nvGrpSpPr>
@@ -591,7 +389,7 @@
         <p:nvSpPr>
           <p:cNvPr id="2" name="Slide Image Placeholder 1"/>
           <p:cNvSpPr>
-            <a:spLocks noGrp="1"/>
+            <a:spLocks noGrp="1" noRot="1" noChangeAspect="1"/>
           </p:cNvSpPr>
           <p:nvPr>
             <p:ph type="sldImg" idx="2"/>
@@ -606,7 +404,7 @@
             <a:spLocks noGrp="1"/>
           </p:cNvSpPr>
           <p:nvPr>
-            <p:ph type="body" idx="3" sz="quarter"/>
+            <p:ph type="body" sz="quarter" idx="3"/>
           </p:nvPr>
         </p:nvSpPr>
         <p:spPr/>
@@ -618,7 +416,9 @@
               <a:t>SPEAKER: Thomas  ·  ~45s</a:t>
             </a:r>
           </a:p>
-          <a:p/>
+          <a:p>
+            <a:endParaRPr/>
+          </a:p>
           <a:p>
             <a:r>
               <a:t>Le sujet demandait une To-Do list sécurisée. On a thématisé en braquage</a:t>
@@ -644,7 +444,9 @@
               <a:t>  bidirectionnel traduit vers les libellés UI.</a:t>
             </a:r>
           </a:p>
-          <a:p/>
+          <a:p>
+            <a:endParaRPr/>
+          </a:p>
           <a:p>
             <a:r>
               <a:t>On a aussi ajouté Vehicle, Intel, edit/delete, toasts, et un toggle light/dark</a:t>
@@ -669,7 +471,7 @@
             <a:spLocks noGrp="1"/>
           </p:cNvSpPr>
           <p:nvPr>
-            <p:ph type="sldNum" idx="5" sz="quarter"/>
+            <p:ph type="sldNum" sz="quarter" idx="5"/>
           </p:nvPr>
         </p:nvSpPr>
         <p:spPr/>
@@ -683,7 +485,7 @@
 </file>
 
 <file path=ppt/notesSlides/notesSlide3.xml><?xml version="1.0" encoding="utf-8"?>
-<p:notes xmlns:a="http://schemas.openxmlformats.org/drawingml/2006/main" xmlns:p="http://schemas.openxmlformats.org/presentationml/2006/main" xmlns:r="http://schemas.openxmlformats.org/officeDocument/2006/relationships">
+<p:notes xmlns:a="http://schemas.openxmlformats.org/drawingml/2006/main" xmlns:r="http://schemas.openxmlformats.org/officeDocument/2006/relationships" xmlns:p="http://schemas.openxmlformats.org/presentationml/2006/main">
   <p:cSld>
     <p:spTree>
       <p:nvGrpSpPr>
@@ -703,7 +505,7 @@
         <p:nvSpPr>
           <p:cNvPr id="2" name="Slide Image Placeholder 1"/>
           <p:cNvSpPr>
-            <a:spLocks noGrp="1"/>
+            <a:spLocks noGrp="1" noRot="1" noChangeAspect="1"/>
           </p:cNvSpPr>
           <p:nvPr>
             <p:ph type="sldImg" idx="2"/>
@@ -718,7 +520,7 @@
             <a:spLocks noGrp="1"/>
           </p:cNvSpPr>
           <p:nvPr>
-            <p:ph type="body" idx="3" sz="quarter"/>
+            <p:ph type="body" sz="quarter" idx="3"/>
           </p:nvPr>
         </p:nvSpPr>
         <p:spPr/>
@@ -727,55 +529,231 @@
           <a:lstStyle/>
           <a:p>
             <a:r>
-              <a:t>SPEAKER: Grégoire  ·  ~50s  (P1, foundations)</a:t>
-            </a:r>
-          </a:p>
-          <a:p/>
-          <a:p>
-            <a:r>
-              <a:t>Structure simple: SPA Vue d'un côté, API Express de l'autre, MySQL derrière.</a:t>
-            </a:r>
-          </a:p>
-          <a:p>
-            <a:r>
-              <a:t>Tout passe par un seul service `services/api.js` qui injecte le JWT depuis</a:t>
-            </a:r>
-          </a:p>
-          <a:p>
-            <a:r>
-              <a:t>sessionStorage. Le mapper centralise la traduction enum ↔ label.</a:t>
-            </a:r>
-          </a:p>
-          <a:p/>
-          <a:p>
-            <a:r>
-              <a:t>Sur le choix Prisma vs Sequelize (la déviation): on l'assume.</a:t>
-            </a:r>
-          </a:p>
-          <a:p>
-            <a:r>
-              <a:t>- Schema déclaratif unique (schema.prisma)</a:t>
-            </a:r>
-          </a:p>
-          <a:p>
-            <a:r>
-              <a:t>- Client type-safe — bugs au compile time, pas à l'exécution</a:t>
-            </a:r>
-          </a:p>
-          <a:p>
-            <a:r>
-              <a:t>- Migrations en 1 commande</a:t>
-            </a:r>
-          </a:p>
-          <a:p>
-            <a:r>
-              <a:t>- Même protection SQL injection que Sequelize</a:t>
-            </a:r>
-          </a:p>
-          <a:p/>
-          <a:p>
-            <a:r>
-              <a:t>Si le correcteur pose la question, c'est la réponse.</a:t>
+              <a:rPr dirty="0"/>
+              <a:t>SPEAKER: </a:t>
+            </a:r>
+            <a:r>
+              <a:rPr lang="fr-FR" dirty="0" err="1"/>
+              <a:t>Eleonore</a:t>
+            </a:r>
+            <a:r>
+              <a:rPr dirty="0"/>
+              <a:t>  ·  ~50s  (P1, foundations)</a:t>
+            </a:r>
+          </a:p>
+          <a:p>
+            <a:endParaRPr dirty="0"/>
+          </a:p>
+          <a:p>
+            <a:r>
+              <a:rPr dirty="0"/>
+              <a:t>Structure simple: SPA Vue d'un </a:t>
+            </a:r>
+            <a:r>
+              <a:rPr dirty="0" err="1"/>
+              <a:t>côté</a:t>
+            </a:r>
+            <a:r>
+              <a:rPr dirty="0"/>
+              <a:t>, API Express de </a:t>
+            </a:r>
+            <a:r>
+              <a:rPr dirty="0" err="1"/>
+              <a:t>l'autre</a:t>
+            </a:r>
+            <a:r>
+              <a:rPr dirty="0"/>
+              <a:t>, MySQL derrière.</a:t>
+            </a:r>
+          </a:p>
+          <a:p>
+            <a:r>
+              <a:rPr dirty="0"/>
+              <a:t>Tout passe par un seul service `services/api.js` qui </a:t>
+            </a:r>
+            <a:r>
+              <a:rPr dirty="0" err="1"/>
+              <a:t>injecte</a:t>
+            </a:r>
+            <a:r>
+              <a:rPr dirty="0"/>
+              <a:t> le JWT </a:t>
+            </a:r>
+            <a:r>
+              <a:rPr dirty="0" err="1"/>
+              <a:t>depuis</a:t>
+            </a:r>
+            <a:endParaRPr dirty="0"/>
+          </a:p>
+          <a:p>
+            <a:r>
+              <a:rPr dirty="0" err="1"/>
+              <a:t>sessionStorage</a:t>
+            </a:r>
+            <a:r>
+              <a:rPr dirty="0"/>
+              <a:t>. Le mapper </a:t>
+            </a:r>
+            <a:r>
+              <a:rPr dirty="0" err="1"/>
+              <a:t>centralise</a:t>
+            </a:r>
+            <a:r>
+              <a:rPr dirty="0"/>
+              <a:t> la </a:t>
+            </a:r>
+            <a:r>
+              <a:rPr dirty="0" err="1"/>
+              <a:t>traduction</a:t>
+            </a:r>
+            <a:r>
+              <a:rPr dirty="0"/>
+              <a:t> </a:t>
+            </a:r>
+            <a:r>
+              <a:rPr dirty="0" err="1"/>
+              <a:t>enum</a:t>
+            </a:r>
+            <a:r>
+              <a:rPr dirty="0"/>
+              <a:t> ↔ label.</a:t>
+            </a:r>
+          </a:p>
+          <a:p>
+            <a:endParaRPr dirty="0"/>
+          </a:p>
+          <a:p>
+            <a:r>
+              <a:rPr dirty="0"/>
+              <a:t>Sur le choix Prisma vs </a:t>
+            </a:r>
+            <a:r>
+              <a:rPr dirty="0" err="1"/>
+              <a:t>Sequelize</a:t>
+            </a:r>
+            <a:r>
+              <a:rPr dirty="0"/>
+              <a:t> (la </a:t>
+            </a:r>
+            <a:r>
+              <a:rPr dirty="0" err="1"/>
+              <a:t>déviation</a:t>
+            </a:r>
+            <a:r>
+              <a:rPr dirty="0"/>
+              <a:t>): on </a:t>
+            </a:r>
+            <a:r>
+              <a:rPr dirty="0" err="1"/>
+              <a:t>l'assume</a:t>
+            </a:r>
+            <a:r>
+              <a:rPr dirty="0"/>
+              <a:t>.</a:t>
+            </a:r>
+          </a:p>
+          <a:p>
+            <a:r>
+              <a:rPr dirty="0"/>
+              <a:t>- Schema </a:t>
+            </a:r>
+            <a:r>
+              <a:rPr dirty="0" err="1"/>
+              <a:t>déclaratif</a:t>
+            </a:r>
+            <a:r>
+              <a:rPr dirty="0"/>
+              <a:t> unique (</a:t>
+            </a:r>
+            <a:r>
+              <a:rPr dirty="0" err="1"/>
+              <a:t>schema.prisma</a:t>
+            </a:r>
+            <a:r>
+              <a:rPr dirty="0"/>
+              <a:t>)</a:t>
+            </a:r>
+          </a:p>
+          <a:p>
+            <a:r>
+              <a:rPr dirty="0"/>
+              <a:t>- Client type-safe — bugs au compile time, pas à </a:t>
+            </a:r>
+            <a:r>
+              <a:rPr dirty="0" err="1"/>
+              <a:t>l'exécution</a:t>
+            </a:r>
+            <a:endParaRPr dirty="0"/>
+          </a:p>
+          <a:p>
+            <a:r>
+              <a:rPr dirty="0"/>
+              <a:t>- Migrations </a:t>
+            </a:r>
+            <a:r>
+              <a:rPr dirty="0" err="1"/>
+              <a:t>en</a:t>
+            </a:r>
+            <a:r>
+              <a:rPr dirty="0"/>
+              <a:t> 1 </a:t>
+            </a:r>
+            <a:r>
+              <a:rPr dirty="0" err="1"/>
+              <a:t>commande</a:t>
+            </a:r>
+            <a:endParaRPr dirty="0"/>
+          </a:p>
+          <a:p>
+            <a:r>
+              <a:rPr dirty="0"/>
+              <a:t>- </a:t>
+            </a:r>
+            <a:r>
+              <a:rPr dirty="0" err="1"/>
+              <a:t>Même</a:t>
+            </a:r>
+            <a:r>
+              <a:rPr dirty="0"/>
+              <a:t> protection SQL injection que </a:t>
+            </a:r>
+            <a:r>
+              <a:rPr dirty="0" err="1"/>
+              <a:t>Sequelize</a:t>
+            </a:r>
+            <a:endParaRPr dirty="0"/>
+          </a:p>
+          <a:p>
+            <a:endParaRPr dirty="0"/>
+          </a:p>
+          <a:p>
+            <a:r>
+              <a:rPr dirty="0"/>
+              <a:t>Si le </a:t>
+            </a:r>
+            <a:r>
+              <a:rPr dirty="0" err="1"/>
+              <a:t>correcteur</a:t>
+            </a:r>
+            <a:r>
+              <a:rPr dirty="0"/>
+              <a:t> pose la question, </a:t>
+            </a:r>
+            <a:r>
+              <a:rPr dirty="0" err="1"/>
+              <a:t>c'est</a:t>
+            </a:r>
+            <a:r>
+              <a:rPr dirty="0"/>
+              <a:t> la </a:t>
+            </a:r>
+            <a:r>
+              <a:rPr dirty="0" err="1"/>
+              <a:t>réponse</a:t>
+            </a:r>
+            <a:r>
+              <a:rPr dirty="0"/>
+              <a:t>.</a:t>
             </a:r>
           </a:p>
         </p:txBody>
@@ -787,7 +765,7 @@
             <a:spLocks noGrp="1"/>
           </p:cNvSpPr>
           <p:nvPr>
-            <p:ph type="sldNum" idx="5" sz="quarter"/>
+            <p:ph type="sldNum" sz="quarter" idx="5"/>
           </p:nvPr>
         </p:nvSpPr>
         <p:spPr/>
@@ -801,7 +779,7 @@
 </file>
 
 <file path=ppt/notesSlides/notesSlide4.xml><?xml version="1.0" encoding="utf-8"?>
-<p:notes xmlns:a="http://schemas.openxmlformats.org/drawingml/2006/main" xmlns:p="http://schemas.openxmlformats.org/presentationml/2006/main" xmlns:r="http://schemas.openxmlformats.org/officeDocument/2006/relationships">
+<p:notes xmlns:a="http://schemas.openxmlformats.org/drawingml/2006/main" xmlns:r="http://schemas.openxmlformats.org/officeDocument/2006/relationships" xmlns:p="http://schemas.openxmlformats.org/presentationml/2006/main">
   <p:cSld>
     <p:spTree>
       <p:nvGrpSpPr>
@@ -821,7 +799,7 @@
         <p:nvSpPr>
           <p:cNvPr id="2" name="Slide Image Placeholder 1"/>
           <p:cNvSpPr>
-            <a:spLocks noGrp="1"/>
+            <a:spLocks noGrp="1" noRot="1" noChangeAspect="1"/>
           </p:cNvSpPr>
           <p:nvPr>
             <p:ph type="sldImg" idx="2"/>
@@ -836,7 +814,7 @@
             <a:spLocks noGrp="1"/>
           </p:cNvSpPr>
           <p:nvPr>
-            <p:ph type="body" idx="3" sz="quarter"/>
+            <p:ph type="body" sz="quarter" idx="3"/>
           </p:nvPr>
         </p:nvSpPr>
         <p:spPr/>
@@ -845,70 +823,92 @@
           <a:lstStyle/>
           <a:p>
             <a:r>
-              <a:t>SPEAKER: Eleonore  ·  ~2 min  (P3, frontend integration)</a:t>
-            </a:r>
-          </a:p>
-          <a:p/>
-          <a:p>
-            <a:r>
-              <a:t>[CETTE SLIDE EST UN TEMPLATE — ON BASCULE SUR L'APP RÉELLE]</a:t>
-            </a:r>
-          </a:p>
-          <a:p/>
-          <a:p>
-            <a:r>
-              <a:t>Étapes (chronométrer ~15-20s par étape):</a:t>
-            </a:r>
-          </a:p>
-          <a:p>
-            <a:r>
-              <a:t>1. Login the_godfather / heist2026  → toast "Welcome back"</a:t>
-            </a:r>
-          </a:p>
-          <a:p>
-            <a:r>
-              <a:t>2. Board: ajouter une mission → toast vert, carte apparaît dans The Plan</a:t>
-            </a:r>
-          </a:p>
-          <a:p>
-            <a:r>
-              <a:t>3. Hover une carte: boutons Edit/Delete apparaissent, ouvre Edit, change status</a:t>
-            </a:r>
-          </a:p>
-          <a:p>
-            <a:r>
-              <a:t>4. Crew: dot vert sur the_godfather (montrer)</a:t>
-            </a:r>
-          </a:p>
-          <a:p>
-            <a:r>
-              <a:t>5. Recruit modal: ajouter un agent → apparaît dans la grille</a:t>
-            </a:r>
-          </a:p>
-          <a:p>
-            <a:r>
-              <a:t>6. Garage: edit vehicle, montrer le color picker, changer status à Dumped → driver disabled</a:t>
-            </a:r>
-          </a:p>
-          <a:p>
-            <a:r>
-              <a:t>7. Intel: pin un fichier → réorganisation instantanée (optimistic)</a:t>
-            </a:r>
-          </a:p>
-          <a:p>
-            <a:r>
-              <a:t>8. Sun/Moon toggle → tout passe en light en 1 clic</a:t>
-            </a:r>
-          </a:p>
-          <a:p/>
-          <a:p>
-            <a:r>
-              <a:t>Si on perd du temps, on coupe Crew/Recruit ou Garage edit. Le minimum à montrer:</a:t>
-            </a:r>
-          </a:p>
-          <a:p>
-            <a:r>
-              <a:t>Login, Board create, Theme toggle.</a:t>
+              <a:t>SPEAKER: Marco-Antonio  ·  ~75s  (P4, security hardening)</a:t>
+            </a:r>
+          </a:p>
+          <a:p>
+            <a:endParaRPr/>
+          </a:p>
+          <a:p>
+            <a:r>
+              <a:t>Trois décisions concrètes, chacune répond à une attaque réelle:</a:t>
+            </a:r>
+          </a:p>
+          <a:p>
+            <a:endParaRPr/>
+          </a:p>
+          <a:p>
+            <a:r>
+              <a:t>1. TIMING-SAFE LOGIN (#4): sans ça, un attaquant peut deviner quels alias</a:t>
+            </a:r>
+          </a:p>
+          <a:p>
+            <a:r>
+              <a:t>   existent juste en mesurant le temps de réponse (bcrypt prend ~100ms,</a:t>
+            </a:r>
+          </a:p>
+          <a:p>
+            <a:r>
+              <a:t>   "user not found" prend ~1ms). Solution: on compare CONTRE un faux hash</a:t>
+            </a:r>
+          </a:p>
+          <a:p>
+            <a:r>
+              <a:t>   même si l'alias n'existe pas. Temps de réponse identique.</a:t>
+            </a:r>
+          </a:p>
+          <a:p>
+            <a:endParaRPr/>
+          </a:p>
+          <a:p>
+            <a:r>
+              <a:t>2. RATE LIMIT (#7): 10 tentatives par IP / 15 min. Au-delà, HTTP 429.</a:t>
+            </a:r>
+          </a:p>
+          <a:p>
+            <a:r>
+              <a:t>   Brute force devient inutile. Code: 4 lignes avec express-rate-limit.</a:t>
+            </a:r>
+          </a:p>
+          <a:p>
+            <a:endParaRPr/>
+          </a:p>
+          <a:p>
+            <a:r>
+              <a:t>3. IDOR FIX (#10): la VRAIE leçon de ce milestone. La V1 acceptait authorId</a:t>
+            </a:r>
+          </a:p>
+          <a:p>
+            <a:r>
+              <a:t>   depuis le body. Un agent authentifié pouvait poster un intel sous le nom</a:t>
+            </a:r>
+          </a:p>
+          <a:p>
+            <a:r>
+              <a:t>   d'un autre agent — c'est de l'usurpation d'identité.</a:t>
+            </a:r>
+          </a:p>
+          <a:p>
+            <a:r>
+              <a:t>   Fix: authorId = req.agent.id, lu depuis le JWT vérifié. Le serveur est</a:t>
+            </a:r>
+          </a:p>
+          <a:p>
+            <a:r>
+              <a:t>   l'autorité, pas le client.</a:t>
+            </a:r>
+          </a:p>
+          <a:p>
+            <a:endParaRPr/>
+          </a:p>
+          <a:p>
+            <a:r>
+              <a:t>   Le slogan: "authentifié ne veut pas dire autorisé". On a corrigé pendant</a:t>
+            </a:r>
+          </a:p>
+          <a:p>
+            <a:r>
+              <a:t>   l'audit P4, et étendu la même règle à toutes les autres routes.</a:t>
             </a:r>
           </a:p>
         </p:txBody>
@@ -920,7 +920,7 @@
             <a:spLocks noGrp="1"/>
           </p:cNvSpPr>
           <p:nvPr>
-            <p:ph type="sldNum" idx="5" sz="quarter"/>
+            <p:ph type="sldNum" sz="quarter" idx="5"/>
           </p:nvPr>
         </p:nvSpPr>
         <p:spPr/>
@@ -934,7 +934,7 @@
 </file>
 
 <file path=ppt/notesSlides/notesSlide5.xml><?xml version="1.0" encoding="utf-8"?>
-<p:notes xmlns:a="http://schemas.openxmlformats.org/drawingml/2006/main" xmlns:p="http://schemas.openxmlformats.org/presentationml/2006/main" xmlns:r="http://schemas.openxmlformats.org/officeDocument/2006/relationships">
+<p:notes xmlns:a="http://schemas.openxmlformats.org/drawingml/2006/main" xmlns:r="http://schemas.openxmlformats.org/officeDocument/2006/relationships" xmlns:p="http://schemas.openxmlformats.org/presentationml/2006/main">
   <p:cSld>
     <p:spTree>
       <p:nvGrpSpPr>
@@ -954,7 +954,7 @@
         <p:nvSpPr>
           <p:cNvPr id="2" name="Slide Image Placeholder 1"/>
           <p:cNvSpPr>
-            <a:spLocks noGrp="1"/>
+            <a:spLocks noGrp="1" noRot="1" noChangeAspect="1"/>
           </p:cNvSpPr>
           <p:nvPr>
             <p:ph type="sldImg" idx="2"/>
@@ -969,7 +969,7 @@
             <a:spLocks noGrp="1"/>
           </p:cNvSpPr>
           <p:nvPr>
-            <p:ph type="body" idx="3" sz="quarter"/>
+            <p:ph type="body" sz="quarter" idx="3"/>
           </p:nvPr>
         </p:nvSpPr>
         <p:spPr/>
@@ -978,82 +978,92 @@
           <a:lstStyle/>
           <a:p>
             <a:r>
-              <a:t>SPEAKER: Marco-Antonio  ·  ~75s  (P4, security hardening)</a:t>
-            </a:r>
-          </a:p>
-          <a:p/>
-          <a:p>
-            <a:r>
-              <a:t>Trois décisions concrètes, chacune répond à une attaque réelle:</a:t>
-            </a:r>
-          </a:p>
-          <a:p/>
-          <a:p>
-            <a:r>
-              <a:t>1. TIMING-SAFE LOGIN (#4): sans ça, un attaquant peut deviner quels alias</a:t>
-            </a:r>
-          </a:p>
-          <a:p>
-            <a:r>
-              <a:t>   existent juste en mesurant le temps de réponse (bcrypt prend ~100ms,</a:t>
-            </a:r>
-          </a:p>
-          <a:p>
-            <a:r>
-              <a:t>   "user not found" prend ~1ms). Solution: on compare CONTRE un faux hash</a:t>
-            </a:r>
-          </a:p>
-          <a:p>
-            <a:r>
-              <a:t>   même si l'alias n'existe pas. Temps de réponse identique.</a:t>
-            </a:r>
-          </a:p>
-          <a:p/>
-          <a:p>
-            <a:r>
-              <a:t>2. RATE LIMIT (#7): 10 tentatives par IP / 15 min. Au-delà, HTTP 429.</a:t>
-            </a:r>
-          </a:p>
-          <a:p>
-            <a:r>
-              <a:t>   Brute force devient inutile. Code: 4 lignes avec express-rate-limit.</a:t>
-            </a:r>
-          </a:p>
-          <a:p/>
-          <a:p>
-            <a:r>
-              <a:t>3. IDOR FIX (#10): la VRAIE leçon de ce milestone. La V1 acceptait authorId</a:t>
-            </a:r>
-          </a:p>
-          <a:p>
-            <a:r>
-              <a:t>   depuis le body. Un agent authentifié pouvait poster un intel sous le nom</a:t>
-            </a:r>
-          </a:p>
-          <a:p>
-            <a:r>
-              <a:t>   d'un autre agent — c'est de l'usurpation d'identité.</a:t>
-            </a:r>
-          </a:p>
-          <a:p>
-            <a:r>
-              <a:t>   Fix: authorId = req.agent.id, lu depuis le JWT vérifié. Le serveur est</a:t>
-            </a:r>
-          </a:p>
-          <a:p>
-            <a:r>
-              <a:t>   l'autorité, pas le client.</a:t>
-            </a:r>
-          </a:p>
-          <a:p/>
-          <a:p>
-            <a:r>
-              <a:t>   Le slogan: "authentifié ne veut pas dire autorisé". On a corrigé pendant</a:t>
-            </a:r>
-          </a:p>
-          <a:p>
-            <a:r>
-              <a:t>   l'audit P4, et étendu la même règle à toutes les autres routes.</a:t>
+              <a:t>SPEAKER: Xavier  ·  ~45s  (P2, CRUD routes)</a:t>
+            </a:r>
+          </a:p>
+          <a:p>
+            <a:endParaRPr/>
+          </a:p>
+          <a:p>
+            <a:r>
+              <a:t>Trois moments qui ont vraiment façonné le code:</a:t>
+            </a:r>
+          </a:p>
+          <a:p>
+            <a:endParaRPr/>
+          </a:p>
+          <a:p>
+            <a:r>
+              <a:t>1. MAPPING (le moins impressionnant mais le plus utile):</a:t>
+            </a:r>
+          </a:p>
+          <a:p>
+            <a:r>
+              <a:t>   30+ composants Vue en dur sur les libellés. Plutôt que de tout refactorer,</a:t>
+            </a:r>
+          </a:p>
+          <a:p>
+            <a:r>
+              <a:t>   un seul fichier `mappers.js` traduit dans les deux sens. Si on swap le</a:t>
+            </a:r>
+          </a:p>
+          <a:p>
+            <a:r>
+              <a:t>   backend un jour, seul ce fichier change.</a:t>
+            </a:r>
+          </a:p>
+          <a:p>
+            <a:endParaRPr/>
+          </a:p>
+          <a:p>
+            <a:r>
+              <a:t>2. IDOR (déjà couvert sur la slide précédente — Marco l'a montré).</a:t>
+            </a:r>
+          </a:p>
+          <a:p>
+            <a:r>
+              <a:t>   La leçon générale: tester chaque écriture côté serveur avec la question</a:t>
+            </a:r>
+          </a:p>
+          <a:p>
+            <a:r>
+              <a:t>   "qui prétend faire quoi?".</a:t>
+            </a:r>
+          </a:p>
+          <a:p>
+            <a:endParaRPr/>
+          </a:p>
+          <a:p>
+            <a:r>
+              <a:t>3. ONLINE STATUS: bug subtil.  isOnline jamais updaté → l'utilisateur</a:t>
+            </a:r>
+          </a:p>
+          <a:p>
+            <a:r>
+              <a:t>   connecté apparaissait offline sur son propre profil. Fix: /login flip</a:t>
+            </a:r>
+          </a:p>
+          <a:p>
+            <a:r>
+              <a:t>   à true, nouveau /logout flip à false. AuthStore.logout devient async</a:t>
+            </a:r>
+          </a:p>
+          <a:p>
+            <a:r>
+              <a:t>   pour que le ping parte avant qu'on jette le JWT.</a:t>
+            </a:r>
+          </a:p>
+          <a:p>
+            <a:endParaRPr/>
+          </a:p>
+          <a:p>
+            <a:r>
+              <a:t>Et en bas: ce qu'on referait — git init dès le jour 1, contrat de données</a:t>
+            </a:r>
+          </a:p>
+          <a:p>
+            <a:r>
+              <a:t>front-back avant P3, et un test d'intégration par route.</a:t>
             </a:r>
           </a:p>
         </p:txBody>
@@ -1065,7 +1075,7 @@
             <a:spLocks noGrp="1"/>
           </p:cNvSpPr>
           <p:nvPr>
-            <p:ph type="sldNum" idx="5" sz="quarter"/>
+            <p:ph type="sldNum" sz="quarter" idx="5"/>
           </p:nvPr>
         </p:nvSpPr>
         <p:spPr/>
@@ -1079,7 +1089,7 @@
 </file>
 
 <file path=ppt/notesSlides/notesSlide6.xml><?xml version="1.0" encoding="utf-8"?>
-<p:notes xmlns:a="http://schemas.openxmlformats.org/drawingml/2006/main" xmlns:p="http://schemas.openxmlformats.org/presentationml/2006/main" xmlns:r="http://schemas.openxmlformats.org/officeDocument/2006/relationships">
+<p:notes xmlns:a="http://schemas.openxmlformats.org/drawingml/2006/main" xmlns:r="http://schemas.openxmlformats.org/officeDocument/2006/relationships" xmlns:p="http://schemas.openxmlformats.org/presentationml/2006/main">
   <p:cSld>
     <p:spTree>
       <p:nvGrpSpPr>
@@ -1099,7 +1109,7 @@
         <p:nvSpPr>
           <p:cNvPr id="2" name="Slide Image Placeholder 1"/>
           <p:cNvSpPr>
-            <a:spLocks noGrp="1"/>
+            <a:spLocks noGrp="1" noRot="1" noChangeAspect="1"/>
           </p:cNvSpPr>
           <p:nvPr>
             <p:ph type="sldImg" idx="2"/>
@@ -1114,7 +1124,7 @@
             <a:spLocks noGrp="1"/>
           </p:cNvSpPr>
           <p:nvPr>
-            <p:ph type="body" idx="3" sz="quarter"/>
+            <p:ph type="body" sz="quarter" idx="3"/>
           </p:nvPr>
         </p:nvSpPr>
         <p:spPr/>
@@ -1123,82 +1133,270 @@
           <a:lstStyle/>
           <a:p>
             <a:r>
-              <a:t>SPEAKER: Xavier  ·  ~45s  (P2, CRUD routes)</a:t>
-            </a:r>
-          </a:p>
-          <a:p/>
-          <a:p>
-            <a:r>
-              <a:t>Trois moments qui ont vraiment façonné le code:</a:t>
-            </a:r>
-          </a:p>
-          <a:p/>
-          <a:p>
-            <a:r>
-              <a:t>1. MAPPING (le moins impressionnant mais le plus utile):</a:t>
-            </a:r>
-          </a:p>
-          <a:p>
-            <a:r>
-              <a:t>   30+ composants Vue en dur sur les libellés. Plutôt que de tout refactorer,</a:t>
-            </a:r>
-          </a:p>
-          <a:p>
-            <a:r>
-              <a:t>   un seul fichier `mappers.js` traduit dans les deux sens. Si on swap le</a:t>
-            </a:r>
-          </a:p>
-          <a:p>
-            <a:r>
-              <a:t>   backend un jour, seul ce fichier change.</a:t>
-            </a:r>
-          </a:p>
-          <a:p/>
-          <a:p>
-            <a:r>
-              <a:t>2. IDOR (déjà couvert sur la slide précédente — Marco l'a montré).</a:t>
-            </a:r>
-          </a:p>
-          <a:p>
-            <a:r>
-              <a:t>   La leçon générale: tester chaque écriture côté serveur avec la question</a:t>
-            </a:r>
-          </a:p>
-          <a:p>
-            <a:r>
-              <a:t>   "qui prétend faire quoi?".</a:t>
-            </a:r>
-          </a:p>
-          <a:p/>
-          <a:p>
-            <a:r>
-              <a:t>3. ONLINE STATUS: bug subtil.  isOnline jamais updaté → l'utilisateur</a:t>
-            </a:r>
-          </a:p>
-          <a:p>
-            <a:r>
-              <a:t>   connecté apparaissait offline sur son propre profil. Fix: /login flip</a:t>
-            </a:r>
-          </a:p>
-          <a:p>
-            <a:r>
-              <a:t>   à true, nouveau /logout flip à false. AuthStore.logout devient async</a:t>
-            </a:r>
-          </a:p>
-          <a:p>
-            <a:r>
-              <a:t>   pour que le ping parte avant qu'on jette le JWT.</a:t>
-            </a:r>
-          </a:p>
-          <a:p/>
-          <a:p>
-            <a:r>
-              <a:t>Et en bas: ce qu'on referait — git init dès le jour 1, contrat de données</a:t>
-            </a:r>
-          </a:p>
-          <a:p>
-            <a:r>
-              <a:t>front-back avant P3, et un test d'intégration par route.</a:t>
+              <a:rPr dirty="0"/>
+              <a:t>SPEAKER: </a:t>
+            </a:r>
+            <a:r>
+              <a:rPr lang="fr-FR" dirty="0" err="1"/>
+              <a:t>Gregoire</a:t>
+            </a:r>
+            <a:r>
+              <a:rPr dirty="0"/>
+              <a:t>  ·  ~2 min  (P3, frontend integration)</a:t>
+            </a:r>
+          </a:p>
+          <a:p>
+            <a:endParaRPr dirty="0"/>
+          </a:p>
+          <a:p>
+            <a:r>
+              <a:rPr dirty="0"/>
+              <a:t>[CETTE SLIDE EST UN TEMPLATE — ON BASCULE SUR L'APP RÉELLE]</a:t>
+            </a:r>
+          </a:p>
+          <a:p>
+            <a:endParaRPr dirty="0"/>
+          </a:p>
+          <a:p>
+            <a:r>
+              <a:rPr dirty="0"/>
+              <a:t>Étapes (</a:t>
+            </a:r>
+            <a:r>
+              <a:rPr dirty="0" err="1"/>
+              <a:t>chronométrer</a:t>
+            </a:r>
+            <a:r>
+              <a:rPr dirty="0"/>
+              <a:t> ~15-20s par étape):</a:t>
+            </a:r>
+          </a:p>
+          <a:p>
+            <a:r>
+              <a:rPr dirty="0"/>
+              <a:t>1. Login </a:t>
+            </a:r>
+            <a:r>
+              <a:rPr dirty="0" err="1"/>
+              <a:t>the_godfather</a:t>
+            </a:r>
+            <a:r>
+              <a:rPr dirty="0"/>
+              <a:t> / heist2026  → toast "Welcome back"</a:t>
+            </a:r>
+          </a:p>
+          <a:p>
+            <a:r>
+              <a:rPr dirty="0"/>
+              <a:t>2. Board: </a:t>
+            </a:r>
+            <a:r>
+              <a:rPr dirty="0" err="1"/>
+              <a:t>ajouter</a:t>
+            </a:r>
+            <a:r>
+              <a:rPr dirty="0"/>
+              <a:t> </a:t>
+            </a:r>
+            <a:r>
+              <a:rPr dirty="0" err="1"/>
+              <a:t>une</a:t>
+            </a:r>
+            <a:r>
+              <a:rPr dirty="0"/>
+              <a:t> mission → toast vert, carte </a:t>
+            </a:r>
+            <a:r>
+              <a:rPr dirty="0" err="1"/>
+              <a:t>apparaît</a:t>
+            </a:r>
+            <a:r>
+              <a:rPr dirty="0"/>
+              <a:t> dans The Plan</a:t>
+            </a:r>
+          </a:p>
+          <a:p>
+            <a:r>
+              <a:rPr dirty="0"/>
+              <a:t>3. Hover </a:t>
+            </a:r>
+            <a:r>
+              <a:rPr dirty="0" err="1"/>
+              <a:t>une</a:t>
+            </a:r>
+            <a:r>
+              <a:rPr dirty="0"/>
+              <a:t> carte: boutons Edit/Delete </a:t>
+            </a:r>
+            <a:r>
+              <a:rPr dirty="0" err="1"/>
+              <a:t>apparaissent</a:t>
+            </a:r>
+            <a:r>
+              <a:rPr dirty="0"/>
+              <a:t>, </a:t>
+            </a:r>
+            <a:r>
+              <a:rPr dirty="0" err="1"/>
+              <a:t>ouvre</a:t>
+            </a:r>
+            <a:r>
+              <a:rPr dirty="0"/>
+              <a:t> Edit, change status</a:t>
+            </a:r>
+          </a:p>
+          <a:p>
+            <a:r>
+              <a:rPr dirty="0"/>
+              <a:t>4. Crew: dot vert sur </a:t>
+            </a:r>
+            <a:r>
+              <a:rPr dirty="0" err="1"/>
+              <a:t>the_godfather</a:t>
+            </a:r>
+            <a:r>
+              <a:rPr dirty="0"/>
+              <a:t> (</a:t>
+            </a:r>
+            <a:r>
+              <a:rPr dirty="0" err="1"/>
+              <a:t>montrer</a:t>
+            </a:r>
+            <a:r>
+              <a:rPr dirty="0"/>
+              <a:t>)</a:t>
+            </a:r>
+          </a:p>
+          <a:p>
+            <a:r>
+              <a:rPr dirty="0"/>
+              <a:t>5. Recruit modal: </a:t>
+            </a:r>
+            <a:r>
+              <a:rPr dirty="0" err="1"/>
+              <a:t>ajouter</a:t>
+            </a:r>
+            <a:r>
+              <a:rPr dirty="0"/>
+              <a:t> un agent → </a:t>
+            </a:r>
+            <a:r>
+              <a:rPr dirty="0" err="1"/>
+              <a:t>apparaît</a:t>
+            </a:r>
+            <a:r>
+              <a:rPr dirty="0"/>
+              <a:t> dans la grille</a:t>
+            </a:r>
+          </a:p>
+          <a:p>
+            <a:r>
+              <a:rPr dirty="0"/>
+              <a:t>6. Garage: edit vehicle, </a:t>
+            </a:r>
+            <a:r>
+              <a:rPr dirty="0" err="1"/>
+              <a:t>montrer</a:t>
+            </a:r>
+            <a:r>
+              <a:rPr dirty="0"/>
+              <a:t> le color picker, changer status à Dumped → driver disabled</a:t>
+            </a:r>
+          </a:p>
+          <a:p>
+            <a:r>
+              <a:rPr dirty="0"/>
+              <a:t>7. Intel: pin un </a:t>
+            </a:r>
+            <a:r>
+              <a:rPr dirty="0" err="1"/>
+              <a:t>fichier</a:t>
+            </a:r>
+            <a:r>
+              <a:rPr dirty="0"/>
+              <a:t> → </a:t>
+            </a:r>
+            <a:r>
+              <a:rPr dirty="0" err="1"/>
+              <a:t>réorganisation</a:t>
+            </a:r>
+            <a:r>
+              <a:rPr dirty="0"/>
+              <a:t> </a:t>
+            </a:r>
+            <a:r>
+              <a:rPr dirty="0" err="1"/>
+              <a:t>instantanée</a:t>
+            </a:r>
+            <a:r>
+              <a:rPr dirty="0"/>
+              <a:t> (optimistic)</a:t>
+            </a:r>
+          </a:p>
+          <a:p>
+            <a:r>
+              <a:rPr dirty="0"/>
+              <a:t>8. Sun/Moon toggle → tout passe </a:t>
+            </a:r>
+            <a:r>
+              <a:rPr dirty="0" err="1"/>
+              <a:t>en</a:t>
+            </a:r>
+            <a:r>
+              <a:rPr dirty="0"/>
+              <a:t> light </a:t>
+            </a:r>
+            <a:r>
+              <a:rPr dirty="0" err="1"/>
+              <a:t>en</a:t>
+            </a:r>
+            <a:r>
+              <a:rPr dirty="0"/>
+              <a:t> 1 </a:t>
+            </a:r>
+            <a:r>
+              <a:rPr dirty="0" err="1"/>
+              <a:t>clic</a:t>
+            </a:r>
+            <a:endParaRPr dirty="0"/>
+          </a:p>
+          <a:p>
+            <a:endParaRPr dirty="0"/>
+          </a:p>
+          <a:p>
+            <a:r>
+              <a:rPr dirty="0"/>
+              <a:t>Si on </a:t>
+            </a:r>
+            <a:r>
+              <a:rPr dirty="0" err="1"/>
+              <a:t>perd</a:t>
+            </a:r>
+            <a:r>
+              <a:rPr dirty="0"/>
+              <a:t> du temps, on coupe Crew/Recruit </a:t>
+            </a:r>
+            <a:r>
+              <a:rPr dirty="0" err="1"/>
+              <a:t>ou</a:t>
+            </a:r>
+            <a:r>
+              <a:rPr dirty="0"/>
+              <a:t> Garage edit. Le minimum à </a:t>
+            </a:r>
+            <a:r>
+              <a:rPr dirty="0" err="1"/>
+              <a:t>montrer</a:t>
+            </a:r>
+            <a:r>
+              <a:rPr dirty="0"/>
+              <a:t>:</a:t>
+            </a:r>
+          </a:p>
+          <a:p>
+            <a:r>
+              <a:rPr dirty="0"/>
+              <a:t>Login, Board create, Theme toggle.</a:t>
             </a:r>
           </a:p>
         </p:txBody>
@@ -1210,7 +1408,7 @@
             <a:spLocks noGrp="1"/>
           </p:cNvSpPr>
           <p:nvPr>
-            <p:ph type="sldNum" idx="5" sz="quarter"/>
+            <p:ph type="sldNum" sz="quarter" idx="5"/>
           </p:nvPr>
         </p:nvSpPr>
         <p:spPr/>
@@ -1224,7 +1422,7 @@
 </file>
 
 <file path=ppt/notesSlides/notesSlide7.xml><?xml version="1.0" encoding="utf-8"?>
-<p:notes xmlns:a="http://schemas.openxmlformats.org/drawingml/2006/main" xmlns:p="http://schemas.openxmlformats.org/presentationml/2006/main" xmlns:r="http://schemas.openxmlformats.org/officeDocument/2006/relationships">
+<p:notes xmlns:a="http://schemas.openxmlformats.org/drawingml/2006/main" xmlns:r="http://schemas.openxmlformats.org/officeDocument/2006/relationships" xmlns:p="http://schemas.openxmlformats.org/presentationml/2006/main">
   <p:cSld>
     <p:spTree>
       <p:nvGrpSpPr>
@@ -1244,7 +1442,7 @@
         <p:nvSpPr>
           <p:cNvPr id="2" name="Slide Image Placeholder 1"/>
           <p:cNvSpPr>
-            <a:spLocks noGrp="1"/>
+            <a:spLocks noGrp="1" noRot="1" noChangeAspect="1"/>
           </p:cNvSpPr>
           <p:nvPr>
             <p:ph type="sldImg" idx="2"/>
@@ -1259,7 +1457,7 @@
             <a:spLocks noGrp="1"/>
           </p:cNvSpPr>
           <p:nvPr>
-            <p:ph type="body" idx="3" sz="quarter"/>
+            <p:ph type="body" sz="quarter" idx="3"/>
           </p:nvPr>
         </p:nvSpPr>
         <p:spPr/>
@@ -1268,54 +1466,289 @@
           <a:lstStyle/>
           <a:p>
             <a:r>
+              <a:rPr dirty="0"/>
               <a:t>SPEAKER: All  ·  ~30s + Q&amp;A</a:t>
             </a:r>
           </a:p>
-          <a:p/>
-          <a:p>
-            <a:r>
+          <a:p>
+            <a:endParaRPr dirty="0"/>
+          </a:p>
+          <a:p>
+            <a:r>
+              <a:rPr dirty="0"/>
               <a:t>Court et net. Si pas de question:</a:t>
             </a:r>
           </a:p>
           <a:p>
             <a:r>
-              <a:t>"On reste dispo après pour montrer plus en détail si vous voulez."</a:t>
-            </a:r>
-          </a:p>
-          <a:p/>
-          <a:p>
-            <a:r>
-              <a:t>Si question prévisible:</a:t>
-            </a:r>
-          </a:p>
-          <a:p>
-            <a:r>
-              <a:t>- "Pourquoi pas Sequelize?"  → cf slide 3, Grégoire répond</a:t>
-            </a:r>
-          </a:p>
-          <a:p>
-            <a:r>
-              <a:t>- "Comment vous géreriez si plus d'utilisateurs?"  → SSE + Docker + refresh</a:t>
-            </a:r>
-          </a:p>
-          <a:p>
-            <a:r>
-              <a:t>  tokens listés dans la doc, page Future Improvements</a:t>
-            </a:r>
-          </a:p>
-          <a:p>
-            <a:r>
-              <a:t>- "Où sont les tests?"  → on assume, c'est dans nos prochaines étapes</a:t>
-            </a:r>
-          </a:p>
-          <a:p>
-            <a:r>
-              <a:t>- "Pourquoi pas de drag &amp; drop sur le Kanban?"  → Edit modal change le</a:t>
-            </a:r>
-          </a:p>
-          <a:p>
-            <a:r>
-              <a:t>  status, drag&amp;drop est un nice-to-have qu'on n'a pas pris vu la deadline</a:t>
+              <a:rPr dirty="0"/>
+              <a:t>"On </a:t>
+            </a:r>
+            <a:r>
+              <a:rPr dirty="0" err="1"/>
+              <a:t>reste</a:t>
+            </a:r>
+            <a:r>
+              <a:rPr dirty="0"/>
+              <a:t> </a:t>
+            </a:r>
+            <a:r>
+              <a:rPr dirty="0" err="1"/>
+              <a:t>dispo</a:t>
+            </a:r>
+            <a:r>
+              <a:rPr dirty="0"/>
+              <a:t> après pour </a:t>
+            </a:r>
+            <a:r>
+              <a:rPr dirty="0" err="1"/>
+              <a:t>montrer</a:t>
+            </a:r>
+            <a:r>
+              <a:rPr dirty="0"/>
+              <a:t> plus </a:t>
+            </a:r>
+            <a:r>
+              <a:rPr dirty="0" err="1"/>
+              <a:t>en</a:t>
+            </a:r>
+            <a:r>
+              <a:rPr dirty="0"/>
+              <a:t> </a:t>
+            </a:r>
+            <a:r>
+              <a:rPr dirty="0" err="1"/>
+              <a:t>détail</a:t>
+            </a:r>
+            <a:r>
+              <a:rPr dirty="0"/>
+              <a:t> </a:t>
+            </a:r>
+            <a:r>
+              <a:rPr dirty="0" err="1"/>
+              <a:t>si</a:t>
+            </a:r>
+            <a:r>
+              <a:rPr dirty="0"/>
+              <a:t> </a:t>
+            </a:r>
+            <a:r>
+              <a:rPr dirty="0" err="1"/>
+              <a:t>vous</a:t>
+            </a:r>
+            <a:r>
+              <a:rPr dirty="0"/>
+              <a:t> </a:t>
+            </a:r>
+            <a:r>
+              <a:rPr dirty="0" err="1"/>
+              <a:t>voulez</a:t>
+            </a:r>
+            <a:r>
+              <a:rPr dirty="0"/>
+              <a:t>."</a:t>
+            </a:r>
+          </a:p>
+          <a:p>
+            <a:endParaRPr dirty="0"/>
+          </a:p>
+          <a:p>
+            <a:r>
+              <a:rPr dirty="0"/>
+              <a:t>Si question </a:t>
+            </a:r>
+            <a:r>
+              <a:rPr dirty="0" err="1"/>
+              <a:t>prévisible</a:t>
+            </a:r>
+            <a:r>
+              <a:rPr dirty="0"/>
+              <a:t>:</a:t>
+            </a:r>
+          </a:p>
+          <a:p>
+            <a:r>
+              <a:rPr dirty="0"/>
+              <a:t>- "</a:t>
+            </a:r>
+            <a:r>
+              <a:rPr dirty="0" err="1"/>
+              <a:t>Pourquoi</a:t>
+            </a:r>
+            <a:r>
+              <a:rPr dirty="0"/>
+              <a:t> pas </a:t>
+            </a:r>
+            <a:r>
+              <a:rPr dirty="0" err="1"/>
+              <a:t>Sequelize</a:t>
+            </a:r>
+            <a:r>
+              <a:rPr dirty="0"/>
+              <a:t>?"  → </a:t>
+            </a:r>
+            <a:r>
+              <a:rPr dirty="0" err="1"/>
+              <a:t>cf</a:t>
+            </a:r>
+            <a:r>
+              <a:rPr dirty="0"/>
+              <a:t> slide 3, Grégoire </a:t>
+            </a:r>
+            <a:r>
+              <a:rPr dirty="0" err="1"/>
+              <a:t>répond</a:t>
+            </a:r>
+            <a:endParaRPr dirty="0"/>
+          </a:p>
+          <a:p>
+            <a:r>
+              <a:rPr dirty="0"/>
+              <a:t>- "Comment </a:t>
+            </a:r>
+            <a:r>
+              <a:rPr dirty="0" err="1"/>
+              <a:t>vous</a:t>
+            </a:r>
+            <a:r>
+              <a:rPr dirty="0"/>
+              <a:t> </a:t>
+            </a:r>
+            <a:r>
+              <a:rPr dirty="0" err="1"/>
+              <a:t>géreriez</a:t>
+            </a:r>
+            <a:r>
+              <a:rPr dirty="0"/>
+              <a:t> </a:t>
+            </a:r>
+            <a:r>
+              <a:rPr dirty="0" err="1"/>
+              <a:t>si</a:t>
+            </a:r>
+            <a:r>
+              <a:rPr dirty="0"/>
+              <a:t> plus </a:t>
+            </a:r>
+            <a:r>
+              <a:rPr dirty="0" err="1"/>
+              <a:t>d'utilisateurs</a:t>
+            </a:r>
+            <a:r>
+              <a:rPr dirty="0"/>
+              <a:t>?"  → SSE + Docker + refresh</a:t>
+            </a:r>
+          </a:p>
+          <a:p>
+            <a:r>
+              <a:rPr dirty="0"/>
+              <a:t>  tokens </a:t>
+            </a:r>
+            <a:r>
+              <a:rPr dirty="0" err="1"/>
+              <a:t>listés</a:t>
+            </a:r>
+            <a:r>
+              <a:rPr dirty="0"/>
+              <a:t> dans la doc, page Future Improvements</a:t>
+            </a:r>
+          </a:p>
+          <a:p>
+            <a:r>
+              <a:rPr dirty="0"/>
+              <a:t>- "</a:t>
+            </a:r>
+            <a:r>
+              <a:rPr dirty="0" err="1"/>
+              <a:t>Où</a:t>
+            </a:r>
+            <a:r>
+              <a:rPr dirty="0"/>
+              <a:t> </a:t>
+            </a:r>
+            <a:r>
+              <a:rPr dirty="0" err="1"/>
+              <a:t>sont</a:t>
+            </a:r>
+            <a:r>
+              <a:rPr dirty="0"/>
+              <a:t> les tests?"  → on assume, </a:t>
+            </a:r>
+            <a:r>
+              <a:rPr dirty="0" err="1"/>
+              <a:t>c'est</a:t>
+            </a:r>
+            <a:r>
+              <a:rPr dirty="0"/>
+              <a:t> dans </a:t>
+            </a:r>
+            <a:r>
+              <a:rPr dirty="0" err="1"/>
+              <a:t>nos</a:t>
+            </a:r>
+            <a:r>
+              <a:rPr dirty="0"/>
+              <a:t> </a:t>
+            </a:r>
+            <a:r>
+              <a:rPr dirty="0" err="1"/>
+              <a:t>prochaines</a:t>
+            </a:r>
+            <a:r>
+              <a:rPr dirty="0"/>
+              <a:t> étapes</a:t>
+            </a:r>
+          </a:p>
+          <a:p>
+            <a:r>
+              <a:rPr dirty="0"/>
+              <a:t>- "</a:t>
+            </a:r>
+            <a:r>
+              <a:rPr dirty="0" err="1"/>
+              <a:t>Pourquoi</a:t>
+            </a:r>
+            <a:r>
+              <a:rPr dirty="0"/>
+              <a:t> pas de drag &amp; drop sur le Kanban?"  → Edit modal change le</a:t>
+            </a:r>
+          </a:p>
+          <a:p>
+            <a:r>
+              <a:rPr dirty="0"/>
+              <a:t>  status, </a:t>
+            </a:r>
+            <a:r>
+              <a:rPr dirty="0" err="1"/>
+              <a:t>drag&amp;drop</a:t>
+            </a:r>
+            <a:r>
+              <a:rPr dirty="0"/>
+              <a:t> </a:t>
+            </a:r>
+            <a:r>
+              <a:rPr dirty="0" err="1"/>
+              <a:t>est</a:t>
+            </a:r>
+            <a:r>
+              <a:rPr dirty="0"/>
+              <a:t> un nice-to-have </a:t>
+            </a:r>
+            <a:r>
+              <a:rPr dirty="0" err="1"/>
+              <a:t>qu'on</a:t>
+            </a:r>
+            <a:r>
+              <a:rPr dirty="0"/>
+              <a:t> </a:t>
+            </a:r>
+            <a:r>
+              <a:rPr dirty="0" err="1"/>
+              <a:t>n'a</a:t>
+            </a:r>
+            <a:r>
+              <a:rPr dirty="0"/>
+              <a:t> pas pris vu la deadline</a:t>
             </a:r>
           </a:p>
         </p:txBody>
@@ -1327,7 +1760,7 @@
             <a:spLocks noGrp="1"/>
           </p:cNvSpPr>
           <p:nvPr>
-            <p:ph type="sldNum" idx="5" sz="quarter"/>
+            <p:ph type="sldNum" sz="quarter" idx="5"/>
           </p:nvPr>
         </p:nvSpPr>
         <p:spPr/>
@@ -1378,10 +1811,9 @@
           <a:lstStyle/>
           <a:p>
             <a:r>
-              <a:rPr lang="en-US" smtClean="0"/>
+              <a:rPr lang="en-US"/>
               <a:t>Click to edit Master title style</a:t>
             </a:r>
-            <a:endParaRPr lang="en-US"/>
           </a:p>
         </p:txBody>
       </p:sp>
@@ -1497,10 +1929,9 @@
           </a:lstStyle>
           <a:p>
             <a:r>
-              <a:rPr lang="en-US" smtClean="0"/>
+              <a:rPr lang="en-US"/>
               <a:t>Click to edit Master subtitle style</a:t>
             </a:r>
-            <a:endParaRPr lang="en-US"/>
           </a:p>
         </p:txBody>
       </p:sp>
@@ -1521,7 +1952,7 @@
           <a:p>
             <a:fld id="{5BCAD085-E8A6-8845-BD4E-CB4CCA059FC4}" type="datetimeFigureOut">
               <a:rPr lang="en-US" smtClean="0"/>
-              <a:t>1/27/13</a:t>
+              <a:t>4/28/2026</a:t>
             </a:fld>
             <a:endParaRPr lang="en-US"/>
           </a:p>
@@ -1563,7 +1994,7 @@
           <a:p>
             <a:fld id="{C1FF6DA9-008F-8B48-92A6-B652298478BF}" type="slidenum">
               <a:rPr lang="en-US" smtClean="0"/>
-              <a:t>‹#›</a:t>
+              <a:t>‹N°›</a:t>
             </a:fld>
             <a:endParaRPr lang="en-US"/>
           </a:p>
@@ -1615,10 +2046,9 @@
           <a:lstStyle/>
           <a:p>
             <a:r>
-              <a:rPr lang="en-US" smtClean="0"/>
+              <a:rPr lang="en-US"/>
               <a:t>Click to edit Master title style</a:t>
             </a:r>
-            <a:endParaRPr lang="en-US"/>
           </a:p>
         </p:txBody>
       </p:sp>
@@ -1639,38 +2069,37 @@
           <a:p>
             <a:pPr lvl="0"/>
             <a:r>
-              <a:rPr lang="en-US" smtClean="0"/>
+              <a:rPr lang="en-US"/>
               <a:t>Click to edit Master text styles</a:t>
             </a:r>
           </a:p>
           <a:p>
             <a:pPr lvl="1"/>
             <a:r>
-              <a:rPr lang="en-US" smtClean="0"/>
+              <a:rPr lang="en-US"/>
               <a:t>Second level</a:t>
             </a:r>
           </a:p>
           <a:p>
             <a:pPr lvl="2"/>
             <a:r>
-              <a:rPr lang="en-US" smtClean="0"/>
+              <a:rPr lang="en-US"/>
               <a:t>Third level</a:t>
             </a:r>
           </a:p>
           <a:p>
             <a:pPr lvl="3"/>
             <a:r>
-              <a:rPr lang="en-US" smtClean="0"/>
+              <a:rPr lang="en-US"/>
               <a:t>Fourth level</a:t>
             </a:r>
           </a:p>
           <a:p>
             <a:pPr lvl="4"/>
             <a:r>
-              <a:rPr lang="en-US" smtClean="0"/>
+              <a:rPr lang="en-US"/>
               <a:t>Fifth level</a:t>
             </a:r>
-            <a:endParaRPr lang="en-US"/>
           </a:p>
         </p:txBody>
       </p:sp>
@@ -1691,7 +2120,7 @@
           <a:p>
             <a:fld id="{5BCAD085-E8A6-8845-BD4E-CB4CCA059FC4}" type="datetimeFigureOut">
               <a:rPr lang="en-US" smtClean="0"/>
-              <a:t>1/27/13</a:t>
+              <a:t>4/28/2026</a:t>
             </a:fld>
             <a:endParaRPr lang="en-US"/>
           </a:p>
@@ -1733,7 +2162,7 @@
           <a:p>
             <a:fld id="{C1FF6DA9-008F-8B48-92A6-B652298478BF}" type="slidenum">
               <a:rPr lang="en-US" smtClean="0"/>
-              <a:t>‹#›</a:t>
+              <a:t>‹N°›</a:t>
             </a:fld>
             <a:endParaRPr lang="en-US"/>
           </a:p>
@@ -1790,10 +2219,9 @@
           <a:lstStyle/>
           <a:p>
             <a:r>
-              <a:rPr lang="en-US" smtClean="0"/>
+              <a:rPr lang="en-US"/>
               <a:t>Click to edit Master title style</a:t>
             </a:r>
-            <a:endParaRPr lang="en-US"/>
           </a:p>
         </p:txBody>
       </p:sp>
@@ -1819,38 +2247,37 @@
           <a:p>
             <a:pPr lvl="0"/>
             <a:r>
-              <a:rPr lang="en-US" smtClean="0"/>
+              <a:rPr lang="en-US"/>
               <a:t>Click to edit Master text styles</a:t>
             </a:r>
           </a:p>
           <a:p>
             <a:pPr lvl="1"/>
             <a:r>
-              <a:rPr lang="en-US" smtClean="0"/>
+              <a:rPr lang="en-US"/>
               <a:t>Second level</a:t>
             </a:r>
           </a:p>
           <a:p>
             <a:pPr lvl="2"/>
             <a:r>
-              <a:rPr lang="en-US" smtClean="0"/>
+              <a:rPr lang="en-US"/>
               <a:t>Third level</a:t>
             </a:r>
           </a:p>
           <a:p>
             <a:pPr lvl="3"/>
             <a:r>
-              <a:rPr lang="en-US" smtClean="0"/>
+              <a:rPr lang="en-US"/>
               <a:t>Fourth level</a:t>
             </a:r>
           </a:p>
           <a:p>
             <a:pPr lvl="4"/>
             <a:r>
-              <a:rPr lang="en-US" smtClean="0"/>
+              <a:rPr lang="en-US"/>
               <a:t>Fifth level</a:t>
             </a:r>
-            <a:endParaRPr lang="en-US"/>
           </a:p>
         </p:txBody>
       </p:sp>
@@ -1871,7 +2298,7 @@
           <a:p>
             <a:fld id="{5BCAD085-E8A6-8845-BD4E-CB4CCA059FC4}" type="datetimeFigureOut">
               <a:rPr lang="en-US" smtClean="0"/>
-              <a:t>1/27/13</a:t>
+              <a:t>4/28/2026</a:t>
             </a:fld>
             <a:endParaRPr lang="en-US"/>
           </a:p>
@@ -1913,7 +2340,7 @@
           <a:p>
             <a:fld id="{C1FF6DA9-008F-8B48-92A6-B652298478BF}" type="slidenum">
               <a:rPr lang="en-US" smtClean="0"/>
-              <a:t>‹#›</a:t>
+              <a:t>‹N°›</a:t>
             </a:fld>
             <a:endParaRPr lang="en-US"/>
           </a:p>
@@ -1965,10 +2392,9 @@
           <a:lstStyle/>
           <a:p>
             <a:r>
-              <a:rPr lang="en-US" smtClean="0"/>
+              <a:rPr lang="en-US"/>
               <a:t>Click to edit Master title style</a:t>
             </a:r>
-            <a:endParaRPr lang="en-US"/>
           </a:p>
         </p:txBody>
       </p:sp>
@@ -1989,38 +2415,37 @@
           <a:p>
             <a:pPr lvl="0"/>
             <a:r>
-              <a:rPr lang="en-US" smtClean="0"/>
+              <a:rPr lang="en-US"/>
               <a:t>Click to edit Master text styles</a:t>
             </a:r>
           </a:p>
           <a:p>
             <a:pPr lvl="1"/>
             <a:r>
-              <a:rPr lang="en-US" smtClean="0"/>
+              <a:rPr lang="en-US"/>
               <a:t>Second level</a:t>
             </a:r>
           </a:p>
           <a:p>
             <a:pPr lvl="2"/>
             <a:r>
-              <a:rPr lang="en-US" smtClean="0"/>
+              <a:rPr lang="en-US"/>
               <a:t>Third level</a:t>
             </a:r>
           </a:p>
           <a:p>
             <a:pPr lvl="3"/>
             <a:r>
-              <a:rPr lang="en-US" smtClean="0"/>
+              <a:rPr lang="en-US"/>
               <a:t>Fourth level</a:t>
             </a:r>
           </a:p>
           <a:p>
             <a:pPr lvl="4"/>
             <a:r>
-              <a:rPr lang="en-US" smtClean="0"/>
+              <a:rPr lang="en-US"/>
               <a:t>Fifth level</a:t>
             </a:r>
-            <a:endParaRPr lang="en-US"/>
           </a:p>
         </p:txBody>
       </p:sp>
@@ -2041,7 +2466,7 @@
           <a:p>
             <a:fld id="{5BCAD085-E8A6-8845-BD4E-CB4CCA059FC4}" type="datetimeFigureOut">
               <a:rPr lang="en-US" smtClean="0"/>
-              <a:t>1/27/13</a:t>
+              <a:t>4/28/2026</a:t>
             </a:fld>
             <a:endParaRPr lang="en-US"/>
           </a:p>
@@ -2083,7 +2508,7 @@
           <a:p>
             <a:fld id="{C1FF6DA9-008F-8B48-92A6-B652298478BF}" type="slidenum">
               <a:rPr lang="en-US" smtClean="0"/>
-              <a:t>‹#›</a:t>
+              <a:t>‹N°›</a:t>
             </a:fld>
             <a:endParaRPr lang="en-US"/>
           </a:p>
@@ -2144,10 +2569,9 @@
           </a:lstStyle>
           <a:p>
             <a:r>
-              <a:rPr lang="en-US" smtClean="0"/>
+              <a:rPr lang="en-US"/>
               <a:t>Click to edit Master title style</a:t>
             </a:r>
-            <a:endParaRPr lang="en-US"/>
           </a:p>
         </p:txBody>
       </p:sp>
@@ -2264,7 +2688,7 @@
           <a:p>
             <a:pPr lvl="0"/>
             <a:r>
-              <a:rPr lang="en-US" smtClean="0"/>
+              <a:rPr lang="en-US"/>
               <a:t>Click to edit Master text styles</a:t>
             </a:r>
           </a:p>
@@ -2287,7 +2711,7 @@
           <a:p>
             <a:fld id="{5BCAD085-E8A6-8845-BD4E-CB4CCA059FC4}" type="datetimeFigureOut">
               <a:rPr lang="en-US" smtClean="0"/>
-              <a:t>1/27/13</a:t>
+              <a:t>4/28/2026</a:t>
             </a:fld>
             <a:endParaRPr lang="en-US"/>
           </a:p>
@@ -2329,7 +2753,7 @@
           <a:p>
             <a:fld id="{C1FF6DA9-008F-8B48-92A6-B652298478BF}" type="slidenum">
               <a:rPr lang="en-US" smtClean="0"/>
-              <a:t>‹#›</a:t>
+              <a:t>‹N°›</a:t>
             </a:fld>
             <a:endParaRPr lang="en-US"/>
           </a:p>
@@ -2381,10 +2805,9 @@
           <a:lstStyle/>
           <a:p>
             <a:r>
-              <a:rPr lang="en-US" smtClean="0"/>
+              <a:rPr lang="en-US"/>
               <a:t>Click to edit Master title style</a:t>
             </a:r>
-            <a:endParaRPr lang="en-US"/>
           </a:p>
         </p:txBody>
       </p:sp>
@@ -2438,38 +2861,37 @@
           <a:p>
             <a:pPr lvl="0"/>
             <a:r>
-              <a:rPr lang="en-US" smtClean="0"/>
+              <a:rPr lang="en-US"/>
               <a:t>Click to edit Master text styles</a:t>
             </a:r>
           </a:p>
           <a:p>
             <a:pPr lvl="1"/>
             <a:r>
-              <a:rPr lang="en-US" smtClean="0"/>
+              <a:rPr lang="en-US"/>
               <a:t>Second level</a:t>
             </a:r>
           </a:p>
           <a:p>
             <a:pPr lvl="2"/>
             <a:r>
-              <a:rPr lang="en-US" smtClean="0"/>
+              <a:rPr lang="en-US"/>
               <a:t>Third level</a:t>
             </a:r>
           </a:p>
           <a:p>
             <a:pPr lvl="3"/>
             <a:r>
-              <a:rPr lang="en-US" smtClean="0"/>
+              <a:rPr lang="en-US"/>
               <a:t>Fourth level</a:t>
             </a:r>
           </a:p>
           <a:p>
             <a:pPr lvl="4"/>
             <a:r>
-              <a:rPr lang="en-US" smtClean="0"/>
+              <a:rPr lang="en-US"/>
               <a:t>Fifth level</a:t>
             </a:r>
-            <a:endParaRPr lang="en-US"/>
           </a:p>
         </p:txBody>
       </p:sp>
@@ -2523,38 +2945,37 @@
           <a:p>
             <a:pPr lvl="0"/>
             <a:r>
-              <a:rPr lang="en-US" smtClean="0"/>
+              <a:rPr lang="en-US"/>
               <a:t>Click to edit Master text styles</a:t>
             </a:r>
           </a:p>
           <a:p>
             <a:pPr lvl="1"/>
             <a:r>
-              <a:rPr lang="en-US" smtClean="0"/>
+              <a:rPr lang="en-US"/>
               <a:t>Second level</a:t>
             </a:r>
           </a:p>
           <a:p>
             <a:pPr lvl="2"/>
             <a:r>
-              <a:rPr lang="en-US" smtClean="0"/>
+              <a:rPr lang="en-US"/>
               <a:t>Third level</a:t>
             </a:r>
           </a:p>
           <a:p>
             <a:pPr lvl="3"/>
             <a:r>
-              <a:rPr lang="en-US" smtClean="0"/>
+              <a:rPr lang="en-US"/>
               <a:t>Fourth level</a:t>
             </a:r>
           </a:p>
           <a:p>
             <a:pPr lvl="4"/>
             <a:r>
-              <a:rPr lang="en-US" smtClean="0"/>
+              <a:rPr lang="en-US"/>
               <a:t>Fifth level</a:t>
             </a:r>
-            <a:endParaRPr lang="en-US"/>
           </a:p>
         </p:txBody>
       </p:sp>
@@ -2575,7 +2996,7 @@
           <a:p>
             <a:fld id="{5BCAD085-E8A6-8845-BD4E-CB4CCA059FC4}" type="datetimeFigureOut">
               <a:rPr lang="en-US" smtClean="0"/>
-              <a:t>1/27/13</a:t>
+              <a:t>4/28/2026</a:t>
             </a:fld>
             <a:endParaRPr lang="en-US"/>
           </a:p>
@@ -2617,7 +3038,7 @@
           <a:p>
             <a:fld id="{C1FF6DA9-008F-8B48-92A6-B652298478BF}" type="slidenum">
               <a:rPr lang="en-US" smtClean="0"/>
-              <a:t>‹#›</a:t>
+              <a:t>‹N°›</a:t>
             </a:fld>
             <a:endParaRPr lang="en-US"/>
           </a:p>
@@ -2673,10 +3094,9 @@
           </a:lstStyle>
           <a:p>
             <a:r>
-              <a:rPr lang="en-US" smtClean="0"/>
+              <a:rPr lang="en-US"/>
               <a:t>Click to edit Master title style</a:t>
             </a:r>
-            <a:endParaRPr lang="en-US"/>
           </a:p>
         </p:txBody>
       </p:sp>
@@ -2739,7 +3159,7 @@
           <a:p>
             <a:pPr lvl="0"/>
             <a:r>
-              <a:rPr lang="en-US" smtClean="0"/>
+              <a:rPr lang="en-US"/>
               <a:t>Click to edit Master text styles</a:t>
             </a:r>
           </a:p>
@@ -2795,38 +3215,37 @@
           <a:p>
             <a:pPr lvl="0"/>
             <a:r>
-              <a:rPr lang="en-US" smtClean="0"/>
+              <a:rPr lang="en-US"/>
               <a:t>Click to edit Master text styles</a:t>
             </a:r>
           </a:p>
           <a:p>
             <a:pPr lvl="1"/>
             <a:r>
-              <a:rPr lang="en-US" smtClean="0"/>
+              <a:rPr lang="en-US"/>
               <a:t>Second level</a:t>
             </a:r>
           </a:p>
           <a:p>
             <a:pPr lvl="2"/>
             <a:r>
-              <a:rPr lang="en-US" smtClean="0"/>
+              <a:rPr lang="en-US"/>
               <a:t>Third level</a:t>
             </a:r>
           </a:p>
           <a:p>
             <a:pPr lvl="3"/>
             <a:r>
-              <a:rPr lang="en-US" smtClean="0"/>
+              <a:rPr lang="en-US"/>
               <a:t>Fourth level</a:t>
             </a:r>
           </a:p>
           <a:p>
             <a:pPr lvl="4"/>
             <a:r>
-              <a:rPr lang="en-US" smtClean="0"/>
+              <a:rPr lang="en-US"/>
               <a:t>Fifth level</a:t>
             </a:r>
-            <a:endParaRPr lang="en-US"/>
           </a:p>
         </p:txBody>
       </p:sp>
@@ -2889,7 +3308,7 @@
           <a:p>
             <a:pPr lvl="0"/>
             <a:r>
-              <a:rPr lang="en-US" smtClean="0"/>
+              <a:rPr lang="en-US"/>
               <a:t>Click to edit Master text styles</a:t>
             </a:r>
           </a:p>
@@ -2945,38 +3364,37 @@
           <a:p>
             <a:pPr lvl="0"/>
             <a:r>
-              <a:rPr lang="en-US" smtClean="0"/>
+              <a:rPr lang="en-US"/>
               <a:t>Click to edit Master text styles</a:t>
             </a:r>
           </a:p>
           <a:p>
             <a:pPr lvl="1"/>
             <a:r>
-              <a:rPr lang="en-US" smtClean="0"/>
+              <a:rPr lang="en-US"/>
               <a:t>Second level</a:t>
             </a:r>
           </a:p>
           <a:p>
             <a:pPr lvl="2"/>
             <a:r>
-              <a:rPr lang="en-US" smtClean="0"/>
+              <a:rPr lang="en-US"/>
               <a:t>Third level</a:t>
             </a:r>
           </a:p>
           <a:p>
             <a:pPr lvl="3"/>
             <a:r>
-              <a:rPr lang="en-US" smtClean="0"/>
+              <a:rPr lang="en-US"/>
               <a:t>Fourth level</a:t>
             </a:r>
           </a:p>
           <a:p>
             <a:pPr lvl="4"/>
             <a:r>
-              <a:rPr lang="en-US" smtClean="0"/>
+              <a:rPr lang="en-US"/>
               <a:t>Fifth level</a:t>
             </a:r>
-            <a:endParaRPr lang="en-US"/>
           </a:p>
         </p:txBody>
       </p:sp>
@@ -2997,7 +3415,7 @@
           <a:p>
             <a:fld id="{5BCAD085-E8A6-8845-BD4E-CB4CCA059FC4}" type="datetimeFigureOut">
               <a:rPr lang="en-US" smtClean="0"/>
-              <a:t>1/27/13</a:t>
+              <a:t>4/28/2026</a:t>
             </a:fld>
             <a:endParaRPr lang="en-US"/>
           </a:p>
@@ -3039,7 +3457,7 @@
           <a:p>
             <a:fld id="{C1FF6DA9-008F-8B48-92A6-B652298478BF}" type="slidenum">
               <a:rPr lang="en-US" smtClean="0"/>
-              <a:t>‹#›</a:t>
+              <a:t>‹N°›</a:t>
             </a:fld>
             <a:endParaRPr lang="en-US"/>
           </a:p>
@@ -3091,10 +3509,9 @@
           <a:lstStyle/>
           <a:p>
             <a:r>
-              <a:rPr lang="en-US" smtClean="0"/>
+              <a:rPr lang="en-US"/>
               <a:t>Click to edit Master title style</a:t>
             </a:r>
-            <a:endParaRPr lang="en-US"/>
           </a:p>
         </p:txBody>
       </p:sp>
@@ -3115,7 +3532,7 @@
           <a:p>
             <a:fld id="{5BCAD085-E8A6-8845-BD4E-CB4CCA059FC4}" type="datetimeFigureOut">
               <a:rPr lang="en-US" smtClean="0"/>
-              <a:t>1/27/13</a:t>
+              <a:t>4/28/2026</a:t>
             </a:fld>
             <a:endParaRPr lang="en-US"/>
           </a:p>
@@ -3157,7 +3574,7 @@
           <a:p>
             <a:fld id="{C1FF6DA9-008F-8B48-92A6-B652298478BF}" type="slidenum">
               <a:rPr lang="en-US" smtClean="0"/>
-              <a:t>‹#›</a:t>
+              <a:t>‹N°›</a:t>
             </a:fld>
             <a:endParaRPr lang="en-US"/>
           </a:p>
@@ -3210,7 +3627,7 @@
           <a:p>
             <a:fld id="{5BCAD085-E8A6-8845-BD4E-CB4CCA059FC4}" type="datetimeFigureOut">
               <a:rPr lang="en-US" smtClean="0"/>
-              <a:t>1/27/13</a:t>
+              <a:t>4/28/2026</a:t>
             </a:fld>
             <a:endParaRPr lang="en-US"/>
           </a:p>
@@ -3252,7 +3669,7 @@
           <a:p>
             <a:fld id="{C1FF6DA9-008F-8B48-92A6-B652298478BF}" type="slidenum">
               <a:rPr lang="en-US" smtClean="0"/>
-              <a:t>‹#›</a:t>
+              <a:t>‹N°›</a:t>
             </a:fld>
             <a:endParaRPr lang="en-US"/>
           </a:p>
@@ -3313,10 +3730,9 @@
           </a:lstStyle>
           <a:p>
             <a:r>
-              <a:rPr lang="en-US" smtClean="0"/>
+              <a:rPr lang="en-US"/>
               <a:t>Click to edit Master title style</a:t>
             </a:r>
-            <a:endParaRPr lang="en-US"/>
           </a:p>
         </p:txBody>
       </p:sp>
@@ -3370,38 +3786,37 @@
           <a:p>
             <a:pPr lvl="0"/>
             <a:r>
-              <a:rPr lang="en-US" smtClean="0"/>
+              <a:rPr lang="en-US"/>
               <a:t>Click to edit Master text styles</a:t>
             </a:r>
           </a:p>
           <a:p>
             <a:pPr lvl="1"/>
             <a:r>
-              <a:rPr lang="en-US" smtClean="0"/>
+              <a:rPr lang="en-US"/>
               <a:t>Second level</a:t>
             </a:r>
           </a:p>
           <a:p>
             <a:pPr lvl="2"/>
             <a:r>
-              <a:rPr lang="en-US" smtClean="0"/>
+              <a:rPr lang="en-US"/>
               <a:t>Third level</a:t>
             </a:r>
           </a:p>
           <a:p>
             <a:pPr lvl="3"/>
             <a:r>
-              <a:rPr lang="en-US" smtClean="0"/>
+              <a:rPr lang="en-US"/>
               <a:t>Fourth level</a:t>
             </a:r>
           </a:p>
           <a:p>
             <a:pPr lvl="4"/>
             <a:r>
-              <a:rPr lang="en-US" smtClean="0"/>
+              <a:rPr lang="en-US"/>
               <a:t>Fifth level</a:t>
             </a:r>
-            <a:endParaRPr lang="en-US"/>
           </a:p>
         </p:txBody>
       </p:sp>
@@ -3464,7 +3879,7 @@
           <a:p>
             <a:pPr lvl="0"/>
             <a:r>
-              <a:rPr lang="en-US" smtClean="0"/>
+              <a:rPr lang="en-US"/>
               <a:t>Click to edit Master text styles</a:t>
             </a:r>
           </a:p>
@@ -3487,7 +3902,7 @@
           <a:p>
             <a:fld id="{5BCAD085-E8A6-8845-BD4E-CB4CCA059FC4}" type="datetimeFigureOut">
               <a:rPr lang="en-US" smtClean="0"/>
-              <a:t>1/27/13</a:t>
+              <a:t>4/28/2026</a:t>
             </a:fld>
             <a:endParaRPr lang="en-US"/>
           </a:p>
@@ -3529,7 +3944,7 @@
           <a:p>
             <a:fld id="{C1FF6DA9-008F-8B48-92A6-B652298478BF}" type="slidenum">
               <a:rPr lang="en-US" smtClean="0"/>
-              <a:t>‹#›</a:t>
+              <a:t>‹N°›</a:t>
             </a:fld>
             <a:endParaRPr lang="en-US"/>
           </a:p>
@@ -3590,10 +4005,9 @@
           </a:lstStyle>
           <a:p>
             <a:r>
-              <a:rPr lang="en-US" smtClean="0"/>
+              <a:rPr lang="en-US"/>
               <a:t>Click to edit Master title style</a:t>
             </a:r>
-            <a:endParaRPr lang="en-US"/>
           </a:p>
         </p:txBody>
       </p:sp>
@@ -3717,7 +4131,7 @@
           <a:p>
             <a:pPr lvl="0"/>
             <a:r>
-              <a:rPr lang="en-US" smtClean="0"/>
+              <a:rPr lang="en-US"/>
               <a:t>Click to edit Master text styles</a:t>
             </a:r>
           </a:p>
@@ -3740,7 +4154,7 @@
           <a:p>
             <a:fld id="{5BCAD085-E8A6-8845-BD4E-CB4CCA059FC4}" type="datetimeFigureOut">
               <a:rPr lang="en-US" smtClean="0"/>
-              <a:t>1/27/13</a:t>
+              <a:t>4/28/2026</a:t>
             </a:fld>
             <a:endParaRPr lang="en-US"/>
           </a:p>
@@ -3782,7 +4196,7 @@
           <a:p>
             <a:fld id="{C1FF6DA9-008F-8B48-92A6-B652298478BF}" type="slidenum">
               <a:rPr lang="en-US" smtClean="0"/>
-              <a:t>‹#›</a:t>
+              <a:t>‹N°›</a:t>
             </a:fld>
             <a:endParaRPr lang="en-US"/>
           </a:p>
@@ -3849,10 +4263,9 @@
           <a:lstStyle/>
           <a:p>
             <a:r>
-              <a:rPr lang="en-US" smtClean="0"/>
+              <a:rPr lang="en-US"/>
               <a:t>Click to edit Master title style</a:t>
             </a:r>
-            <a:endParaRPr lang="en-US"/>
           </a:p>
         </p:txBody>
       </p:sp>
@@ -3883,38 +4296,37 @@
           <a:p>
             <a:pPr lvl="0"/>
             <a:r>
-              <a:rPr lang="en-US" smtClean="0"/>
+              <a:rPr lang="en-US"/>
               <a:t>Click to edit Master text styles</a:t>
             </a:r>
           </a:p>
           <a:p>
             <a:pPr lvl="1"/>
             <a:r>
-              <a:rPr lang="en-US" smtClean="0"/>
+              <a:rPr lang="en-US"/>
               <a:t>Second level</a:t>
             </a:r>
           </a:p>
           <a:p>
             <a:pPr lvl="2"/>
             <a:r>
-              <a:rPr lang="en-US" smtClean="0"/>
+              <a:rPr lang="en-US"/>
               <a:t>Third level</a:t>
             </a:r>
           </a:p>
           <a:p>
             <a:pPr lvl="3"/>
             <a:r>
-              <a:rPr lang="en-US" smtClean="0"/>
+              <a:rPr lang="en-US"/>
               <a:t>Fourth level</a:t>
             </a:r>
           </a:p>
           <a:p>
             <a:pPr lvl="4"/>
             <a:r>
-              <a:rPr lang="en-US" smtClean="0"/>
+              <a:rPr lang="en-US"/>
               <a:t>Fifth level</a:t>
             </a:r>
-            <a:endParaRPr lang="en-US"/>
           </a:p>
         </p:txBody>
       </p:sp>
@@ -3953,7 +4365,7 @@
           <a:p>
             <a:fld id="{5BCAD085-E8A6-8845-BD4E-CB4CCA059FC4}" type="datetimeFigureOut">
               <a:rPr lang="en-US" smtClean="0"/>
-              <a:t>1/27/13</a:t>
+              <a:t>4/28/2026</a:t>
             </a:fld>
             <a:endParaRPr lang="en-US"/>
           </a:p>
@@ -4031,7 +4443,7 @@
           <a:p>
             <a:fld id="{C1FF6DA9-008F-8B48-92A6-B652298478BF}" type="slidenum">
               <a:rPr lang="en-US" smtClean="0"/>
-              <a:t>‹#›</a:t>
+              <a:t>‹N°›</a:t>
             </a:fld>
             <a:endParaRPr lang="en-US"/>
           </a:p>
@@ -4312,7 +4724,7 @@
 </file>
 
 <file path=ppt/slides/slide1.xml><?xml version="1.0" encoding="utf-8"?>
-<p:sld xmlns:a="http://schemas.openxmlformats.org/drawingml/2006/main" xmlns:p="http://schemas.openxmlformats.org/presentationml/2006/main" xmlns:r="http://schemas.openxmlformats.org/officeDocument/2006/relationships">
+<p:sld xmlns:a="http://schemas.openxmlformats.org/drawingml/2006/main" xmlns:r="http://schemas.openxmlformats.org/officeDocument/2006/relationships" xmlns:p="http://schemas.openxmlformats.org/presentationml/2006/main">
   <p:cSld>
     <p:bg>
       <p:bgPr>
@@ -4328,7 +4740,14 @@
         <p:cNvGrpSpPr/>
         <p:nvPr/>
       </p:nvGrpSpPr>
-      <p:grpSpPr/>
+      <p:grpSpPr>
+        <a:xfrm>
+          <a:off x="0" y="0"/>
+          <a:ext cx="0" cy="0"/>
+          <a:chOff x="0" y="0"/>
+          <a:chExt cx="0" cy="0"/>
+        </a:xfrm>
+      </p:grpSpPr>
       <p:sp>
         <p:nvSpPr>
           <p:cNvPr id="2" name="TextBox 1"/>
@@ -4346,7 +4765,7 @@
           <a:noFill/>
         </p:spPr>
         <p:txBody>
-          <a:bodyPr wrap="square" lIns="0" rIns="0" tIns="0" bIns="0">
+          <a:bodyPr wrap="square" lIns="0" tIns="0" rIns="0" bIns="0">
             <a:spAutoFit/>
           </a:bodyPr>
           <a:lstStyle/>
@@ -4388,7 +4807,7 @@
           <a:noFill/>
         </p:spPr>
         <p:txBody>
-          <a:bodyPr wrap="square" lIns="0" rIns="0" tIns="0" bIns="0">
+          <a:bodyPr wrap="square" lIns="0" tIns="0" rIns="0" bIns="0">
             <a:spAutoFit/>
           </a:bodyPr>
           <a:lstStyle/>
@@ -4430,7 +4849,7 @@
           <a:noFill/>
         </p:spPr>
         <p:txBody>
-          <a:bodyPr wrap="square" lIns="0" rIns="0" tIns="0" bIns="0">
+          <a:bodyPr wrap="square" lIns="0" tIns="0" rIns="0" bIns="0">
             <a:spAutoFit/>
           </a:bodyPr>
           <a:lstStyle/>
@@ -4472,7 +4891,7 @@
           <a:noFill/>
         </p:spPr>
         <p:txBody>
-          <a:bodyPr wrap="square" lIns="0" rIns="0" tIns="0" bIns="0">
+          <a:bodyPr wrap="square" lIns="0" tIns="0" rIns="0" bIns="0">
             <a:spAutoFit/>
           </a:bodyPr>
           <a:lstStyle/>
@@ -4514,7 +4933,7 @@
           <a:noFill/>
         </p:spPr>
         <p:txBody>
-          <a:bodyPr wrap="square" lIns="0" rIns="0" tIns="0" bIns="0">
+          <a:bodyPr wrap="square" lIns="0" tIns="0" rIns="0" bIns="0">
             <a:spAutoFit/>
           </a:bodyPr>
           <a:lstStyle/>
@@ -4556,7 +4975,7 @@
           <a:noFill/>
         </p:spPr>
         <p:txBody>
-          <a:bodyPr wrap="square" lIns="0" rIns="0" tIns="0" bIns="0">
+          <a:bodyPr wrap="square" lIns="0" tIns="0" rIns="0" bIns="0">
             <a:spAutoFit/>
           </a:bodyPr>
           <a:lstStyle/>
@@ -4598,7 +5017,7 @@
           <a:noFill/>
         </p:spPr>
         <p:txBody>
-          <a:bodyPr wrap="square" lIns="0" rIns="0" tIns="0" bIns="0">
+          <a:bodyPr wrap="square" lIns="0" tIns="0" rIns="0" bIns="0">
             <a:spAutoFit/>
           </a:bodyPr>
           <a:lstStyle/>
@@ -4640,7 +5059,7 @@
           <a:noFill/>
         </p:spPr>
         <p:txBody>
-          <a:bodyPr wrap="square" lIns="0" rIns="0" tIns="0" bIns="0">
+          <a:bodyPr wrap="square" lIns="0" tIns="0" rIns="0" bIns="0">
             <a:spAutoFit/>
           </a:bodyPr>
           <a:lstStyle/>
@@ -4674,7 +5093,7 @@
 </file>
 
 <file path=ppt/slides/slide2.xml><?xml version="1.0" encoding="utf-8"?>
-<p:sld xmlns:a="http://schemas.openxmlformats.org/drawingml/2006/main" xmlns:p="http://schemas.openxmlformats.org/presentationml/2006/main" xmlns:r="http://schemas.openxmlformats.org/officeDocument/2006/relationships">
+<p:sld xmlns:a="http://schemas.openxmlformats.org/drawingml/2006/main" xmlns:r="http://schemas.openxmlformats.org/officeDocument/2006/relationships" xmlns:p="http://schemas.openxmlformats.org/presentationml/2006/main">
   <p:cSld>
     <p:bg>
       <p:bgPr>
@@ -4690,7 +5109,14 @@
         <p:cNvGrpSpPr/>
         <p:nvPr/>
       </p:nvGrpSpPr>
-      <p:grpSpPr/>
+      <p:grpSpPr>
+        <a:xfrm>
+          <a:off x="0" y="0"/>
+          <a:ext cx="0" cy="0"/>
+          <a:chOff x="0" y="0"/>
+          <a:chExt cx="0" cy="0"/>
+        </a:xfrm>
+      </p:grpSpPr>
       <p:sp>
         <p:nvSpPr>
           <p:cNvPr id="2" name="TextBox 1"/>
@@ -4708,7 +5134,7 @@
           <a:noFill/>
         </p:spPr>
         <p:txBody>
-          <a:bodyPr wrap="square" lIns="0" rIns="0" tIns="0" bIns="0">
+          <a:bodyPr wrap="square" lIns="0" tIns="0" rIns="0" bIns="0">
             <a:spAutoFit/>
           </a:bodyPr>
           <a:lstStyle/>
@@ -4750,7 +5176,7 @@
           <a:noFill/>
         </p:spPr>
         <p:txBody>
-          <a:bodyPr wrap="square" lIns="0" rIns="0" tIns="0" bIns="0">
+          <a:bodyPr wrap="square" lIns="0" tIns="0" rIns="0" bIns="0">
             <a:spAutoFit/>
           </a:bodyPr>
           <a:lstStyle/>
@@ -4820,6 +5246,7 @@
           <a:lstStyle/>
           <a:p>
             <a:pPr algn="ctr"/>
+            <a:endParaRPr/>
           </a:p>
         </p:txBody>
       </p:sp>
@@ -4840,7 +5267,7 @@
           <a:noFill/>
         </p:spPr>
         <p:txBody>
-          <a:bodyPr wrap="square" lIns="0" rIns="0" tIns="0" bIns="0">
+          <a:bodyPr wrap="square" lIns="0" tIns="0" rIns="0" bIns="0">
             <a:spAutoFit/>
           </a:bodyPr>
           <a:lstStyle/>
@@ -4882,7 +5309,7 @@
           <a:noFill/>
         </p:spPr>
         <p:txBody>
-          <a:bodyPr wrap="square" lIns="0" rIns="0" tIns="0" bIns="0">
+          <a:bodyPr wrap="square" lIns="0" tIns="0" rIns="0" bIns="0">
             <a:spAutoFit/>
           </a:bodyPr>
           <a:lstStyle/>
@@ -4914,6 +5341,22 @@
                 <a:spcPts val="0"/>
               </a:spcAft>
             </a:pPr>
+            <a:endParaRPr sz="1500" b="0" i="0">
+              <a:solidFill>
+                <a:srgbClr val="F4F4F5"/>
+              </a:solidFill>
+              <a:latin typeface="Calibri"/>
+            </a:endParaRPr>
+          </a:p>
+          <a:p>
+            <a:pPr algn="l">
+              <a:spcBef>
+                <a:spcPts val="0"/>
+              </a:spcBef>
+              <a:spcAft>
+                <a:spcPts val="0"/>
+              </a:spcAft>
+            </a:pPr>
             <a:r>
               <a:rPr sz="1500" b="0" i="0">
                 <a:solidFill>
@@ -4921,8 +5364,24 @@
                 </a:solidFill>
                 <a:latin typeface="Calibri"/>
               </a:rPr>
-              <a:t/>
-            </a:r>
+              <a:t>•  Login with token-based session security</a:t>
+            </a:r>
+          </a:p>
+          <a:p>
+            <a:pPr algn="l">
+              <a:spcBef>
+                <a:spcPts val="0"/>
+              </a:spcBef>
+              <a:spcAft>
+                <a:spcPts val="0"/>
+              </a:spcAft>
+            </a:pPr>
+            <a:endParaRPr sz="1500" b="0" i="0">
+              <a:solidFill>
+                <a:srgbClr val="F4F4F5"/>
+              </a:solidFill>
+              <a:latin typeface="Calibri"/>
+            </a:endParaRPr>
           </a:p>
           <a:p>
             <a:pPr algn="l">
@@ -4940,8 +5399,24 @@
                 </a:solidFill>
                 <a:latin typeface="Calibri"/>
               </a:rPr>
-              <a:t>•  Login with token-based session security</a:t>
-            </a:r>
+              <a:t>•  Three task statuses: To Do / Doing / Done</a:t>
+            </a:r>
+          </a:p>
+          <a:p>
+            <a:pPr algn="l">
+              <a:spcBef>
+                <a:spcPts val="0"/>
+              </a:spcBef>
+              <a:spcAft>
+                <a:spcPts val="0"/>
+              </a:spcAft>
+            </a:pPr>
+            <a:endParaRPr sz="1500" b="0" i="0">
+              <a:solidFill>
+                <a:srgbClr val="F4F4F5"/>
+              </a:solidFill>
+              <a:latin typeface="Calibri"/>
+            </a:endParaRPr>
           </a:p>
           <a:p>
             <a:pPr algn="l">
@@ -4959,8 +5434,24 @@
                 </a:solidFill>
                 <a:latin typeface="Calibri"/>
               </a:rPr>
-              <a:t/>
-            </a:r>
+              <a:t>•  Secure coding practices</a:t>
+            </a:r>
+          </a:p>
+          <a:p>
+            <a:pPr algn="l">
+              <a:spcBef>
+                <a:spcPts val="0"/>
+              </a:spcBef>
+              <a:spcAft>
+                <a:spcPts val="0"/>
+              </a:spcAft>
+            </a:pPr>
+            <a:endParaRPr sz="1500" b="0" i="0">
+              <a:solidFill>
+                <a:srgbClr val="F4F4F5"/>
+              </a:solidFill>
+              <a:latin typeface="Calibri"/>
+            </a:endParaRPr>
           </a:p>
           <a:p>
             <a:pPr algn="l">
@@ -4978,82 +5469,6 @@
                 </a:solidFill>
                 <a:latin typeface="Calibri"/>
               </a:rPr>
-              <a:t>•  Three task statuses: To Do / Doing / Done</a:t>
-            </a:r>
-          </a:p>
-          <a:p>
-            <a:pPr algn="l">
-              <a:spcBef>
-                <a:spcPts val="0"/>
-              </a:spcBef>
-              <a:spcAft>
-                <a:spcPts val="0"/>
-              </a:spcAft>
-            </a:pPr>
-            <a:r>
-              <a:rPr sz="1500" b="0" i="0">
-                <a:solidFill>
-                  <a:srgbClr val="F4F4F5"/>
-                </a:solidFill>
-                <a:latin typeface="Calibri"/>
-              </a:rPr>
-              <a:t/>
-            </a:r>
-          </a:p>
-          <a:p>
-            <a:pPr algn="l">
-              <a:spcBef>
-                <a:spcPts val="0"/>
-              </a:spcBef>
-              <a:spcAft>
-                <a:spcPts val="0"/>
-              </a:spcAft>
-            </a:pPr>
-            <a:r>
-              <a:rPr sz="1500" b="0" i="0">
-                <a:solidFill>
-                  <a:srgbClr val="F4F4F5"/>
-                </a:solidFill>
-                <a:latin typeface="Calibri"/>
-              </a:rPr>
-              <a:t>•  Secure coding practices</a:t>
-            </a:r>
-          </a:p>
-          <a:p>
-            <a:pPr algn="l">
-              <a:spcBef>
-                <a:spcPts val="0"/>
-              </a:spcBef>
-              <a:spcAft>
-                <a:spcPts val="0"/>
-              </a:spcAft>
-            </a:pPr>
-            <a:r>
-              <a:rPr sz="1500" b="0" i="0">
-                <a:solidFill>
-                  <a:srgbClr val="F4F4F5"/>
-                </a:solidFill>
-                <a:latin typeface="Calibri"/>
-              </a:rPr>
-              <a:t/>
-            </a:r>
-          </a:p>
-          <a:p>
-            <a:pPr algn="l">
-              <a:spcBef>
-                <a:spcPts val="0"/>
-              </a:spcBef>
-              <a:spcAft>
-                <a:spcPts val="0"/>
-              </a:spcAft>
-            </a:pPr>
-            <a:r>
-              <a:rPr sz="1500" b="0" i="0">
-                <a:solidFill>
-                  <a:srgbClr val="F4F4F5"/>
-                </a:solidFill>
-                <a:latin typeface="Calibri"/>
-              </a:rPr>
               <a:t>•  Front  ↔  back integration</a:t>
             </a:r>
           </a:p>
@@ -5066,15 +5481,12 @@
                 <a:spcPts val="0"/>
               </a:spcAft>
             </a:pPr>
-            <a:r>
-              <a:rPr sz="1500" b="0" i="0">
-                <a:solidFill>
-                  <a:srgbClr val="F4F4F5"/>
-                </a:solidFill>
-                <a:latin typeface="Calibri"/>
-              </a:rPr>
-              <a:t/>
-            </a:r>
+            <a:endParaRPr sz="1500" b="0" i="0">
+              <a:solidFill>
+                <a:srgbClr val="F4F4F5"/>
+              </a:solidFill>
+              <a:latin typeface="Calibri"/>
+            </a:endParaRPr>
           </a:p>
           <a:p>
             <a:pPr algn="l">
@@ -5142,6 +5554,7 @@
           <a:lstStyle/>
           <a:p>
             <a:pPr algn="ctr"/>
+            <a:endParaRPr/>
           </a:p>
         </p:txBody>
       </p:sp>
@@ -5162,7 +5575,7 @@
           <a:noFill/>
         </p:spPr>
         <p:txBody>
-          <a:bodyPr wrap="square" lIns="0" rIns="0" tIns="0" bIns="0">
+          <a:bodyPr wrap="square" lIns="0" tIns="0" rIns="0" bIns="0">
             <a:spAutoFit/>
           </a:bodyPr>
           <a:lstStyle/>
@@ -5204,7 +5617,7 @@
           <a:noFill/>
         </p:spPr>
         <p:txBody>
-          <a:bodyPr wrap="square" lIns="0" rIns="0" tIns="0" bIns="0">
+          <a:bodyPr wrap="square" lIns="0" tIns="0" rIns="0" bIns="0">
             <a:spAutoFit/>
           </a:bodyPr>
           <a:lstStyle/>
@@ -5236,6 +5649,22 @@
                 <a:spcPts val="0"/>
               </a:spcAft>
             </a:pPr>
+            <a:endParaRPr sz="1500" b="0" i="0">
+              <a:solidFill>
+                <a:srgbClr val="F4F4F5"/>
+              </a:solidFill>
+              <a:latin typeface="Calibri"/>
+            </a:endParaRPr>
+          </a:p>
+          <a:p>
+            <a:pPr algn="l">
+              <a:spcBef>
+                <a:spcPts val="0"/>
+              </a:spcBef>
+              <a:spcAft>
+                <a:spcPts val="0"/>
+              </a:spcAft>
+            </a:pPr>
             <a:r>
               <a:rPr sz="1500" b="0" i="0">
                 <a:solidFill>
@@ -5243,8 +5672,24 @@
                 </a:solidFill>
                 <a:latin typeface="Calibri"/>
               </a:rPr>
-              <a:t/>
-            </a:r>
+              <a:t>•  JWT (HS256, 12h) + bcrypt + sessionStorage</a:t>
+            </a:r>
+          </a:p>
+          <a:p>
+            <a:pPr algn="l">
+              <a:spcBef>
+                <a:spcPts val="0"/>
+              </a:spcBef>
+              <a:spcAft>
+                <a:spcPts val="0"/>
+              </a:spcAft>
+            </a:pPr>
+            <a:endParaRPr sz="1500" b="0" i="0">
+              <a:solidFill>
+                <a:srgbClr val="F4F4F5"/>
+              </a:solidFill>
+              <a:latin typeface="Calibri"/>
+            </a:endParaRPr>
           </a:p>
           <a:p>
             <a:pPr algn="l">
@@ -5262,8 +5707,24 @@
                 </a:solidFill>
                 <a:latin typeface="Calibri"/>
               </a:rPr>
-              <a:t>•  JWT (HS256, 12h) + bcrypt + sessionStorage</a:t>
-            </a:r>
+              <a:t>•  Kanban: The Plan / In Progress / The Loot</a:t>
+            </a:r>
+          </a:p>
+          <a:p>
+            <a:pPr algn="l">
+              <a:spcBef>
+                <a:spcPts val="0"/>
+              </a:spcBef>
+              <a:spcAft>
+                <a:spcPts val="0"/>
+              </a:spcAft>
+            </a:pPr>
+            <a:endParaRPr sz="1500" b="0" i="0">
+              <a:solidFill>
+                <a:srgbClr val="F4F4F5"/>
+              </a:solidFill>
+              <a:latin typeface="Calibri"/>
+            </a:endParaRPr>
           </a:p>
           <a:p>
             <a:pPr algn="l">
@@ -5281,8 +5742,24 @@
                 </a:solidFill>
                 <a:latin typeface="Calibri"/>
               </a:rPr>
-              <a:t/>
-            </a:r>
+              <a:t>•  15 secure-coding practices documented</a:t>
+            </a:r>
+          </a:p>
+          <a:p>
+            <a:pPr algn="l">
+              <a:spcBef>
+                <a:spcPts val="0"/>
+              </a:spcBef>
+              <a:spcAft>
+                <a:spcPts val="0"/>
+              </a:spcAft>
+            </a:pPr>
+            <a:endParaRPr sz="1500" b="0" i="0">
+              <a:solidFill>
+                <a:srgbClr val="F4F4F5"/>
+              </a:solidFill>
+              <a:latin typeface="Calibri"/>
+            </a:endParaRPr>
           </a:p>
           <a:p>
             <a:pPr algn="l">
@@ -5300,82 +5777,6 @@
                 </a:solidFill>
                 <a:latin typeface="Calibri"/>
               </a:rPr>
-              <a:t>•  Kanban: The Plan / In Progress / The Loot</a:t>
-            </a:r>
-          </a:p>
-          <a:p>
-            <a:pPr algn="l">
-              <a:spcBef>
-                <a:spcPts val="0"/>
-              </a:spcBef>
-              <a:spcAft>
-                <a:spcPts val="0"/>
-              </a:spcAft>
-            </a:pPr>
-            <a:r>
-              <a:rPr sz="1500" b="0" i="0">
-                <a:solidFill>
-                  <a:srgbClr val="F4F4F5"/>
-                </a:solidFill>
-                <a:latin typeface="Calibri"/>
-              </a:rPr>
-              <a:t/>
-            </a:r>
-          </a:p>
-          <a:p>
-            <a:pPr algn="l">
-              <a:spcBef>
-                <a:spcPts val="0"/>
-              </a:spcBef>
-              <a:spcAft>
-                <a:spcPts val="0"/>
-              </a:spcAft>
-            </a:pPr>
-            <a:r>
-              <a:rPr sz="1500" b="0" i="0">
-                <a:solidFill>
-                  <a:srgbClr val="F4F4F5"/>
-                </a:solidFill>
-                <a:latin typeface="Calibri"/>
-              </a:rPr>
-              <a:t>•  15 secure-coding practices documented</a:t>
-            </a:r>
-          </a:p>
-          <a:p>
-            <a:pPr algn="l">
-              <a:spcBef>
-                <a:spcPts val="0"/>
-              </a:spcBef>
-              <a:spcAft>
-                <a:spcPts val="0"/>
-              </a:spcAft>
-            </a:pPr>
-            <a:r>
-              <a:rPr sz="1500" b="0" i="0">
-                <a:solidFill>
-                  <a:srgbClr val="F4F4F5"/>
-                </a:solidFill>
-                <a:latin typeface="Calibri"/>
-              </a:rPr>
-              <a:t/>
-            </a:r>
-          </a:p>
-          <a:p>
-            <a:pPr algn="l">
-              <a:spcBef>
-                <a:spcPts val="0"/>
-              </a:spcBef>
-              <a:spcAft>
-                <a:spcPts val="0"/>
-              </a:spcAft>
-            </a:pPr>
-            <a:r>
-              <a:rPr sz="1500" b="0" i="0">
-                <a:solidFill>
-                  <a:srgbClr val="F4F4F5"/>
-                </a:solidFill>
-                <a:latin typeface="Calibri"/>
-              </a:rPr>
               <a:t>•  Single API service + bidirectional mappers</a:t>
             </a:r>
           </a:p>
@@ -5388,15 +5789,12 @@
                 <a:spcPts val="0"/>
               </a:spcAft>
             </a:pPr>
-            <a:r>
-              <a:rPr sz="1500" b="0" i="0">
-                <a:solidFill>
-                  <a:srgbClr val="F4F4F5"/>
-                </a:solidFill>
-                <a:latin typeface="Calibri"/>
-              </a:rPr>
-              <a:t/>
-            </a:r>
+            <a:endParaRPr sz="1500" b="0" i="0">
+              <a:solidFill>
+                <a:srgbClr val="F4F4F5"/>
+              </a:solidFill>
+              <a:latin typeface="Calibri"/>
+            </a:endParaRPr>
           </a:p>
           <a:p>
             <a:pPr algn="l">
@@ -5464,6 +5862,7 @@
           <a:lstStyle/>
           <a:p>
             <a:pPr algn="ctr"/>
+            <a:endParaRPr/>
           </a:p>
         </p:txBody>
       </p:sp>
@@ -5484,7 +5883,7 @@
           <a:noFill/>
         </p:spPr>
         <p:txBody>
-          <a:bodyPr wrap="square" lIns="0" rIns="0" tIns="0" bIns="0">
+          <a:bodyPr wrap="square" lIns="0" tIns="0" rIns="0" bIns="0">
             <a:spAutoFit/>
           </a:bodyPr>
           <a:lstStyle/>
@@ -5526,7 +5925,7 @@
           <a:noFill/>
         </p:spPr>
         <p:txBody>
-          <a:bodyPr wrap="square" lIns="0" rIns="0" tIns="0" bIns="0">
+          <a:bodyPr wrap="square" lIns="0" tIns="0" rIns="0" bIns="0">
             <a:spAutoFit/>
           </a:bodyPr>
           <a:lstStyle/>
@@ -5568,7 +5967,7 @@
           <a:noFill/>
         </p:spPr>
         <p:txBody>
-          <a:bodyPr wrap="square" lIns="0" rIns="0" tIns="0" bIns="0">
+          <a:bodyPr wrap="square" lIns="0" tIns="0" rIns="0" bIns="0">
             <a:spAutoFit/>
           </a:bodyPr>
           <a:lstStyle/>
@@ -5610,7 +6009,7 @@
           <a:noFill/>
         </p:spPr>
         <p:txBody>
-          <a:bodyPr wrap="square" lIns="0" rIns="0" tIns="0" bIns="0">
+          <a:bodyPr wrap="square" lIns="0" tIns="0" rIns="0" bIns="0">
             <a:spAutoFit/>
           </a:bodyPr>
           <a:lstStyle/>
@@ -5644,7 +6043,7 @@
 </file>
 
 <file path=ppt/slides/slide3.xml><?xml version="1.0" encoding="utf-8"?>
-<p:sld xmlns:a="http://schemas.openxmlformats.org/drawingml/2006/main" xmlns:p="http://schemas.openxmlformats.org/presentationml/2006/main" xmlns:r="http://schemas.openxmlformats.org/officeDocument/2006/relationships">
+<p:sld xmlns:a="http://schemas.openxmlformats.org/drawingml/2006/main" xmlns:r="http://schemas.openxmlformats.org/officeDocument/2006/relationships" xmlns:p="http://schemas.openxmlformats.org/presentationml/2006/main">
   <p:cSld>
     <p:bg>
       <p:bgPr>
@@ -5660,7 +6059,14 @@
         <p:cNvGrpSpPr/>
         <p:nvPr/>
       </p:nvGrpSpPr>
-      <p:grpSpPr/>
+      <p:grpSpPr>
+        <a:xfrm>
+          <a:off x="0" y="0"/>
+          <a:ext cx="0" cy="0"/>
+          <a:chOff x="0" y="0"/>
+          <a:chExt cx="0" cy="0"/>
+        </a:xfrm>
+      </p:grpSpPr>
       <p:sp>
         <p:nvSpPr>
           <p:cNvPr id="2" name="TextBox 1"/>
@@ -5678,7 +6084,7 @@
           <a:noFill/>
         </p:spPr>
         <p:txBody>
-          <a:bodyPr wrap="square" lIns="0" rIns="0" tIns="0" bIns="0">
+          <a:bodyPr wrap="square" lIns="0" tIns="0" rIns="0" bIns="0">
             <a:spAutoFit/>
           </a:bodyPr>
           <a:lstStyle/>
@@ -5720,7 +6126,7 @@
           <a:noFill/>
         </p:spPr>
         <p:txBody>
-          <a:bodyPr wrap="square" lIns="0" rIns="0" tIns="0" bIns="0">
+          <a:bodyPr wrap="square" lIns="0" tIns="0" rIns="0" bIns="0">
             <a:spAutoFit/>
           </a:bodyPr>
           <a:lstStyle/>
@@ -5790,6 +6196,7 @@
           <a:lstStyle/>
           <a:p>
             <a:pPr algn="ctr"/>
+            <a:endParaRPr/>
           </a:p>
         </p:txBody>
       </p:sp>
@@ -5810,7 +6217,7 @@
           <a:noFill/>
         </p:spPr>
         <p:txBody>
-          <a:bodyPr wrap="square" lIns="0" rIns="0" tIns="0" bIns="0">
+          <a:bodyPr wrap="square" lIns="0" tIns="0" rIns="0" bIns="0">
             <a:spAutoFit/>
           </a:bodyPr>
           <a:lstStyle/>
@@ -5852,7 +6259,7 @@
           <a:noFill/>
         </p:spPr>
         <p:txBody>
-          <a:bodyPr wrap="square" lIns="0" rIns="0" tIns="0" bIns="0">
+          <a:bodyPr wrap="square" lIns="0" tIns="0" rIns="0" bIns="0">
             <a:spAutoFit/>
           </a:bodyPr>
           <a:lstStyle/>
@@ -5894,7 +6301,7 @@
           <a:noFill/>
         </p:spPr>
         <p:txBody>
-          <a:bodyPr wrap="square" lIns="0" rIns="0" tIns="0" bIns="0">
+          <a:bodyPr wrap="square" lIns="0" tIns="0" rIns="0" bIns="0">
             <a:spAutoFit/>
           </a:bodyPr>
           <a:lstStyle/>
@@ -6040,6 +6447,7 @@
           <a:lstStyle/>
           <a:p>
             <a:pPr algn="ctr"/>
+            <a:endParaRPr/>
           </a:p>
         </p:txBody>
       </p:sp>
@@ -6060,7 +6468,7 @@
           <a:noFill/>
         </p:spPr>
         <p:txBody>
-          <a:bodyPr wrap="square" lIns="0" rIns="0" tIns="0" bIns="0">
+          <a:bodyPr wrap="square" lIns="0" tIns="0" rIns="0" bIns="0">
             <a:spAutoFit/>
           </a:bodyPr>
           <a:lstStyle/>
@@ -6102,7 +6510,7 @@
           <a:noFill/>
         </p:spPr>
         <p:txBody>
-          <a:bodyPr wrap="square" lIns="0" rIns="0" tIns="0" bIns="0">
+          <a:bodyPr wrap="square" lIns="0" tIns="0" rIns="0" bIns="0">
             <a:spAutoFit/>
           </a:bodyPr>
           <a:lstStyle/>
@@ -6144,7 +6552,7 @@
           <a:noFill/>
         </p:spPr>
         <p:txBody>
-          <a:bodyPr wrap="square" lIns="0" rIns="0" tIns="0" bIns="0">
+          <a:bodyPr wrap="square" lIns="0" tIns="0" rIns="0" bIns="0">
             <a:spAutoFit/>
           </a:bodyPr>
           <a:lstStyle/>
@@ -6290,6 +6698,7 @@
           <a:lstStyle/>
           <a:p>
             <a:pPr algn="ctr"/>
+            <a:endParaRPr/>
           </a:p>
         </p:txBody>
       </p:sp>
@@ -6310,7 +6719,7 @@
           <a:noFill/>
         </p:spPr>
         <p:txBody>
-          <a:bodyPr wrap="square" lIns="0" rIns="0" tIns="0" bIns="0">
+          <a:bodyPr wrap="square" lIns="0" tIns="0" rIns="0" bIns="0">
             <a:spAutoFit/>
           </a:bodyPr>
           <a:lstStyle/>
@@ -6352,7 +6761,7 @@
           <a:noFill/>
         </p:spPr>
         <p:txBody>
-          <a:bodyPr wrap="square" lIns="0" rIns="0" tIns="0" bIns="0">
+          <a:bodyPr wrap="square" lIns="0" tIns="0" rIns="0" bIns="0">
             <a:spAutoFit/>
           </a:bodyPr>
           <a:lstStyle/>
@@ -6394,7 +6803,7 @@
           <a:noFill/>
         </p:spPr>
         <p:txBody>
-          <a:bodyPr wrap="square" lIns="0" rIns="0" tIns="0" bIns="0">
+          <a:bodyPr wrap="square" lIns="0" tIns="0" rIns="0" bIns="0">
             <a:spAutoFit/>
           </a:bodyPr>
           <a:lstStyle/>
@@ -6584,7 +6993,7 @@
           <a:noFill/>
         </p:spPr>
         <p:txBody>
-          <a:bodyPr wrap="square" lIns="0" rIns="0" tIns="0" bIns="0">
+          <a:bodyPr wrap="square" lIns="0" tIns="0" rIns="0" bIns="0">
             <a:spAutoFit/>
           </a:bodyPr>
           <a:lstStyle/>
@@ -6645,7 +7054,7 @@
           <a:noFill/>
         </p:spPr>
         <p:txBody>
-          <a:bodyPr wrap="square" lIns="0" rIns="0" tIns="0" bIns="0">
+          <a:bodyPr wrap="square" lIns="0" tIns="0" rIns="0" bIns="0">
             <a:spAutoFit/>
           </a:bodyPr>
           <a:lstStyle/>
@@ -6734,6 +7143,7 @@
           <a:lstStyle/>
           <a:p>
             <a:pPr algn="ctr"/>
+            <a:endParaRPr/>
           </a:p>
         </p:txBody>
       </p:sp>
@@ -6754,7 +7164,7 @@
           <a:noFill/>
         </p:spPr>
         <p:txBody>
-          <a:bodyPr wrap="square" lIns="0" rIns="0" tIns="0" bIns="0">
+          <a:bodyPr wrap="square" lIns="0" tIns="0" rIns="0" bIns="0">
             <a:spAutoFit/>
           </a:bodyPr>
           <a:lstStyle/>
@@ -6796,7 +7206,7 @@
           <a:noFill/>
         </p:spPr>
         <p:txBody>
-          <a:bodyPr wrap="square" lIns="0" rIns="0" tIns="0" bIns="0">
+          <a:bodyPr wrap="square" lIns="0" tIns="0" rIns="0" bIns="0">
             <a:spAutoFit/>
           </a:bodyPr>
           <a:lstStyle/>
@@ -6838,7 +7248,7 @@
           <a:noFill/>
         </p:spPr>
         <p:txBody>
-          <a:bodyPr wrap="square" lIns="0" rIns="0" tIns="0" bIns="0">
+          <a:bodyPr wrap="square" lIns="0" tIns="0" rIns="0" bIns="0">
             <a:spAutoFit/>
           </a:bodyPr>
           <a:lstStyle/>
@@ -6880,7 +7290,7 @@
           <a:noFill/>
         </p:spPr>
         <p:txBody>
-          <a:bodyPr wrap="square" lIns="0" rIns="0" tIns="0" bIns="0">
+          <a:bodyPr wrap="square" lIns="0" tIns="0" rIns="0" bIns="0">
             <a:spAutoFit/>
           </a:bodyPr>
           <a:lstStyle/>
@@ -6914,7 +7324,7 @@
 </file>
 
 <file path=ppt/slides/slide4.xml><?xml version="1.0" encoding="utf-8"?>
-<p:sld xmlns:a="http://schemas.openxmlformats.org/drawingml/2006/main" xmlns:p="http://schemas.openxmlformats.org/presentationml/2006/main" xmlns:r="http://schemas.openxmlformats.org/officeDocument/2006/relationships">
+<p:sld xmlns:a="http://schemas.openxmlformats.org/drawingml/2006/main" xmlns:r="http://schemas.openxmlformats.org/officeDocument/2006/relationships" xmlns:p="http://schemas.openxmlformats.org/presentationml/2006/main">
   <p:cSld>
     <p:bg>
       <p:bgPr>
@@ -6930,7 +7340,14 @@
         <p:cNvGrpSpPr/>
         <p:nvPr/>
       </p:nvGrpSpPr>
-      <p:grpSpPr/>
+      <p:grpSpPr>
+        <a:xfrm>
+          <a:off x="0" y="0"/>
+          <a:ext cx="0" cy="0"/>
+          <a:chOff x="0" y="0"/>
+          <a:chExt cx="0" cy="0"/>
+        </a:xfrm>
+      </p:grpSpPr>
       <p:sp>
         <p:nvSpPr>
           <p:cNvPr id="2" name="TextBox 1"/>
@@ -6948,7 +7365,7 @@
           <a:noFill/>
         </p:spPr>
         <p:txBody>
-          <a:bodyPr wrap="square" lIns="0" rIns="0" tIns="0" bIns="0">
+          <a:bodyPr wrap="square" lIns="0" tIns="0" rIns="0" bIns="0">
             <a:spAutoFit/>
           </a:bodyPr>
           <a:lstStyle/>
@@ -6968,7 +7385,7 @@
                 </a:solidFill>
                 <a:latin typeface="Calibri"/>
               </a:rPr>
-              <a:t>Live demo  ·  what we'll show now</a:t>
+              <a:t>Secure coding  ·  three highlights we defend</a:t>
             </a:r>
           </a:p>
         </p:txBody>
@@ -6990,7 +7407,7 @@
           <a:noFill/>
         </p:spPr>
         <p:txBody>
-          <a:bodyPr wrap="square" lIns="0" rIns="0" tIns="0" bIns="0">
+          <a:bodyPr wrap="square" lIns="0" tIns="0" rIns="0" bIns="0">
             <a:spAutoFit/>
           </a:bodyPr>
           <a:lstStyle/>
@@ -7010,45 +7427,21 @@
                 </a:solidFill>
                 <a:latin typeface="Calibri"/>
               </a:rPr>
-              <a:t>Two minutes. Watch the toasts and the green dot on the connected agent.</a:t>
-            </a:r>
-          </a:p>
-        </p:txBody>
-      </p:sp>
-      <p:pic>
-        <p:nvPicPr>
-          <p:cNvPr id="4" name="Picture 3" descr="Board.png"/>
-          <p:cNvPicPr>
-            <a:picLocks noChangeAspect="1"/>
-          </p:cNvPicPr>
-          <p:nvPr/>
-        </p:nvPicPr>
-        <p:blipFill>
-          <a:blip r:embed="rId2"/>
-          <a:stretch>
-            <a:fillRect/>
-          </a:stretch>
-        </p:blipFill>
-        <p:spPr>
-          <a:xfrm>
-            <a:off x="457200" y="1554480"/>
-            <a:ext cx="7772400" cy="4401137"/>
-          </a:xfrm>
-          <a:prstGeom prst="rect">
-            <a:avLst/>
-          </a:prstGeom>
-        </p:spPr>
-      </p:pic>
-      <p:sp>
-        <p:nvSpPr>
-          <p:cNvPr id="5" name="Rounded Rectangle 4"/>
+              <a:t>Out of the 15 practices we documented, these are the three a grader is most likely to probe.</a:t>
+            </a:r>
+          </a:p>
+        </p:txBody>
+      </p:sp>
+      <p:sp>
+        <p:nvSpPr>
+          <p:cNvPr id="4" name="Rounded Rectangle 3"/>
           <p:cNvSpPr/>
           <p:nvPr/>
         </p:nvSpPr>
         <p:spPr>
           <a:xfrm>
-            <a:off x="8595360" y="1554480"/>
-            <a:ext cx="3108960" cy="4572000"/>
+            <a:off x="457200" y="1554480"/>
+            <a:ext cx="3749039" cy="4937760"/>
           </a:xfrm>
           <a:prstGeom prst="roundRect">
             <a:avLst>
@@ -7084,6 +7477,61 @@
           <a:lstStyle/>
           <a:p>
             <a:pPr algn="ctr"/>
+            <a:endParaRPr/>
+          </a:p>
+        </p:txBody>
+      </p:sp>
+      <p:sp>
+        <p:nvSpPr>
+          <p:cNvPr id="5" name="Rounded Rectangle 4"/>
+          <p:cNvSpPr/>
+          <p:nvPr/>
+        </p:nvSpPr>
+        <p:spPr>
+          <a:xfrm>
+            <a:off x="640080" y="1737360"/>
+            <a:ext cx="822960" cy="320040"/>
+          </a:xfrm>
+          <a:prstGeom prst="roundRect">
+            <a:avLst>
+              <a:gd name="adj" fmla="val 50000"/>
+            </a:avLst>
+          </a:prstGeom>
+          <a:solidFill>
+            <a:srgbClr val="8B5CF6"/>
+          </a:solidFill>
+          <a:ln>
+            <a:noFill/>
+          </a:ln>
+        </p:spPr>
+        <p:style>
+          <a:lnRef idx="1">
+            <a:schemeClr val="accent1"/>
+          </a:lnRef>
+          <a:fillRef idx="3">
+            <a:schemeClr val="accent1"/>
+          </a:fillRef>
+          <a:effectRef idx="2">
+            <a:schemeClr val="accent1"/>
+          </a:effectRef>
+          <a:fontRef idx="minor">
+            <a:schemeClr val="lt1"/>
+          </a:fontRef>
+        </p:style>
+        <p:txBody>
+          <a:bodyPr tIns="18288" bIns="18288" rtlCol="0" anchor="ctr"/>
+          <a:lstStyle/>
+          <a:p>
+            <a:pPr algn="ctr"/>
+            <a:r>
+              <a:rPr sz="1100" b="1">
+                <a:solidFill>
+                  <a:srgbClr val="F4F4F5"/>
+                </a:solidFill>
+                <a:latin typeface="Calibri"/>
+              </a:rPr>
+              <a:t>#4</a:t>
+            </a:r>
           </a:p>
         </p:txBody>
       </p:sp>
@@ -7095,8 +7543,8 @@
         </p:nvSpPr>
         <p:spPr>
           <a:xfrm>
-            <a:off x="8778240" y="1691640"/>
-            <a:ext cx="2743200" cy="365760"/>
+            <a:off x="1508760" y="1737360"/>
+            <a:ext cx="2560320" cy="365760"/>
           </a:xfrm>
           <a:prstGeom prst="rect">
             <a:avLst/>
@@ -7104,7 +7552,7 @@
           <a:noFill/>
         </p:spPr>
         <p:txBody>
-          <a:bodyPr wrap="square" lIns="0" rIns="0" tIns="0" bIns="0">
+          <a:bodyPr wrap="square" lIns="0" tIns="0" rIns="0" bIns="0" anchor="ctr">
             <a:spAutoFit/>
           </a:bodyPr>
           <a:lstStyle/>
@@ -7118,13 +7566,13 @@
               </a:spcAft>
             </a:pPr>
             <a:r>
-              <a:rPr sz="1100" b="1" i="0">
-                <a:solidFill>
-                  <a:srgbClr val="71717A"/>
-                </a:solidFill>
-                <a:latin typeface="Calibri"/>
-              </a:rPr>
-              <a:t>DEMO SCRIPT</a:t>
+              <a:rPr sz="1600" b="1" i="0">
+                <a:solidFill>
+                  <a:srgbClr val="F4F4F5"/>
+                </a:solidFill>
+                <a:latin typeface="Calibri"/>
+              </a:rPr>
+              <a:t>Timing-safe login</a:t>
             </a:r>
           </a:p>
         </p:txBody>
@@ -7137,8 +7585,8 @@
         </p:nvSpPr>
         <p:spPr>
           <a:xfrm>
-            <a:off x="8778240" y="2148840"/>
-            <a:ext cx="274320" cy="274320"/>
+            <a:off x="640080" y="2194560"/>
+            <a:ext cx="3383279" cy="640080"/>
           </a:xfrm>
           <a:prstGeom prst="rect">
             <a:avLst/>
@@ -7146,7 +7594,7 @@
           <a:noFill/>
         </p:spPr>
         <p:txBody>
-          <a:bodyPr wrap="square" lIns="0" rIns="0" tIns="0" bIns="0">
+          <a:bodyPr wrap="square" lIns="0" tIns="0" rIns="0" bIns="0">
             <a:spAutoFit/>
           </a:bodyPr>
           <a:lstStyle/>
@@ -7160,55 +7608,323 @@
               </a:spcAft>
             </a:pPr>
             <a:r>
-              <a:rPr sz="1400" b="1" i="0">
-                <a:solidFill>
-                  <a:srgbClr val="8B5CF6"/>
-                </a:solidFill>
-                <a:latin typeface="Calibri"/>
-              </a:rPr>
-              <a:t>1</a:t>
-            </a:r>
-          </a:p>
-        </p:txBody>
-      </p:sp>
-      <p:sp>
-        <p:nvSpPr>
-          <p:cNvPr id="8" name="TextBox 7"/>
-          <p:cNvSpPr txBox="1"/>
+              <a:rPr sz="1100" b="0" i="0">
+                <a:solidFill>
+                  <a:srgbClr val="A1A1AA"/>
+                </a:solidFill>
+                <a:latin typeface="Calibri"/>
+              </a:rPr>
+              <a:t>If the alias is unknown, we still run bcrypt against a dummy hash so the response time is identical.</a:t>
+            </a:r>
+          </a:p>
+        </p:txBody>
+      </p:sp>
+      <p:sp>
+        <p:nvSpPr>
+          <p:cNvPr id="8" name="Rounded Rectangle 7"/>
+          <p:cNvSpPr/>
           <p:nvPr/>
         </p:nvSpPr>
         <p:spPr>
           <a:xfrm>
-            <a:off x="9098280" y="2148840"/>
-            <a:ext cx="2468880" cy="274320"/>
-          </a:xfrm>
-          <a:prstGeom prst="rect">
-            <a:avLst/>
-          </a:prstGeom>
-          <a:noFill/>
-        </p:spPr>
-        <p:txBody>
-          <a:bodyPr wrap="square" lIns="0" rIns="0" tIns="0" bIns="0">
-            <a:spAutoFit/>
-          </a:bodyPr>
-          <a:lstStyle/>
-          <a:p>
-            <a:pPr algn="l">
-              <a:spcBef>
-                <a:spcPts val="0"/>
-              </a:spcBef>
-              <a:spcAft>
-                <a:spcPts val="0"/>
-              </a:spcAft>
-            </a:pPr>
-            <a:r>
-              <a:rPr sz="1400" b="1" i="0">
+            <a:off x="640080" y="2971800"/>
+            <a:ext cx="3383279" cy="2377440"/>
+          </a:xfrm>
+          <a:prstGeom prst="roundRect">
+            <a:avLst>
+              <a:gd name="adj" fmla="val 4000"/>
+            </a:avLst>
+          </a:prstGeom>
+          <a:solidFill>
+            <a:srgbClr val="0D0F15"/>
+          </a:solidFill>
+          <a:ln w="6350">
+            <a:solidFill>
+              <a:srgbClr val="2A2E3A"/>
+            </a:solidFill>
+          </a:ln>
+        </p:spPr>
+        <p:style>
+          <a:lnRef idx="1">
+            <a:schemeClr val="accent1"/>
+          </a:lnRef>
+          <a:fillRef idx="3">
+            <a:schemeClr val="accent1"/>
+          </a:fillRef>
+          <a:effectRef idx="2">
+            <a:schemeClr val="accent1"/>
+          </a:effectRef>
+          <a:fontRef idx="minor">
+            <a:schemeClr val="lt1"/>
+          </a:fontRef>
+        </p:style>
+        <p:txBody>
+          <a:bodyPr wrap="square" lIns="137160" tIns="91440" rIns="137160" bIns="91440" rtlCol="0" anchor="ctr"/>
+          <a:lstStyle/>
+          <a:p>
+            <a:pPr algn="l">
+              <a:spcBef>
+                <a:spcPts val="0"/>
+              </a:spcBef>
+              <a:spcAft>
+                <a:spcPts val="0"/>
+              </a:spcAft>
+            </a:pPr>
+            <a:r>
+              <a:rPr sz="1000">
                 <a:solidFill>
                   <a:srgbClr val="F4F4F5"/>
                 </a:solidFill>
-                <a:latin typeface="Calibri"/>
-              </a:rPr>
-              <a:t>Login</a:t>
+                <a:latin typeface="Consolas"/>
+              </a:rPr>
+              <a:t>const fakeHash = "$2b$10$Cw...";</a:t>
+            </a:r>
+          </a:p>
+          <a:p>
+            <a:pPr algn="l">
+              <a:spcBef>
+                <a:spcPts val="0"/>
+              </a:spcBef>
+              <a:spcAft>
+                <a:spcPts val="0"/>
+              </a:spcAft>
+            </a:pPr>
+            <a:r>
+              <a:rPr sz="1000">
+                <a:solidFill>
+                  <a:srgbClr val="F4F4F5"/>
+                </a:solidFill>
+                <a:latin typeface="Consolas"/>
+              </a:rPr>
+              <a:t>const hash = agent</a:t>
+            </a:r>
+          </a:p>
+          <a:p>
+            <a:pPr algn="l">
+              <a:spcBef>
+                <a:spcPts val="0"/>
+              </a:spcBef>
+              <a:spcAft>
+                <a:spcPts val="0"/>
+              </a:spcAft>
+            </a:pPr>
+            <a:r>
+              <a:rPr sz="1000">
+                <a:solidFill>
+                  <a:srgbClr val="F4F4F5"/>
+                </a:solidFill>
+                <a:latin typeface="Consolas"/>
+              </a:rPr>
+              <a:t>  ? agent.password</a:t>
+            </a:r>
+          </a:p>
+          <a:p>
+            <a:pPr algn="l">
+              <a:spcBef>
+                <a:spcPts val="0"/>
+              </a:spcBef>
+              <a:spcAft>
+                <a:spcPts val="0"/>
+              </a:spcAft>
+            </a:pPr>
+            <a:r>
+              <a:rPr sz="1000">
+                <a:solidFill>
+                  <a:srgbClr val="F4F4F5"/>
+                </a:solidFill>
+                <a:latin typeface="Consolas"/>
+              </a:rPr>
+              <a:t>  : fakeHash;</a:t>
+            </a:r>
+          </a:p>
+          <a:p>
+            <a:pPr algn="l">
+              <a:spcBef>
+                <a:spcPts val="0"/>
+              </a:spcBef>
+              <a:spcAft>
+                <a:spcPts val="0"/>
+              </a:spcAft>
+            </a:pPr>
+            <a:r>
+              <a:rPr sz="1000">
+                <a:solidFill>
+                  <a:srgbClr val="F4F4F5"/>
+                </a:solidFill>
+                <a:latin typeface="Consolas"/>
+              </a:rPr>
+              <a:t>const match =</a:t>
+            </a:r>
+          </a:p>
+          <a:p>
+            <a:pPr algn="l">
+              <a:spcBef>
+                <a:spcPts val="0"/>
+              </a:spcBef>
+              <a:spcAft>
+                <a:spcPts val="0"/>
+              </a:spcAft>
+            </a:pPr>
+            <a:r>
+              <a:rPr sz="1000">
+                <a:solidFill>
+                  <a:srgbClr val="F4F4F5"/>
+                </a:solidFill>
+                <a:latin typeface="Consolas"/>
+              </a:rPr>
+              <a:t>  await bcrypt.compare(</a:t>
+            </a:r>
+          </a:p>
+          <a:p>
+            <a:pPr algn="l">
+              <a:spcBef>
+                <a:spcPts val="0"/>
+              </a:spcBef>
+              <a:spcAft>
+                <a:spcPts val="0"/>
+              </a:spcAft>
+            </a:pPr>
+            <a:r>
+              <a:rPr sz="1000">
+                <a:solidFill>
+                  <a:srgbClr val="F4F4F5"/>
+                </a:solidFill>
+                <a:latin typeface="Consolas"/>
+              </a:rPr>
+              <a:t>    password,</a:t>
+            </a:r>
+          </a:p>
+          <a:p>
+            <a:pPr algn="l">
+              <a:spcBef>
+                <a:spcPts val="0"/>
+              </a:spcBef>
+              <a:spcAft>
+                <a:spcPts val="0"/>
+              </a:spcAft>
+            </a:pPr>
+            <a:r>
+              <a:rPr sz="1000">
+                <a:solidFill>
+                  <a:srgbClr val="F4F4F5"/>
+                </a:solidFill>
+                <a:latin typeface="Consolas"/>
+              </a:rPr>
+              <a:t>    hash</a:t>
+            </a:r>
+          </a:p>
+          <a:p>
+            <a:pPr algn="l">
+              <a:spcBef>
+                <a:spcPts val="0"/>
+              </a:spcBef>
+              <a:spcAft>
+                <a:spcPts val="0"/>
+              </a:spcAft>
+            </a:pPr>
+            <a:r>
+              <a:rPr sz="1000">
+                <a:solidFill>
+                  <a:srgbClr val="F4F4F5"/>
+                </a:solidFill>
+                <a:latin typeface="Consolas"/>
+              </a:rPr>
+              <a:t>  );</a:t>
+            </a:r>
+          </a:p>
+          <a:p>
+            <a:pPr algn="l">
+              <a:spcBef>
+                <a:spcPts val="0"/>
+              </a:spcBef>
+              <a:spcAft>
+                <a:spcPts val="0"/>
+              </a:spcAft>
+            </a:pPr>
+            <a:r>
+              <a:rPr sz="1000">
+                <a:solidFill>
+                  <a:srgbClr val="F4F4F5"/>
+                </a:solidFill>
+                <a:latin typeface="Consolas"/>
+              </a:rPr>
+              <a:t>if (!agent || !match) {</a:t>
+            </a:r>
+          </a:p>
+          <a:p>
+            <a:pPr algn="l">
+              <a:spcBef>
+                <a:spcPts val="0"/>
+              </a:spcBef>
+              <a:spcAft>
+                <a:spcPts val="0"/>
+              </a:spcAft>
+            </a:pPr>
+            <a:r>
+              <a:rPr sz="1000">
+                <a:solidFill>
+                  <a:srgbClr val="F4F4F5"/>
+                </a:solidFill>
+                <a:latin typeface="Consolas"/>
+              </a:rPr>
+              <a:t>  return res.status(401)</a:t>
+            </a:r>
+          </a:p>
+          <a:p>
+            <a:pPr algn="l">
+              <a:spcBef>
+                <a:spcPts val="0"/>
+              </a:spcBef>
+              <a:spcAft>
+                <a:spcPts val="0"/>
+              </a:spcAft>
+            </a:pPr>
+            <a:r>
+              <a:rPr sz="1000">
+                <a:solidFill>
+                  <a:srgbClr val="F4F4F5"/>
+                </a:solidFill>
+                <a:latin typeface="Consolas"/>
+              </a:rPr>
+              <a:t>    .json({error:</a:t>
+            </a:r>
+          </a:p>
+          <a:p>
+            <a:pPr algn="l">
+              <a:spcBef>
+                <a:spcPts val="0"/>
+              </a:spcBef>
+              <a:spcAft>
+                <a:spcPts val="0"/>
+              </a:spcAft>
+            </a:pPr>
+            <a:r>
+              <a:rPr sz="1000">
+                <a:solidFill>
+                  <a:srgbClr val="F4F4F5"/>
+                </a:solidFill>
+                <a:latin typeface="Consolas"/>
+              </a:rPr>
+              <a:t>      "invalid_credentials"});</a:t>
+            </a:r>
+          </a:p>
+          <a:p>
+            <a:pPr algn="l">
+              <a:spcBef>
+                <a:spcPts val="0"/>
+              </a:spcBef>
+              <a:spcAft>
+                <a:spcPts val="0"/>
+              </a:spcAft>
+            </a:pPr>
+            <a:r>
+              <a:rPr sz="1000">
+                <a:solidFill>
+                  <a:srgbClr val="F4F4F5"/>
+                </a:solidFill>
+                <a:latin typeface="Consolas"/>
+              </a:rPr>
+              <a:t>}</a:t>
             </a:r>
           </a:p>
         </p:txBody>
@@ -7221,8 +7937,8 @@
         </p:nvSpPr>
         <p:spPr>
           <a:xfrm>
-            <a:off x="9098280" y="2395728"/>
-            <a:ext cx="2468880" cy="274320"/>
+            <a:off x="640080" y="5486400"/>
+            <a:ext cx="3383279" cy="822960"/>
           </a:xfrm>
           <a:prstGeom prst="rect">
             <a:avLst/>
@@ -7230,7 +7946,7 @@
           <a:noFill/>
         </p:spPr>
         <p:txBody>
-          <a:bodyPr wrap="square" lIns="0" rIns="0" tIns="0" bIns="0">
+          <a:bodyPr wrap="square" lIns="0" tIns="0" rIns="0" bIns="0">
             <a:spAutoFit/>
           </a:bodyPr>
           <a:lstStyle/>
@@ -7244,97 +7960,116 @@
               </a:spcAft>
             </a:pPr>
             <a:r>
-              <a:rPr sz="1000" b="0" i="0">
-                <a:solidFill>
-                  <a:srgbClr val="A1A1AA"/>
-                </a:solidFill>
-                <a:latin typeface="Calibri"/>
-              </a:rPr>
-              <a:t>the_godfather / heist2026</a:t>
-            </a:r>
-          </a:p>
-        </p:txBody>
-      </p:sp>
-      <p:sp>
-        <p:nvSpPr>
-          <p:cNvPr id="10" name="TextBox 9"/>
-          <p:cNvSpPr txBox="1"/>
+              <a:rPr sz="1100" b="0" i="1">
+                <a:solidFill>
+                  <a:srgbClr val="F59E0B"/>
+                </a:solidFill>
+                <a:latin typeface="Calibri"/>
+              </a:rPr>
+              <a:t>Blocks alias enumeration through response-time analysis.</a:t>
+            </a:r>
+          </a:p>
+        </p:txBody>
+      </p:sp>
+      <p:sp>
+        <p:nvSpPr>
+          <p:cNvPr id="10" name="Rounded Rectangle 9"/>
+          <p:cNvSpPr/>
           <p:nvPr/>
         </p:nvSpPr>
         <p:spPr>
           <a:xfrm>
-            <a:off x="8778240" y="2697480"/>
-            <a:ext cx="274320" cy="274320"/>
-          </a:xfrm>
-          <a:prstGeom prst="rect">
-            <a:avLst/>
-          </a:prstGeom>
-          <a:noFill/>
-        </p:spPr>
-        <p:txBody>
-          <a:bodyPr wrap="square" lIns="0" rIns="0" tIns="0" bIns="0">
-            <a:spAutoFit/>
-          </a:bodyPr>
-          <a:lstStyle/>
-          <a:p>
-            <a:pPr algn="l">
-              <a:spcBef>
-                <a:spcPts val="0"/>
-              </a:spcBef>
-              <a:spcAft>
-                <a:spcPts val="0"/>
-              </a:spcAft>
-            </a:pPr>
-            <a:r>
-              <a:rPr sz="1400" b="1" i="0">
-                <a:solidFill>
-                  <a:srgbClr val="8B5CF6"/>
-                </a:solidFill>
-                <a:latin typeface="Calibri"/>
-              </a:rPr>
-              <a:t>2</a:t>
-            </a:r>
-          </a:p>
-        </p:txBody>
-      </p:sp>
-      <p:sp>
-        <p:nvSpPr>
-          <p:cNvPr id="11" name="TextBox 10"/>
-          <p:cNvSpPr txBox="1"/>
+            <a:off x="4389120" y="1554480"/>
+            <a:ext cx="3749039" cy="4937760"/>
+          </a:xfrm>
+          <a:prstGeom prst="roundRect">
+            <a:avLst>
+              <a:gd name="adj" fmla="val 6000"/>
+            </a:avLst>
+          </a:prstGeom>
+          <a:solidFill>
+            <a:srgbClr val="161922"/>
+          </a:solidFill>
+          <a:ln w="9525">
+            <a:solidFill>
+              <a:srgbClr val="2A2E3A"/>
+            </a:solidFill>
+          </a:ln>
+          <a:effectLst/>
+        </p:spPr>
+        <p:style>
+          <a:lnRef idx="1">
+            <a:schemeClr val="accent1"/>
+          </a:lnRef>
+          <a:fillRef idx="3">
+            <a:schemeClr val="accent1"/>
+          </a:fillRef>
+          <a:effectRef idx="2">
+            <a:schemeClr val="accent1"/>
+          </a:effectRef>
+          <a:fontRef idx="minor">
+            <a:schemeClr val="lt1"/>
+          </a:fontRef>
+        </p:style>
+        <p:txBody>
+          <a:bodyPr rtlCol="0" anchor="ctr"/>
+          <a:lstStyle/>
+          <a:p>
+            <a:pPr algn="ctr"/>
+            <a:endParaRPr/>
+          </a:p>
+        </p:txBody>
+      </p:sp>
+      <p:sp>
+        <p:nvSpPr>
+          <p:cNvPr id="11" name="Rounded Rectangle 10"/>
+          <p:cNvSpPr/>
           <p:nvPr/>
         </p:nvSpPr>
         <p:spPr>
           <a:xfrm>
-            <a:off x="9098280" y="2697480"/>
-            <a:ext cx="2468880" cy="274320"/>
-          </a:xfrm>
-          <a:prstGeom prst="rect">
-            <a:avLst/>
-          </a:prstGeom>
-          <a:noFill/>
-        </p:spPr>
-        <p:txBody>
-          <a:bodyPr wrap="square" lIns="0" rIns="0" tIns="0" bIns="0">
-            <a:spAutoFit/>
-          </a:bodyPr>
-          <a:lstStyle/>
-          <a:p>
-            <a:pPr algn="l">
-              <a:spcBef>
-                <a:spcPts val="0"/>
-              </a:spcBef>
-              <a:spcAft>
-                <a:spcPts val="0"/>
-              </a:spcAft>
-            </a:pPr>
-            <a:r>
-              <a:rPr sz="1400" b="1" i="0">
+            <a:off x="4572000" y="1737360"/>
+            <a:ext cx="822960" cy="320040"/>
+          </a:xfrm>
+          <a:prstGeom prst="roundRect">
+            <a:avLst>
+              <a:gd name="adj" fmla="val 50000"/>
+            </a:avLst>
+          </a:prstGeom>
+          <a:solidFill>
+            <a:srgbClr val="8B5CF6"/>
+          </a:solidFill>
+          <a:ln>
+            <a:noFill/>
+          </a:ln>
+        </p:spPr>
+        <p:style>
+          <a:lnRef idx="1">
+            <a:schemeClr val="accent1"/>
+          </a:lnRef>
+          <a:fillRef idx="3">
+            <a:schemeClr val="accent1"/>
+          </a:fillRef>
+          <a:effectRef idx="2">
+            <a:schemeClr val="accent1"/>
+          </a:effectRef>
+          <a:fontRef idx="minor">
+            <a:schemeClr val="lt1"/>
+          </a:fontRef>
+        </p:style>
+        <p:txBody>
+          <a:bodyPr tIns="18288" bIns="18288" rtlCol="0" anchor="ctr"/>
+          <a:lstStyle/>
+          <a:p>
+            <a:pPr algn="ctr"/>
+            <a:r>
+              <a:rPr sz="1100" b="1">
                 <a:solidFill>
                   <a:srgbClr val="F4F4F5"/>
                 </a:solidFill>
                 <a:latin typeface="Calibri"/>
               </a:rPr>
-              <a:t>Board</a:t>
+              <a:t>#7</a:t>
             </a:r>
           </a:p>
         </p:txBody>
@@ -7347,8 +8082,8 @@
         </p:nvSpPr>
         <p:spPr>
           <a:xfrm>
-            <a:off x="9098280" y="2944368"/>
-            <a:ext cx="2468880" cy="274320"/>
+            <a:off x="5440679" y="1737360"/>
+            <a:ext cx="2560320" cy="365760"/>
           </a:xfrm>
           <a:prstGeom prst="rect">
             <a:avLst/>
@@ -7356,7 +8091,7 @@
           <a:noFill/>
         </p:spPr>
         <p:txBody>
-          <a:bodyPr wrap="square" lIns="0" rIns="0" tIns="0" bIns="0">
+          <a:bodyPr wrap="square" lIns="0" tIns="0" rIns="0" bIns="0" anchor="ctr">
             <a:spAutoFit/>
           </a:bodyPr>
           <a:lstStyle/>
@@ -7370,13 +8105,13 @@
               </a:spcAft>
             </a:pPr>
             <a:r>
-              <a:rPr sz="1000" b="0" i="0">
-                <a:solidFill>
-                  <a:srgbClr val="A1A1AA"/>
-                </a:solidFill>
-                <a:latin typeface="Calibri"/>
-              </a:rPr>
-              <a:t>create + edit a mission</a:t>
+              <a:rPr sz="1600" b="1" i="0">
+                <a:solidFill>
+                  <a:srgbClr val="F4F4F5"/>
+                </a:solidFill>
+                <a:latin typeface="Calibri"/>
+              </a:rPr>
+              <a:t>Rate-limit on /login</a:t>
             </a:r>
           </a:p>
         </p:txBody>
@@ -7389,8 +8124,8 @@
         </p:nvSpPr>
         <p:spPr>
           <a:xfrm>
-            <a:off x="8778240" y="3246120"/>
-            <a:ext cx="274320" cy="274320"/>
+            <a:off x="4572000" y="2194560"/>
+            <a:ext cx="3383279" cy="640080"/>
           </a:xfrm>
           <a:prstGeom prst="rect">
             <a:avLst/>
@@ -7398,7 +8133,7 @@
           <a:noFill/>
         </p:spPr>
         <p:txBody>
-          <a:bodyPr wrap="square" lIns="0" rIns="0" tIns="0" bIns="0">
+          <a:bodyPr wrap="square" lIns="0" tIns="0" rIns="0" bIns="0">
             <a:spAutoFit/>
           </a:bodyPr>
           <a:lstStyle/>
@@ -7412,55 +8147,317 @@
               </a:spcAft>
             </a:pPr>
             <a:r>
-              <a:rPr sz="1400" b="1" i="0">
-                <a:solidFill>
-                  <a:srgbClr val="8B5CF6"/>
-                </a:solidFill>
-                <a:latin typeface="Calibri"/>
-              </a:rPr>
-              <a:t>3</a:t>
-            </a:r>
-          </a:p>
-        </p:txBody>
-      </p:sp>
-      <p:sp>
-        <p:nvSpPr>
-          <p:cNvPr id="14" name="TextBox 13"/>
-          <p:cNvSpPr txBox="1"/>
+              <a:rPr sz="1100" b="0" i="0">
+                <a:solidFill>
+                  <a:srgbClr val="A1A1AA"/>
+                </a:solidFill>
+                <a:latin typeface="Calibri"/>
+              </a:rPr>
+              <a:t>Caps brute-force attempts. After 10 requests in 15 minutes from the same IP, we return HTTP 429.</a:t>
+            </a:r>
+          </a:p>
+        </p:txBody>
+      </p:sp>
+      <p:sp>
+        <p:nvSpPr>
+          <p:cNvPr id="14" name="Rounded Rectangle 13"/>
+          <p:cNvSpPr/>
           <p:nvPr/>
         </p:nvSpPr>
         <p:spPr>
           <a:xfrm>
-            <a:off x="9098280" y="3246120"/>
-            <a:ext cx="2468880" cy="274320"/>
-          </a:xfrm>
-          <a:prstGeom prst="rect">
-            <a:avLst/>
-          </a:prstGeom>
-          <a:noFill/>
-        </p:spPr>
-        <p:txBody>
-          <a:bodyPr wrap="square" lIns="0" rIns="0" tIns="0" bIns="0">
-            <a:spAutoFit/>
-          </a:bodyPr>
-          <a:lstStyle/>
-          <a:p>
-            <a:pPr algn="l">
-              <a:spcBef>
-                <a:spcPts val="0"/>
-              </a:spcBef>
-              <a:spcAft>
-                <a:spcPts val="0"/>
-              </a:spcAft>
-            </a:pPr>
-            <a:r>
-              <a:rPr sz="1400" b="1" i="0">
+            <a:off x="4572000" y="2971800"/>
+            <a:ext cx="3383279" cy="2377440"/>
+          </a:xfrm>
+          <a:prstGeom prst="roundRect">
+            <a:avLst>
+              <a:gd name="adj" fmla="val 4000"/>
+            </a:avLst>
+          </a:prstGeom>
+          <a:solidFill>
+            <a:srgbClr val="0D0F15"/>
+          </a:solidFill>
+          <a:ln w="6350">
+            <a:solidFill>
+              <a:srgbClr val="2A2E3A"/>
+            </a:solidFill>
+          </a:ln>
+        </p:spPr>
+        <p:style>
+          <a:lnRef idx="1">
+            <a:schemeClr val="accent1"/>
+          </a:lnRef>
+          <a:fillRef idx="3">
+            <a:schemeClr val="accent1"/>
+          </a:fillRef>
+          <a:effectRef idx="2">
+            <a:schemeClr val="accent1"/>
+          </a:effectRef>
+          <a:fontRef idx="minor">
+            <a:schemeClr val="lt1"/>
+          </a:fontRef>
+        </p:style>
+        <p:txBody>
+          <a:bodyPr wrap="square" lIns="137160" tIns="91440" rIns="137160" bIns="91440" rtlCol="0" anchor="ctr"/>
+          <a:lstStyle/>
+          <a:p>
+            <a:pPr algn="l">
+              <a:spcBef>
+                <a:spcPts val="0"/>
+              </a:spcBef>
+              <a:spcAft>
+                <a:spcPts val="0"/>
+              </a:spcAft>
+            </a:pPr>
+            <a:r>
+              <a:rPr sz="1000">
                 <a:solidFill>
                   <a:srgbClr val="F4F4F5"/>
                 </a:solidFill>
-                <a:latin typeface="Calibri"/>
-              </a:rPr>
-              <a:t>Crew</a:t>
+                <a:latin typeface="Consolas"/>
+              </a:rPr>
+              <a:t>import rateLimit from</a:t>
+            </a:r>
+          </a:p>
+          <a:p>
+            <a:pPr algn="l">
+              <a:spcBef>
+                <a:spcPts val="0"/>
+              </a:spcBef>
+              <a:spcAft>
+                <a:spcPts val="0"/>
+              </a:spcAft>
+            </a:pPr>
+            <a:r>
+              <a:rPr sz="1000">
+                <a:solidFill>
+                  <a:srgbClr val="F4F4F5"/>
+                </a:solidFill>
+                <a:latin typeface="Consolas"/>
+              </a:rPr>
+              <a:t>  "express-rate-limit";</a:t>
+            </a:r>
+          </a:p>
+          <a:p>
+            <a:pPr algn="l">
+              <a:spcBef>
+                <a:spcPts val="0"/>
+              </a:spcBef>
+              <a:spcAft>
+                <a:spcPts val="0"/>
+              </a:spcAft>
+            </a:pPr>
+            <a:endParaRPr sz="1000">
+              <a:solidFill>
+                <a:srgbClr val="F4F4F5"/>
+              </a:solidFill>
+              <a:latin typeface="Consolas"/>
+            </a:endParaRPr>
+          </a:p>
+          <a:p>
+            <a:pPr algn="l">
+              <a:spcBef>
+                <a:spcPts val="0"/>
+              </a:spcBef>
+              <a:spcAft>
+                <a:spcPts val="0"/>
+              </a:spcAft>
+            </a:pPr>
+            <a:r>
+              <a:rPr sz="1000">
+                <a:solidFill>
+                  <a:srgbClr val="F4F4F5"/>
+                </a:solidFill>
+                <a:latin typeface="Consolas"/>
+              </a:rPr>
+              <a:t>const loginLimiter = rateLimit({</a:t>
+            </a:r>
+          </a:p>
+          <a:p>
+            <a:pPr algn="l">
+              <a:spcBef>
+                <a:spcPts val="0"/>
+              </a:spcBef>
+              <a:spcAft>
+                <a:spcPts val="0"/>
+              </a:spcAft>
+            </a:pPr>
+            <a:r>
+              <a:rPr sz="1000">
+                <a:solidFill>
+                  <a:srgbClr val="F4F4F5"/>
+                </a:solidFill>
+                <a:latin typeface="Consolas"/>
+              </a:rPr>
+              <a:t>  windowMs: 15 * 60 * 1000,</a:t>
+            </a:r>
+          </a:p>
+          <a:p>
+            <a:pPr algn="l">
+              <a:spcBef>
+                <a:spcPts val="0"/>
+              </a:spcBef>
+              <a:spcAft>
+                <a:spcPts val="0"/>
+              </a:spcAft>
+            </a:pPr>
+            <a:r>
+              <a:rPr sz="1000">
+                <a:solidFill>
+                  <a:srgbClr val="F4F4F5"/>
+                </a:solidFill>
+                <a:latin typeface="Consolas"/>
+              </a:rPr>
+              <a:t>  max: 10,</a:t>
+            </a:r>
+          </a:p>
+          <a:p>
+            <a:pPr algn="l">
+              <a:spcBef>
+                <a:spcPts val="0"/>
+              </a:spcBef>
+              <a:spcAft>
+                <a:spcPts val="0"/>
+              </a:spcAft>
+            </a:pPr>
+            <a:r>
+              <a:rPr sz="1000">
+                <a:solidFill>
+                  <a:srgbClr val="F4F4F5"/>
+                </a:solidFill>
+                <a:latin typeface="Consolas"/>
+              </a:rPr>
+              <a:t>  standardHeaders: true,</a:t>
+            </a:r>
+          </a:p>
+          <a:p>
+            <a:pPr algn="l">
+              <a:spcBef>
+                <a:spcPts val="0"/>
+              </a:spcBef>
+              <a:spcAft>
+                <a:spcPts val="0"/>
+              </a:spcAft>
+            </a:pPr>
+            <a:r>
+              <a:rPr sz="1000">
+                <a:solidFill>
+                  <a:srgbClr val="F4F4F5"/>
+                </a:solidFill>
+                <a:latin typeface="Consolas"/>
+              </a:rPr>
+              <a:t>  legacyHeaders: false,</a:t>
+            </a:r>
+          </a:p>
+          <a:p>
+            <a:pPr algn="l">
+              <a:spcBef>
+                <a:spcPts val="0"/>
+              </a:spcBef>
+              <a:spcAft>
+                <a:spcPts val="0"/>
+              </a:spcAft>
+            </a:pPr>
+            <a:r>
+              <a:rPr sz="1000">
+                <a:solidFill>
+                  <a:srgbClr val="F4F4F5"/>
+                </a:solidFill>
+                <a:latin typeface="Consolas"/>
+              </a:rPr>
+              <a:t>  message: { error:</a:t>
+            </a:r>
+          </a:p>
+          <a:p>
+            <a:pPr algn="l">
+              <a:spcBef>
+                <a:spcPts val="0"/>
+              </a:spcBef>
+              <a:spcAft>
+                <a:spcPts val="0"/>
+              </a:spcAft>
+            </a:pPr>
+            <a:r>
+              <a:rPr sz="1000">
+                <a:solidFill>
+                  <a:srgbClr val="F4F4F5"/>
+                </a:solidFill>
+                <a:latin typeface="Consolas"/>
+              </a:rPr>
+              <a:t>    "Too many login attempts" }</a:t>
+            </a:r>
+          </a:p>
+          <a:p>
+            <a:pPr algn="l">
+              <a:spcBef>
+                <a:spcPts val="0"/>
+              </a:spcBef>
+              <a:spcAft>
+                <a:spcPts val="0"/>
+              </a:spcAft>
+            </a:pPr>
+            <a:r>
+              <a:rPr sz="1000">
+                <a:solidFill>
+                  <a:srgbClr val="F4F4F5"/>
+                </a:solidFill>
+                <a:latin typeface="Consolas"/>
+              </a:rPr>
+              <a:t>});</a:t>
+            </a:r>
+          </a:p>
+          <a:p>
+            <a:pPr algn="l">
+              <a:spcBef>
+                <a:spcPts val="0"/>
+              </a:spcBef>
+              <a:spcAft>
+                <a:spcPts val="0"/>
+              </a:spcAft>
+            </a:pPr>
+            <a:endParaRPr sz="1000">
+              <a:solidFill>
+                <a:srgbClr val="F4F4F5"/>
+              </a:solidFill>
+              <a:latin typeface="Consolas"/>
+            </a:endParaRPr>
+          </a:p>
+          <a:p>
+            <a:pPr algn="l">
+              <a:spcBef>
+                <a:spcPts val="0"/>
+              </a:spcBef>
+              <a:spcAft>
+                <a:spcPts val="0"/>
+              </a:spcAft>
+            </a:pPr>
+            <a:r>
+              <a:rPr sz="1000">
+                <a:solidFill>
+                  <a:srgbClr val="F4F4F5"/>
+                </a:solidFill>
+                <a:latin typeface="Consolas"/>
+              </a:rPr>
+              <a:t>router.post("/login",</a:t>
+            </a:r>
+          </a:p>
+          <a:p>
+            <a:pPr algn="l">
+              <a:spcBef>
+                <a:spcPts val="0"/>
+              </a:spcBef>
+              <a:spcAft>
+                <a:spcPts val="0"/>
+              </a:spcAft>
+            </a:pPr>
+            <a:r>
+              <a:rPr sz="1000">
+                <a:solidFill>
+                  <a:srgbClr val="F4F4F5"/>
+                </a:solidFill>
+                <a:latin typeface="Consolas"/>
+              </a:rPr>
+              <a:t>  loginLimiter, ...)</a:t>
             </a:r>
           </a:p>
         </p:txBody>
@@ -7473,8 +8470,8 @@
         </p:nvSpPr>
         <p:spPr>
           <a:xfrm>
-            <a:off x="9098280" y="3493008"/>
-            <a:ext cx="2468880" cy="274320"/>
+            <a:off x="4572000" y="5486400"/>
+            <a:ext cx="3383279" cy="822960"/>
           </a:xfrm>
           <a:prstGeom prst="rect">
             <a:avLst/>
@@ -7482,7 +8479,7 @@
           <a:noFill/>
         </p:spPr>
         <p:txBody>
-          <a:bodyPr wrap="square" lIns="0" rIns="0" tIns="0" bIns="0">
+          <a:bodyPr wrap="square" lIns="0" tIns="0" rIns="0" bIns="0">
             <a:spAutoFit/>
           </a:bodyPr>
           <a:lstStyle/>
@@ -7496,97 +8493,116 @@
               </a:spcAft>
             </a:pPr>
             <a:r>
-              <a:rPr sz="1000" b="0" i="0">
-                <a:solidFill>
-                  <a:srgbClr val="A1A1AA"/>
-                </a:solidFill>
-                <a:latin typeface="Calibri"/>
-              </a:rPr>
-              <a:t>online dot turns green</a:t>
-            </a:r>
-          </a:p>
-        </p:txBody>
-      </p:sp>
-      <p:sp>
-        <p:nvSpPr>
-          <p:cNvPr id="16" name="TextBox 15"/>
-          <p:cNvSpPr txBox="1"/>
+              <a:rPr sz="1100" b="0" i="1">
+                <a:solidFill>
+                  <a:srgbClr val="F59E0B"/>
+                </a:solidFill>
+                <a:latin typeface="Calibri"/>
+              </a:rPr>
+              <a:t>Front-end maps http_429 → user-friendly toast.</a:t>
+            </a:r>
+          </a:p>
+        </p:txBody>
+      </p:sp>
+      <p:sp>
+        <p:nvSpPr>
+          <p:cNvPr id="16" name="Rounded Rectangle 15"/>
+          <p:cNvSpPr/>
           <p:nvPr/>
         </p:nvSpPr>
         <p:spPr>
           <a:xfrm>
-            <a:off x="8778240" y="3794760"/>
-            <a:ext cx="274320" cy="274320"/>
-          </a:xfrm>
-          <a:prstGeom prst="rect">
-            <a:avLst/>
-          </a:prstGeom>
-          <a:noFill/>
-        </p:spPr>
-        <p:txBody>
-          <a:bodyPr wrap="square" lIns="0" rIns="0" tIns="0" bIns="0">
-            <a:spAutoFit/>
-          </a:bodyPr>
-          <a:lstStyle/>
-          <a:p>
-            <a:pPr algn="l">
-              <a:spcBef>
-                <a:spcPts val="0"/>
-              </a:spcBef>
-              <a:spcAft>
-                <a:spcPts val="0"/>
-              </a:spcAft>
-            </a:pPr>
-            <a:r>
-              <a:rPr sz="1400" b="1" i="0">
-                <a:solidFill>
-                  <a:srgbClr val="8B5CF6"/>
-                </a:solidFill>
-                <a:latin typeface="Calibri"/>
-              </a:rPr>
-              <a:t>4</a:t>
-            </a:r>
-          </a:p>
-        </p:txBody>
-      </p:sp>
-      <p:sp>
-        <p:nvSpPr>
-          <p:cNvPr id="17" name="TextBox 16"/>
-          <p:cNvSpPr txBox="1"/>
+            <a:off x="8321040" y="1554480"/>
+            <a:ext cx="3749039" cy="4937760"/>
+          </a:xfrm>
+          <a:prstGeom prst="roundRect">
+            <a:avLst>
+              <a:gd name="adj" fmla="val 6000"/>
+            </a:avLst>
+          </a:prstGeom>
+          <a:solidFill>
+            <a:srgbClr val="161922"/>
+          </a:solidFill>
+          <a:ln w="9525">
+            <a:solidFill>
+              <a:srgbClr val="2A2E3A"/>
+            </a:solidFill>
+          </a:ln>
+          <a:effectLst/>
+        </p:spPr>
+        <p:style>
+          <a:lnRef idx="1">
+            <a:schemeClr val="accent1"/>
+          </a:lnRef>
+          <a:fillRef idx="3">
+            <a:schemeClr val="accent1"/>
+          </a:fillRef>
+          <a:effectRef idx="2">
+            <a:schemeClr val="accent1"/>
+          </a:effectRef>
+          <a:fontRef idx="minor">
+            <a:schemeClr val="lt1"/>
+          </a:fontRef>
+        </p:style>
+        <p:txBody>
+          <a:bodyPr rtlCol="0" anchor="ctr"/>
+          <a:lstStyle/>
+          <a:p>
+            <a:pPr algn="ctr"/>
+            <a:endParaRPr/>
+          </a:p>
+        </p:txBody>
+      </p:sp>
+      <p:sp>
+        <p:nvSpPr>
+          <p:cNvPr id="17" name="Rounded Rectangle 16"/>
+          <p:cNvSpPr/>
           <p:nvPr/>
         </p:nvSpPr>
         <p:spPr>
           <a:xfrm>
-            <a:off x="9098280" y="3794760"/>
-            <a:ext cx="2468880" cy="274320"/>
-          </a:xfrm>
-          <a:prstGeom prst="rect">
-            <a:avLst/>
-          </a:prstGeom>
-          <a:noFill/>
-        </p:spPr>
-        <p:txBody>
-          <a:bodyPr wrap="square" lIns="0" rIns="0" tIns="0" bIns="0">
-            <a:spAutoFit/>
-          </a:bodyPr>
-          <a:lstStyle/>
-          <a:p>
-            <a:pPr algn="l">
-              <a:spcBef>
-                <a:spcPts val="0"/>
-              </a:spcBef>
-              <a:spcAft>
-                <a:spcPts val="0"/>
-              </a:spcAft>
-            </a:pPr>
-            <a:r>
-              <a:rPr sz="1400" b="1" i="0">
+            <a:off x="8503919" y="1737360"/>
+            <a:ext cx="822960" cy="320040"/>
+          </a:xfrm>
+          <a:prstGeom prst="roundRect">
+            <a:avLst>
+              <a:gd name="adj" fmla="val 50000"/>
+            </a:avLst>
+          </a:prstGeom>
+          <a:solidFill>
+            <a:srgbClr val="EF4444"/>
+          </a:solidFill>
+          <a:ln>
+            <a:noFill/>
+          </a:ln>
+        </p:spPr>
+        <p:style>
+          <a:lnRef idx="1">
+            <a:schemeClr val="accent1"/>
+          </a:lnRef>
+          <a:fillRef idx="3">
+            <a:schemeClr val="accent1"/>
+          </a:fillRef>
+          <a:effectRef idx="2">
+            <a:schemeClr val="accent1"/>
+          </a:effectRef>
+          <a:fontRef idx="minor">
+            <a:schemeClr val="lt1"/>
+          </a:fontRef>
+        </p:style>
+        <p:txBody>
+          <a:bodyPr tIns="18288" bIns="18288" rtlCol="0" anchor="ctr"/>
+          <a:lstStyle/>
+          <a:p>
+            <a:pPr algn="ctr"/>
+            <a:r>
+              <a:rPr sz="1100" b="1">
                 <a:solidFill>
                   <a:srgbClr val="F4F4F5"/>
                 </a:solidFill>
                 <a:latin typeface="Calibri"/>
               </a:rPr>
-              <a:t>Recruit</a:t>
+              <a:t>#10</a:t>
             </a:r>
           </a:p>
         </p:txBody>
@@ -7599,8 +8615,8 @@
         </p:nvSpPr>
         <p:spPr>
           <a:xfrm>
-            <a:off x="9098280" y="4041648"/>
-            <a:ext cx="2468880" cy="274320"/>
+            <a:off x="9372600" y="1737360"/>
+            <a:ext cx="2560320" cy="365760"/>
           </a:xfrm>
           <a:prstGeom prst="rect">
             <a:avLst/>
@@ -7608,7 +8624,7 @@
           <a:noFill/>
         </p:spPr>
         <p:txBody>
-          <a:bodyPr wrap="square" lIns="0" rIns="0" tIns="0" bIns="0">
+          <a:bodyPr wrap="square" lIns="0" tIns="0" rIns="0" bIns="0" anchor="ctr">
             <a:spAutoFit/>
           </a:bodyPr>
           <a:lstStyle/>
@@ -7622,13 +8638,13 @@
               </a:spcAft>
             </a:pPr>
             <a:r>
-              <a:rPr sz="1000" b="0" i="0">
-                <a:solidFill>
-                  <a:srgbClr val="A1A1AA"/>
-                </a:solidFill>
-                <a:latin typeface="Calibri"/>
-              </a:rPr>
-              <a:t>new agent in the grid</a:t>
+              <a:rPr sz="1600" b="1" i="0">
+                <a:solidFill>
+                  <a:srgbClr val="F4F4F5"/>
+                </a:solidFill>
+                <a:latin typeface="Calibri"/>
+              </a:rPr>
+              <a:t>IDOR fix on intel POST</a:t>
             </a:r>
           </a:p>
         </p:txBody>
@@ -7641,8 +8657,8 @@
         </p:nvSpPr>
         <p:spPr>
           <a:xfrm>
-            <a:off x="8778240" y="4343400"/>
-            <a:ext cx="274320" cy="274320"/>
+            <a:off x="8503919" y="2194560"/>
+            <a:ext cx="3383279" cy="640080"/>
           </a:xfrm>
           <a:prstGeom prst="rect">
             <a:avLst/>
@@ -7650,7 +8666,7 @@
           <a:noFill/>
         </p:spPr>
         <p:txBody>
-          <a:bodyPr wrap="square" lIns="0" rIns="0" tIns="0" bIns="0">
+          <a:bodyPr wrap="square" lIns="0" tIns="0" rIns="0" bIns="0">
             <a:spAutoFit/>
           </a:bodyPr>
           <a:lstStyle/>
@@ -7664,55 +8680,282 @@
               </a:spcAft>
             </a:pPr>
             <a:r>
-              <a:rPr sz="1400" b="1" i="0">
-                <a:solidFill>
-                  <a:srgbClr val="8B5CF6"/>
-                </a:solidFill>
-                <a:latin typeface="Calibri"/>
-              </a:rPr>
-              <a:t>5</a:t>
-            </a:r>
-          </a:p>
-        </p:txBody>
-      </p:sp>
-      <p:sp>
-        <p:nvSpPr>
-          <p:cNvPr id="20" name="TextBox 19"/>
-          <p:cNvSpPr txBox="1"/>
+              <a:rPr sz="1100" b="0" i="0">
+                <a:solidFill>
+                  <a:srgbClr val="A1A1AA"/>
+                </a:solidFill>
+                <a:latin typeface="Calibri"/>
+              </a:rPr>
+              <a:t>First version trusted authorId from the body. Any agent could post intel under another agent's name.</a:t>
+            </a:r>
+          </a:p>
+        </p:txBody>
+      </p:sp>
+      <p:sp>
+        <p:nvSpPr>
+          <p:cNvPr id="20" name="Rounded Rectangle 19"/>
+          <p:cNvSpPr/>
           <p:nvPr/>
         </p:nvSpPr>
         <p:spPr>
           <a:xfrm>
-            <a:off x="9098280" y="4343400"/>
-            <a:ext cx="2468880" cy="274320"/>
-          </a:xfrm>
-          <a:prstGeom prst="rect">
-            <a:avLst/>
-          </a:prstGeom>
-          <a:noFill/>
-        </p:spPr>
-        <p:txBody>
-          <a:bodyPr wrap="square" lIns="0" rIns="0" tIns="0" bIns="0">
-            <a:spAutoFit/>
-          </a:bodyPr>
-          <a:lstStyle/>
-          <a:p>
-            <a:pPr algn="l">
-              <a:spcBef>
-                <a:spcPts val="0"/>
-              </a:spcBef>
-              <a:spcAft>
-                <a:spcPts val="0"/>
-              </a:spcAft>
-            </a:pPr>
-            <a:r>
-              <a:rPr sz="1400" b="1" i="0">
+            <a:off x="8503919" y="2971800"/>
+            <a:ext cx="3383279" cy="2377440"/>
+          </a:xfrm>
+          <a:prstGeom prst="roundRect">
+            <a:avLst>
+              <a:gd name="adj" fmla="val 4000"/>
+            </a:avLst>
+          </a:prstGeom>
+          <a:solidFill>
+            <a:srgbClr val="0D0F15"/>
+          </a:solidFill>
+          <a:ln w="6350">
+            <a:solidFill>
+              <a:srgbClr val="2A2E3A"/>
+            </a:solidFill>
+          </a:ln>
+        </p:spPr>
+        <p:style>
+          <a:lnRef idx="1">
+            <a:schemeClr val="accent1"/>
+          </a:lnRef>
+          <a:fillRef idx="3">
+            <a:schemeClr val="accent1"/>
+          </a:fillRef>
+          <a:effectRef idx="2">
+            <a:schemeClr val="accent1"/>
+          </a:effectRef>
+          <a:fontRef idx="minor">
+            <a:schemeClr val="lt1"/>
+          </a:fontRef>
+        </p:style>
+        <p:txBody>
+          <a:bodyPr wrap="square" lIns="137160" tIns="91440" rIns="137160" bIns="91440" rtlCol="0" anchor="ctr"/>
+          <a:lstStyle/>
+          <a:p>
+            <a:pPr algn="l">
+              <a:spcBef>
+                <a:spcPts val="0"/>
+              </a:spcBef>
+              <a:spcAft>
+                <a:spcPts val="0"/>
+              </a:spcAft>
+            </a:pPr>
+            <a:r>
+              <a:rPr sz="1000">
                 <a:solidFill>
                   <a:srgbClr val="F4F4F5"/>
                 </a:solidFill>
-                <a:latin typeface="Calibri"/>
-              </a:rPr>
-              <a:t>Garage</a:t>
+                <a:latin typeface="Consolas"/>
+              </a:rPr>
+              <a:t>// BEFORE  (vulnerable)</a:t>
+            </a:r>
+          </a:p>
+          <a:p>
+            <a:pPr algn="l">
+              <a:spcBef>
+                <a:spcPts val="0"/>
+              </a:spcBef>
+              <a:spcAft>
+                <a:spcPts val="0"/>
+              </a:spcAft>
+            </a:pPr>
+            <a:r>
+              <a:rPr sz="1000">
+                <a:solidFill>
+                  <a:srgbClr val="F4F4F5"/>
+                </a:solidFill>
+                <a:latin typeface="Consolas"/>
+              </a:rPr>
+              <a:t>data: {</a:t>
+            </a:r>
+          </a:p>
+          <a:p>
+            <a:pPr algn="l">
+              <a:spcBef>
+                <a:spcPts val="0"/>
+              </a:spcBef>
+              <a:spcAft>
+                <a:spcPts val="0"/>
+              </a:spcAft>
+            </a:pPr>
+            <a:r>
+              <a:rPr sz="1000">
+                <a:solidFill>
+                  <a:srgbClr val="F4F4F5"/>
+                </a:solidFill>
+                <a:latin typeface="Consolas"/>
+              </a:rPr>
+              <a:t>  ...,</a:t>
+            </a:r>
+          </a:p>
+          <a:p>
+            <a:pPr algn="l">
+              <a:spcBef>
+                <a:spcPts val="0"/>
+              </a:spcBef>
+              <a:spcAft>
+                <a:spcPts val="0"/>
+              </a:spcAft>
+            </a:pPr>
+            <a:r>
+              <a:rPr sz="1000">
+                <a:solidFill>
+                  <a:srgbClr val="F4F4F5"/>
+                </a:solidFill>
+                <a:latin typeface="Consolas"/>
+              </a:rPr>
+              <a:t>  authorId: req.body.authorId</a:t>
+            </a:r>
+          </a:p>
+          <a:p>
+            <a:pPr algn="l">
+              <a:spcBef>
+                <a:spcPts val="0"/>
+              </a:spcBef>
+              <a:spcAft>
+                <a:spcPts val="0"/>
+              </a:spcAft>
+            </a:pPr>
+            <a:r>
+              <a:rPr sz="1000">
+                <a:solidFill>
+                  <a:srgbClr val="F4F4F5"/>
+                </a:solidFill>
+                <a:latin typeface="Consolas"/>
+              </a:rPr>
+              <a:t>}</a:t>
+            </a:r>
+          </a:p>
+          <a:p>
+            <a:pPr algn="l">
+              <a:spcBef>
+                <a:spcPts val="0"/>
+              </a:spcBef>
+              <a:spcAft>
+                <a:spcPts val="0"/>
+              </a:spcAft>
+            </a:pPr>
+            <a:endParaRPr sz="1000">
+              <a:solidFill>
+                <a:srgbClr val="F4F4F5"/>
+              </a:solidFill>
+              <a:latin typeface="Consolas"/>
+            </a:endParaRPr>
+          </a:p>
+          <a:p>
+            <a:pPr algn="l">
+              <a:spcBef>
+                <a:spcPts val="0"/>
+              </a:spcBef>
+              <a:spcAft>
+                <a:spcPts val="0"/>
+              </a:spcAft>
+            </a:pPr>
+            <a:r>
+              <a:rPr sz="1000">
+                <a:solidFill>
+                  <a:srgbClr val="F4F4F5"/>
+                </a:solidFill>
+                <a:latin typeface="Consolas"/>
+              </a:rPr>
+              <a:t>// AFTER  (server-authoritative)</a:t>
+            </a:r>
+          </a:p>
+          <a:p>
+            <a:pPr algn="l">
+              <a:spcBef>
+                <a:spcPts val="0"/>
+              </a:spcBef>
+              <a:spcAft>
+                <a:spcPts val="0"/>
+              </a:spcAft>
+            </a:pPr>
+            <a:r>
+              <a:rPr sz="1000">
+                <a:solidFill>
+                  <a:srgbClr val="F4F4F5"/>
+                </a:solidFill>
+                <a:latin typeface="Consolas"/>
+              </a:rPr>
+              <a:t>data: {</a:t>
+            </a:r>
+          </a:p>
+          <a:p>
+            <a:pPr algn="l">
+              <a:spcBef>
+                <a:spcPts val="0"/>
+              </a:spcBef>
+              <a:spcAft>
+                <a:spcPts val="0"/>
+              </a:spcAft>
+            </a:pPr>
+            <a:r>
+              <a:rPr sz="1000">
+                <a:solidFill>
+                  <a:srgbClr val="F4F4F5"/>
+                </a:solidFill>
+                <a:latin typeface="Consolas"/>
+              </a:rPr>
+              <a:t>  ...,</a:t>
+            </a:r>
+          </a:p>
+          <a:p>
+            <a:pPr algn="l">
+              <a:spcBef>
+                <a:spcPts val="0"/>
+              </a:spcBef>
+              <a:spcAft>
+                <a:spcPts val="0"/>
+              </a:spcAft>
+            </a:pPr>
+            <a:r>
+              <a:rPr sz="1000">
+                <a:solidFill>
+                  <a:srgbClr val="F4F4F5"/>
+                </a:solidFill>
+                <a:latin typeface="Consolas"/>
+              </a:rPr>
+              <a:t>  authorId: req.agent.id</a:t>
+            </a:r>
+          </a:p>
+          <a:p>
+            <a:pPr algn="l">
+              <a:spcBef>
+                <a:spcPts val="0"/>
+              </a:spcBef>
+              <a:spcAft>
+                <a:spcPts val="0"/>
+              </a:spcAft>
+            </a:pPr>
+            <a:r>
+              <a:rPr sz="1000">
+                <a:solidFill>
+                  <a:srgbClr val="F4F4F5"/>
+                </a:solidFill>
+                <a:latin typeface="Consolas"/>
+              </a:rPr>
+              <a:t>  //  ^^^ from the JWT</a:t>
+            </a:r>
+          </a:p>
+          <a:p>
+            <a:pPr algn="l">
+              <a:spcBef>
+                <a:spcPts val="0"/>
+              </a:spcBef>
+              <a:spcAft>
+                <a:spcPts val="0"/>
+              </a:spcAft>
+            </a:pPr>
+            <a:r>
+              <a:rPr sz="1000">
+                <a:solidFill>
+                  <a:srgbClr val="F4F4F5"/>
+                </a:solidFill>
+                <a:latin typeface="Consolas"/>
+              </a:rPr>
+              <a:t>}</a:t>
             </a:r>
           </a:p>
         </p:txBody>
@@ -7725,8 +8968,8 @@
         </p:nvSpPr>
         <p:spPr>
           <a:xfrm>
-            <a:off x="9098280" y="4590288"/>
-            <a:ext cx="2468880" cy="274320"/>
+            <a:off x="8503919" y="5486400"/>
+            <a:ext cx="3383279" cy="822960"/>
           </a:xfrm>
           <a:prstGeom prst="rect">
             <a:avLst/>
@@ -7734,7 +8977,7 @@
           <a:noFill/>
         </p:spPr>
         <p:txBody>
-          <a:bodyPr wrap="square" lIns="0" rIns="0" tIns="0" bIns="0">
+          <a:bodyPr wrap="square" lIns="0" tIns="0" rIns="0" bIns="0">
             <a:spAutoFit/>
           </a:bodyPr>
           <a:lstStyle/>
@@ -7748,13 +8991,13 @@
               </a:spcAft>
             </a:pPr>
             <a:r>
-              <a:rPr sz="1000" b="0" i="0">
-                <a:solidFill>
-                  <a:srgbClr val="A1A1AA"/>
-                </a:solidFill>
-                <a:latin typeface="Calibri"/>
-              </a:rPr>
-              <a:t>edit vehicle, color picker</a:t>
+              <a:rPr sz="1100" b="0" i="1">
+                <a:solidFill>
+                  <a:srgbClr val="22C55E"/>
+                </a:solidFill>
+                <a:latin typeface="Calibri"/>
+              </a:rPr>
+              <a:t>Authenticated  ≠  authorized.  The server decides the author.</a:t>
             </a:r>
           </a:p>
         </p:txBody>
@@ -7767,8 +9010,8 @@
         </p:nvSpPr>
         <p:spPr>
           <a:xfrm>
-            <a:off x="8778240" y="4892040"/>
-            <a:ext cx="274320" cy="274320"/>
+            <a:off x="457200" y="6446520"/>
+            <a:ext cx="5486400" cy="274320"/>
           </a:xfrm>
           <a:prstGeom prst="rect">
             <a:avLst/>
@@ -7776,7 +9019,7 @@
           <a:noFill/>
         </p:spPr>
         <p:txBody>
-          <a:bodyPr wrap="square" lIns="0" rIns="0" tIns="0" bIns="0">
+          <a:bodyPr wrap="square" lIns="0" tIns="0" rIns="0" bIns="0">
             <a:spAutoFit/>
           </a:bodyPr>
           <a:lstStyle/>
@@ -7790,13 +9033,13 @@
               </a:spcAft>
             </a:pPr>
             <a:r>
-              <a:rPr sz="1400" b="1" i="0">
-                <a:solidFill>
-                  <a:srgbClr val="8B5CF6"/>
-                </a:solidFill>
-                <a:latin typeface="Calibri"/>
-              </a:rPr>
-              <a:t>6</a:t>
+              <a:rPr sz="1000" b="0" i="0">
+                <a:solidFill>
+                  <a:srgbClr val="71717A"/>
+                </a:solidFill>
+                <a:latin typeface="Calibri"/>
+              </a:rPr>
+              <a:t>MOD8  ·  Milestone 3  ·  The Heist</a:t>
             </a:r>
           </a:p>
         </p:txBody>
@@ -7809,8 +9052,8 @@
         </p:nvSpPr>
         <p:spPr>
           <a:xfrm>
-            <a:off x="9098280" y="4892040"/>
-            <a:ext cx="2468880" cy="274320"/>
+            <a:off x="10972800" y="6446520"/>
+            <a:ext cx="914400" cy="274320"/>
           </a:xfrm>
           <a:prstGeom prst="rect">
             <a:avLst/>
@@ -7818,54 +9061,12 @@
           <a:noFill/>
         </p:spPr>
         <p:txBody>
-          <a:bodyPr wrap="square" lIns="0" rIns="0" tIns="0" bIns="0">
+          <a:bodyPr wrap="square" lIns="0" tIns="0" rIns="0" bIns="0">
             <a:spAutoFit/>
           </a:bodyPr>
           <a:lstStyle/>
           <a:p>
-            <a:pPr algn="l">
-              <a:spcBef>
-                <a:spcPts val="0"/>
-              </a:spcBef>
-              <a:spcAft>
-                <a:spcPts val="0"/>
-              </a:spcAft>
-            </a:pPr>
-            <a:r>
-              <a:rPr sz="1400" b="1" i="0">
-                <a:solidFill>
-                  <a:srgbClr val="F4F4F5"/>
-                </a:solidFill>
-                <a:latin typeface="Calibri"/>
-              </a:rPr>
-              <a:t>Intel</a:t>
-            </a:r>
-          </a:p>
-        </p:txBody>
-      </p:sp>
-      <p:sp>
-        <p:nvSpPr>
-          <p:cNvPr id="24" name="TextBox 23"/>
-          <p:cNvSpPr txBox="1"/>
-          <p:nvPr/>
-        </p:nvSpPr>
-        <p:spPr>
-          <a:xfrm>
-            <a:off x="9098280" y="5138927"/>
-            <a:ext cx="2468880" cy="274320"/>
-          </a:xfrm>
-          <a:prstGeom prst="rect">
-            <a:avLst/>
-          </a:prstGeom>
-          <a:noFill/>
-        </p:spPr>
-        <p:txBody>
-          <a:bodyPr wrap="square" lIns="0" rIns="0" tIns="0" bIns="0">
-            <a:spAutoFit/>
-          </a:bodyPr>
-          <a:lstStyle/>
-          <a:p>
-            <a:pPr algn="l">
+            <a:pPr algn="r">
               <a:spcBef>
                 <a:spcPts val="0"/>
               </a:spcBef>
@@ -7876,221 +9077,11 @@
             <a:r>
               <a:rPr sz="1000" b="0" i="0">
                 <a:solidFill>
-                  <a:srgbClr val="A1A1AA"/>
-                </a:solidFill>
-                <a:latin typeface="Calibri"/>
-              </a:rPr>
-              <a:t>pin a file (optimistic)</a:t>
-            </a:r>
-          </a:p>
-        </p:txBody>
-      </p:sp>
-      <p:sp>
-        <p:nvSpPr>
-          <p:cNvPr id="25" name="TextBox 24"/>
-          <p:cNvSpPr txBox="1"/>
-          <p:nvPr/>
-        </p:nvSpPr>
-        <p:spPr>
-          <a:xfrm>
-            <a:off x="8778240" y="5440679"/>
-            <a:ext cx="274320" cy="274320"/>
-          </a:xfrm>
-          <a:prstGeom prst="rect">
-            <a:avLst/>
-          </a:prstGeom>
-          <a:noFill/>
-        </p:spPr>
-        <p:txBody>
-          <a:bodyPr wrap="square" lIns="0" rIns="0" tIns="0" bIns="0">
-            <a:spAutoFit/>
-          </a:bodyPr>
-          <a:lstStyle/>
-          <a:p>
-            <a:pPr algn="l">
-              <a:spcBef>
-                <a:spcPts val="0"/>
-              </a:spcBef>
-              <a:spcAft>
-                <a:spcPts val="0"/>
-              </a:spcAft>
-            </a:pPr>
-            <a:r>
-              <a:rPr sz="1400" b="1" i="0">
-                <a:solidFill>
-                  <a:srgbClr val="8B5CF6"/>
-                </a:solidFill>
-                <a:latin typeface="Calibri"/>
-              </a:rPr>
-              <a:t>7</a:t>
-            </a:r>
-          </a:p>
-        </p:txBody>
-      </p:sp>
-      <p:sp>
-        <p:nvSpPr>
-          <p:cNvPr id="26" name="TextBox 25"/>
-          <p:cNvSpPr txBox="1"/>
-          <p:nvPr/>
-        </p:nvSpPr>
-        <p:spPr>
-          <a:xfrm>
-            <a:off x="9098280" y="5440679"/>
-            <a:ext cx="2468880" cy="274320"/>
-          </a:xfrm>
-          <a:prstGeom prst="rect">
-            <a:avLst/>
-          </a:prstGeom>
-          <a:noFill/>
-        </p:spPr>
-        <p:txBody>
-          <a:bodyPr wrap="square" lIns="0" rIns="0" tIns="0" bIns="0">
-            <a:spAutoFit/>
-          </a:bodyPr>
-          <a:lstStyle/>
-          <a:p>
-            <a:pPr algn="l">
-              <a:spcBef>
-                <a:spcPts val="0"/>
-              </a:spcBef>
-              <a:spcAft>
-                <a:spcPts val="0"/>
-              </a:spcAft>
-            </a:pPr>
-            <a:r>
-              <a:rPr sz="1400" b="1" i="0">
-                <a:solidFill>
-                  <a:srgbClr val="F4F4F5"/>
-                </a:solidFill>
-                <a:latin typeface="Calibri"/>
-              </a:rPr>
-              <a:t>Theme</a:t>
-            </a:r>
-          </a:p>
-        </p:txBody>
-      </p:sp>
-      <p:sp>
-        <p:nvSpPr>
-          <p:cNvPr id="27" name="TextBox 26"/>
-          <p:cNvSpPr txBox="1"/>
-          <p:nvPr/>
-        </p:nvSpPr>
-        <p:spPr>
-          <a:xfrm>
-            <a:off x="9098280" y="5687567"/>
-            <a:ext cx="2468880" cy="274320"/>
-          </a:xfrm>
-          <a:prstGeom prst="rect">
-            <a:avLst/>
-          </a:prstGeom>
-          <a:noFill/>
-        </p:spPr>
-        <p:txBody>
-          <a:bodyPr wrap="square" lIns="0" rIns="0" tIns="0" bIns="0">
-            <a:spAutoFit/>
-          </a:bodyPr>
-          <a:lstStyle/>
-          <a:p>
-            <a:pPr algn="l">
-              <a:spcBef>
-                <a:spcPts val="0"/>
-              </a:spcBef>
-              <a:spcAft>
-                <a:spcPts val="0"/>
-              </a:spcAft>
-            </a:pPr>
-            <a:r>
-              <a:rPr sz="1000" b="0" i="0">
-                <a:solidFill>
-                  <a:srgbClr val="A1A1AA"/>
-                </a:solidFill>
-                <a:latin typeface="Calibri"/>
-              </a:rPr>
-              <a:t>Sun / Moon toggle</a:t>
-            </a:r>
-          </a:p>
-        </p:txBody>
-      </p:sp>
-      <p:sp>
-        <p:nvSpPr>
-          <p:cNvPr id="28" name="TextBox 27"/>
-          <p:cNvSpPr txBox="1"/>
-          <p:nvPr/>
-        </p:nvSpPr>
-        <p:spPr>
-          <a:xfrm>
-            <a:off x="457200" y="6446520"/>
-            <a:ext cx="5486400" cy="274320"/>
-          </a:xfrm>
-          <a:prstGeom prst="rect">
-            <a:avLst/>
-          </a:prstGeom>
-          <a:noFill/>
-        </p:spPr>
-        <p:txBody>
-          <a:bodyPr wrap="square" lIns="0" rIns="0" tIns="0" bIns="0">
-            <a:spAutoFit/>
-          </a:bodyPr>
-          <a:lstStyle/>
-          <a:p>
-            <a:pPr algn="l">
-              <a:spcBef>
-                <a:spcPts val="0"/>
-              </a:spcBef>
-              <a:spcAft>
-                <a:spcPts val="0"/>
-              </a:spcAft>
-            </a:pPr>
-            <a:r>
-              <a:rPr sz="1000" b="0" i="0">
-                <a:solidFill>
                   <a:srgbClr val="71717A"/>
                 </a:solidFill>
                 <a:latin typeface="Calibri"/>
               </a:rPr>
-              <a:t>MOD8  ·  Milestone 3  ·  The Heist</a:t>
-            </a:r>
-          </a:p>
-        </p:txBody>
-      </p:sp>
-      <p:sp>
-        <p:nvSpPr>
-          <p:cNvPr id="29" name="TextBox 28"/>
-          <p:cNvSpPr txBox="1"/>
-          <p:nvPr/>
-        </p:nvSpPr>
-        <p:spPr>
-          <a:xfrm>
-            <a:off x="10972800" y="6446520"/>
-            <a:ext cx="914400" cy="274320"/>
-          </a:xfrm>
-          <a:prstGeom prst="rect">
-            <a:avLst/>
-          </a:prstGeom>
-          <a:noFill/>
-        </p:spPr>
-        <p:txBody>
-          <a:bodyPr wrap="square" lIns="0" rIns="0" tIns="0" bIns="0">
-            <a:spAutoFit/>
-          </a:bodyPr>
-          <a:lstStyle/>
-          <a:p>
-            <a:pPr algn="r">
-              <a:spcBef>
-                <a:spcPts val="0"/>
-              </a:spcBef>
-              <a:spcAft>
-                <a:spcPts val="0"/>
-              </a:spcAft>
-            </a:pPr>
-            <a:r>
-              <a:rPr sz="1000" b="0" i="0">
-                <a:solidFill>
-                  <a:srgbClr val="71717A"/>
-                </a:solidFill>
-                <a:latin typeface="Calibri"/>
-              </a:rPr>
-              <a:t>4 / 7</a:t>
+              <a:t>5 / 7</a:t>
             </a:r>
           </a:p>
         </p:txBody>
@@ -8104,7 +9095,7 @@
 </file>
 
 <file path=ppt/slides/slide5.xml><?xml version="1.0" encoding="utf-8"?>
-<p:sld xmlns:a="http://schemas.openxmlformats.org/drawingml/2006/main" xmlns:p="http://schemas.openxmlformats.org/presentationml/2006/main" xmlns:r="http://schemas.openxmlformats.org/officeDocument/2006/relationships">
+<p:sld xmlns:a="http://schemas.openxmlformats.org/drawingml/2006/main" xmlns:r="http://schemas.openxmlformats.org/officeDocument/2006/relationships" xmlns:p="http://schemas.openxmlformats.org/presentationml/2006/main">
   <p:cSld>
     <p:bg>
       <p:bgPr>
@@ -8120,7 +9111,14 @@
         <p:cNvGrpSpPr/>
         <p:nvPr/>
       </p:nvGrpSpPr>
-      <p:grpSpPr/>
+      <p:grpSpPr>
+        <a:xfrm>
+          <a:off x="0" y="0"/>
+          <a:ext cx="0" cy="0"/>
+          <a:chOff x="0" y="0"/>
+          <a:chExt cx="0" cy="0"/>
+        </a:xfrm>
+      </p:grpSpPr>
       <p:sp>
         <p:nvSpPr>
           <p:cNvPr id="2" name="TextBox 1"/>
@@ -8138,7 +9136,7 @@
           <a:noFill/>
         </p:spPr>
         <p:txBody>
-          <a:bodyPr wrap="square" lIns="0" rIns="0" tIns="0" bIns="0">
+          <a:bodyPr wrap="square" lIns="0" tIns="0" rIns="0" bIns="0">
             <a:spAutoFit/>
           </a:bodyPr>
           <a:lstStyle/>
@@ -8158,7 +9156,7 @@
                 </a:solidFill>
                 <a:latin typeface="Calibri"/>
               </a:rPr>
-              <a:t>Secure coding  ·  three highlights we defend</a:t>
+              <a:t>What surprised us  ·  what we'd redo</a:t>
             </a:r>
           </a:p>
         </p:txBody>
@@ -8180,7 +9178,7 @@
           <a:noFill/>
         </p:spPr>
         <p:txBody>
-          <a:bodyPr wrap="square" lIns="0" rIns="0" tIns="0" bIns="0">
+          <a:bodyPr wrap="square" lIns="0" tIns="0" rIns="0" bIns="0">
             <a:spAutoFit/>
           </a:bodyPr>
           <a:lstStyle/>
@@ -8200,7 +9198,7 @@
                 </a:solidFill>
                 <a:latin typeface="Calibri"/>
               </a:rPr>
-              <a:t>Out of the 15 practices we documented, these are the three a grader is most likely to probe.</a:t>
+              <a:t>Three real moments that shaped the codebase.</a:t>
             </a:r>
           </a:p>
         </p:txBody>
@@ -8214,7 +9212,7 @@
         <p:spPr>
           <a:xfrm>
             <a:off x="457200" y="1554480"/>
-            <a:ext cx="3749039" cy="4937760"/>
+            <a:ext cx="11247120" cy="1417320"/>
           </a:xfrm>
           <a:prstGeom prst="roundRect">
             <a:avLst>
@@ -8250,6 +9248,7 @@
           <a:lstStyle/>
           <a:p>
             <a:pPr algn="ctr"/>
+            <a:endParaRPr/>
           </a:p>
         </p:txBody>
       </p:sp>
@@ -8261,8 +9260,8 @@
         </p:nvSpPr>
         <p:spPr>
           <a:xfrm>
-            <a:off x="640080" y="1737360"/>
-            <a:ext cx="822960" cy="320040"/>
+            <a:off x="640080" y="1719072"/>
+            <a:ext cx="1188720" cy="365760"/>
           </a:xfrm>
           <a:prstGeom prst="roundRect">
             <a:avLst>
@@ -8270,7 +9269,7 @@
             </a:avLst>
           </a:prstGeom>
           <a:solidFill>
-            <a:srgbClr val="8B5CF6"/>
+            <a:srgbClr val="38BDF8"/>
           </a:solidFill>
           <a:ln>
             <a:noFill/>
@@ -8291,7 +9290,7 @@
           </a:fontRef>
         </p:style>
         <p:txBody>
-          <a:bodyPr rtlCol="0" anchor="ctr" tIns="18288" bIns="18288"/>
+          <a:bodyPr tIns="18288" bIns="18288" rtlCol="0" anchor="ctr"/>
           <a:lstStyle/>
           <a:p>
             <a:pPr algn="ctr"/>
@@ -8302,7 +9301,7 @@
                 </a:solidFill>
                 <a:latin typeface="Calibri"/>
               </a:rPr>
-              <a:t>#4</a:t>
+              <a:t>MAPPING</a:t>
             </a:r>
           </a:p>
         </p:txBody>
@@ -8315,8 +9314,8 @@
         </p:nvSpPr>
         <p:spPr>
           <a:xfrm>
-            <a:off x="1508760" y="1737360"/>
-            <a:ext cx="2560320" cy="365760"/>
+            <a:off x="1965960" y="1737360"/>
+            <a:ext cx="9144000" cy="365760"/>
           </a:xfrm>
           <a:prstGeom prst="rect">
             <a:avLst/>
@@ -8324,7 +9323,7 @@
           <a:noFill/>
         </p:spPr>
         <p:txBody>
-          <a:bodyPr wrap="square" lIns="0" rIns="0" tIns="0" bIns="0" anchor="ctr">
+          <a:bodyPr wrap="square" lIns="0" tIns="0" rIns="0" bIns="0">
             <a:spAutoFit/>
           </a:bodyPr>
           <a:lstStyle/>
@@ -8338,13 +9337,13 @@
               </a:spcAft>
             </a:pPr>
             <a:r>
-              <a:rPr sz="1600" b="1" i="0">
+              <a:rPr sz="1800" b="1" i="0">
                 <a:solidFill>
                   <a:srgbClr val="F4F4F5"/>
                 </a:solidFill>
                 <a:latin typeface="Calibri"/>
               </a:rPr>
-              <a:t>Timing-safe login</a:t>
+              <a:t>Front-end labels  ≠  Prisma enums</a:t>
             </a:r>
           </a:p>
         </p:txBody>
@@ -8358,7 +9357,7 @@
         <p:spPr>
           <a:xfrm>
             <a:off x="640080" y="2194560"/>
-            <a:ext cx="3383279" cy="640080"/>
+            <a:ext cx="10515600" cy="777240"/>
           </a:xfrm>
           <a:prstGeom prst="rect">
             <a:avLst/>
@@ -8366,7 +9365,7 @@
           <a:noFill/>
         </p:spPr>
         <p:txBody>
-          <a:bodyPr wrap="square" lIns="0" rIns="0" tIns="0" bIns="0">
+          <a:bodyPr wrap="square" lIns="0" tIns="0" rIns="0" bIns="0">
             <a:spAutoFit/>
           </a:bodyPr>
           <a:lstStyle/>
@@ -8380,13 +9379,13 @@
               </a:spcAft>
             </a:pPr>
             <a:r>
-              <a:rPr sz="1100" b="0" i="0">
+              <a:rPr sz="1200" b="0" i="0">
                 <a:solidFill>
                   <a:srgbClr val="A1A1AA"/>
                 </a:solidFill>
                 <a:latin typeface="Calibri"/>
               </a:rPr>
-              <a:t>If the alias is unknown, we still run bcrypt against a dummy hash so the response time is identical.</a:t>
+              <a:t>Milestone 2 hardcoded "The Plan", "Godfather" in 30+ components. The API uses SCREAMING_SNAKE. We added one mappers.js file — components stay untouched, the boundary is the only thing that knows about both.</a:t>
             </a:r>
           </a:p>
         </p:txBody>
@@ -8399,22 +9398,23 @@
         </p:nvSpPr>
         <p:spPr>
           <a:xfrm>
-            <a:off x="640080" y="2971800"/>
-            <a:ext cx="3383279" cy="2377440"/>
+            <a:off x="457200" y="3136391"/>
+            <a:ext cx="11247120" cy="1417320"/>
           </a:xfrm>
           <a:prstGeom prst="roundRect">
             <a:avLst>
-              <a:gd name="adj" fmla="val 4000"/>
+              <a:gd name="adj" fmla="val 6000"/>
             </a:avLst>
           </a:prstGeom>
           <a:solidFill>
-            <a:srgbClr val="0D0F15"/>
+            <a:srgbClr val="161922"/>
           </a:solidFill>
-          <a:ln w="6350">
+          <a:ln w="9525">
             <a:solidFill>
               <a:srgbClr val="2A2E3A"/>
             </a:solidFill>
           </a:ln>
+          <a:effectLst/>
         </p:spPr>
         <p:style>
           <a:lnRef idx="1">
@@ -8431,343 +9431,36 @@
           </a:fontRef>
         </p:style>
         <p:txBody>
-          <a:bodyPr rtlCol="0" anchor="ctr" lIns="137160" rIns="137160" tIns="91440" bIns="91440" wrap="square"/>
-          <a:lstStyle/>
-          <a:p>
-            <a:pPr algn="l">
-              <a:spcBef>
-                <a:spcPts val="0"/>
-              </a:spcBef>
-              <a:spcAft>
-                <a:spcPts val="0"/>
-              </a:spcAft>
-            </a:pPr>
-            <a:r>
-              <a:rPr sz="1000">
-                <a:solidFill>
-                  <a:srgbClr val="F4F4F5"/>
-                </a:solidFill>
-                <a:latin typeface="Consolas"/>
-              </a:rPr>
-              <a:t>const fakeHash = "$2b$10$Cw...";</a:t>
-            </a:r>
-          </a:p>
-          <a:p>
-            <a:pPr algn="l">
-              <a:spcBef>
-                <a:spcPts val="0"/>
-              </a:spcBef>
-              <a:spcAft>
-                <a:spcPts val="0"/>
-              </a:spcAft>
-            </a:pPr>
-            <a:r>
-              <a:rPr sz="1000">
-                <a:solidFill>
-                  <a:srgbClr val="F4F4F5"/>
-                </a:solidFill>
-                <a:latin typeface="Consolas"/>
-              </a:rPr>
-              <a:t>const hash = agent</a:t>
-            </a:r>
-          </a:p>
-          <a:p>
-            <a:pPr algn="l">
-              <a:spcBef>
-                <a:spcPts val="0"/>
-              </a:spcBef>
-              <a:spcAft>
-                <a:spcPts val="0"/>
-              </a:spcAft>
-            </a:pPr>
-            <a:r>
-              <a:rPr sz="1000">
-                <a:solidFill>
-                  <a:srgbClr val="F4F4F5"/>
-                </a:solidFill>
-                <a:latin typeface="Consolas"/>
-              </a:rPr>
-              <a:t>  ? agent.password</a:t>
-            </a:r>
-          </a:p>
-          <a:p>
-            <a:pPr algn="l">
-              <a:spcBef>
-                <a:spcPts val="0"/>
-              </a:spcBef>
-              <a:spcAft>
-                <a:spcPts val="0"/>
-              </a:spcAft>
-            </a:pPr>
-            <a:r>
-              <a:rPr sz="1000">
-                <a:solidFill>
-                  <a:srgbClr val="F4F4F5"/>
-                </a:solidFill>
-                <a:latin typeface="Consolas"/>
-              </a:rPr>
-              <a:t>  : fakeHash;</a:t>
-            </a:r>
-          </a:p>
-          <a:p>
-            <a:pPr algn="l">
-              <a:spcBef>
-                <a:spcPts val="0"/>
-              </a:spcBef>
-              <a:spcAft>
-                <a:spcPts val="0"/>
-              </a:spcAft>
-            </a:pPr>
-            <a:r>
-              <a:rPr sz="1000">
-                <a:solidFill>
-                  <a:srgbClr val="F4F4F5"/>
-                </a:solidFill>
-                <a:latin typeface="Consolas"/>
-              </a:rPr>
-              <a:t>const match =</a:t>
-            </a:r>
-          </a:p>
-          <a:p>
-            <a:pPr algn="l">
-              <a:spcBef>
-                <a:spcPts val="0"/>
-              </a:spcBef>
-              <a:spcAft>
-                <a:spcPts val="0"/>
-              </a:spcAft>
-            </a:pPr>
-            <a:r>
-              <a:rPr sz="1000">
-                <a:solidFill>
-                  <a:srgbClr val="F4F4F5"/>
-                </a:solidFill>
-                <a:latin typeface="Consolas"/>
-              </a:rPr>
-              <a:t>  await bcrypt.compare(</a:t>
-            </a:r>
-          </a:p>
-          <a:p>
-            <a:pPr algn="l">
-              <a:spcBef>
-                <a:spcPts val="0"/>
-              </a:spcBef>
-              <a:spcAft>
-                <a:spcPts val="0"/>
-              </a:spcAft>
-            </a:pPr>
-            <a:r>
-              <a:rPr sz="1000">
-                <a:solidFill>
-                  <a:srgbClr val="F4F4F5"/>
-                </a:solidFill>
-                <a:latin typeface="Consolas"/>
-              </a:rPr>
-              <a:t>    password,</a:t>
-            </a:r>
-          </a:p>
-          <a:p>
-            <a:pPr algn="l">
-              <a:spcBef>
-                <a:spcPts val="0"/>
-              </a:spcBef>
-              <a:spcAft>
-                <a:spcPts val="0"/>
-              </a:spcAft>
-            </a:pPr>
-            <a:r>
-              <a:rPr sz="1000">
-                <a:solidFill>
-                  <a:srgbClr val="F4F4F5"/>
-                </a:solidFill>
-                <a:latin typeface="Consolas"/>
-              </a:rPr>
-              <a:t>    hash</a:t>
-            </a:r>
-          </a:p>
-          <a:p>
-            <a:pPr algn="l">
-              <a:spcBef>
-                <a:spcPts val="0"/>
-              </a:spcBef>
-              <a:spcAft>
-                <a:spcPts val="0"/>
-              </a:spcAft>
-            </a:pPr>
-            <a:r>
-              <a:rPr sz="1000">
-                <a:solidFill>
-                  <a:srgbClr val="F4F4F5"/>
-                </a:solidFill>
-                <a:latin typeface="Consolas"/>
-              </a:rPr>
-              <a:t>  );</a:t>
-            </a:r>
-          </a:p>
-          <a:p>
-            <a:pPr algn="l">
-              <a:spcBef>
-                <a:spcPts val="0"/>
-              </a:spcBef>
-              <a:spcAft>
-                <a:spcPts val="0"/>
-              </a:spcAft>
-            </a:pPr>
-            <a:r>
-              <a:rPr sz="1000">
-                <a:solidFill>
-                  <a:srgbClr val="F4F4F5"/>
-                </a:solidFill>
-                <a:latin typeface="Consolas"/>
-              </a:rPr>
-              <a:t>if (!agent || !match) {</a:t>
-            </a:r>
-          </a:p>
-          <a:p>
-            <a:pPr algn="l">
-              <a:spcBef>
-                <a:spcPts val="0"/>
-              </a:spcBef>
-              <a:spcAft>
-                <a:spcPts val="0"/>
-              </a:spcAft>
-            </a:pPr>
-            <a:r>
-              <a:rPr sz="1000">
-                <a:solidFill>
-                  <a:srgbClr val="F4F4F5"/>
-                </a:solidFill>
-                <a:latin typeface="Consolas"/>
-              </a:rPr>
-              <a:t>  return res.status(401)</a:t>
-            </a:r>
-          </a:p>
-          <a:p>
-            <a:pPr algn="l">
-              <a:spcBef>
-                <a:spcPts val="0"/>
-              </a:spcBef>
-              <a:spcAft>
-                <a:spcPts val="0"/>
-              </a:spcAft>
-            </a:pPr>
-            <a:r>
-              <a:rPr sz="1000">
-                <a:solidFill>
-                  <a:srgbClr val="F4F4F5"/>
-                </a:solidFill>
-                <a:latin typeface="Consolas"/>
-              </a:rPr>
-              <a:t>    .json({error:</a:t>
-            </a:r>
-          </a:p>
-          <a:p>
-            <a:pPr algn="l">
-              <a:spcBef>
-                <a:spcPts val="0"/>
-              </a:spcBef>
-              <a:spcAft>
-                <a:spcPts val="0"/>
-              </a:spcAft>
-            </a:pPr>
-            <a:r>
-              <a:rPr sz="1000">
-                <a:solidFill>
-                  <a:srgbClr val="F4F4F5"/>
-                </a:solidFill>
-                <a:latin typeface="Consolas"/>
-              </a:rPr>
-              <a:t>      "invalid_credentials"});</a:t>
-            </a:r>
-          </a:p>
-          <a:p>
-            <a:pPr algn="l">
-              <a:spcBef>
-                <a:spcPts val="0"/>
-              </a:spcBef>
-              <a:spcAft>
-                <a:spcPts val="0"/>
-              </a:spcAft>
-            </a:pPr>
-            <a:r>
-              <a:rPr sz="1000">
-                <a:solidFill>
-                  <a:srgbClr val="F4F4F5"/>
-                </a:solidFill>
-                <a:latin typeface="Consolas"/>
-              </a:rPr>
-              <a:t>}</a:t>
-            </a:r>
-          </a:p>
-        </p:txBody>
-      </p:sp>
-      <p:sp>
-        <p:nvSpPr>
-          <p:cNvPr id="9" name="TextBox 8"/>
-          <p:cNvSpPr txBox="1"/>
-          <p:nvPr/>
-        </p:nvSpPr>
-        <p:spPr>
-          <a:xfrm>
-            <a:off x="640080" y="5486400"/>
-            <a:ext cx="3383279" cy="822960"/>
-          </a:xfrm>
-          <a:prstGeom prst="rect">
-            <a:avLst/>
-          </a:prstGeom>
-          <a:noFill/>
-        </p:spPr>
-        <p:txBody>
-          <a:bodyPr wrap="square" lIns="0" rIns="0" tIns="0" bIns="0">
-            <a:spAutoFit/>
-          </a:bodyPr>
-          <a:lstStyle/>
-          <a:p>
-            <a:pPr algn="l">
-              <a:spcBef>
-                <a:spcPts val="0"/>
-              </a:spcBef>
-              <a:spcAft>
-                <a:spcPts val="0"/>
-              </a:spcAft>
-            </a:pPr>
-            <a:r>
-              <a:rPr sz="1100" b="0" i="1">
-                <a:solidFill>
-                  <a:srgbClr val="F59E0B"/>
-                </a:solidFill>
-                <a:latin typeface="Calibri"/>
-              </a:rPr>
-              <a:t>Blocks alias enumeration through response-time analysis.</a:t>
-            </a:r>
-          </a:p>
-        </p:txBody>
-      </p:sp>
-      <p:sp>
-        <p:nvSpPr>
-          <p:cNvPr id="10" name="Rounded Rectangle 9"/>
+          <a:bodyPr rtlCol="0" anchor="ctr"/>
+          <a:lstStyle/>
+          <a:p>
+            <a:pPr algn="ctr"/>
+            <a:endParaRPr/>
+          </a:p>
+        </p:txBody>
+      </p:sp>
+      <p:sp>
+        <p:nvSpPr>
+          <p:cNvPr id="9" name="Rounded Rectangle 8"/>
           <p:cNvSpPr/>
           <p:nvPr/>
         </p:nvSpPr>
         <p:spPr>
           <a:xfrm>
-            <a:off x="4389120" y="1554480"/>
-            <a:ext cx="3749039" cy="4937760"/>
+            <a:off x="640080" y="3300984"/>
+            <a:ext cx="1188720" cy="365760"/>
           </a:xfrm>
           <a:prstGeom prst="roundRect">
             <a:avLst>
-              <a:gd name="adj" fmla="val 6000"/>
+              <a:gd name="adj" fmla="val 50000"/>
             </a:avLst>
           </a:prstGeom>
           <a:solidFill>
-            <a:srgbClr val="161922"/>
+            <a:srgbClr val="EF4444"/>
           </a:solidFill>
-          <a:ln w="9525">
-            <a:solidFill>
-              <a:srgbClr val="2A2E3A"/>
-            </a:solidFill>
+          <a:ln>
+            <a:noFill/>
           </a:ln>
-          <a:effectLst/>
         </p:spPr>
         <p:style>
           <a:lnRef idx="1">
@@ -8784,35 +9477,131 @@
           </a:fontRef>
         </p:style>
         <p:txBody>
-          <a:bodyPr rtlCol="0" anchor="ctr"/>
+          <a:bodyPr tIns="18288" bIns="18288" rtlCol="0" anchor="ctr"/>
           <a:lstStyle/>
           <a:p>
             <a:pPr algn="ctr"/>
-          </a:p>
-        </p:txBody>
-      </p:sp>
-      <p:sp>
-        <p:nvSpPr>
-          <p:cNvPr id="11" name="Rounded Rectangle 10"/>
+            <a:r>
+              <a:rPr sz="1100" b="1">
+                <a:solidFill>
+                  <a:srgbClr val="F4F4F5"/>
+                </a:solidFill>
+                <a:latin typeface="Calibri"/>
+              </a:rPr>
+              <a:t>SECURITY</a:t>
+            </a:r>
+          </a:p>
+        </p:txBody>
+      </p:sp>
+      <p:sp>
+        <p:nvSpPr>
+          <p:cNvPr id="10" name="TextBox 9"/>
+          <p:cNvSpPr txBox="1"/>
+          <p:nvPr/>
+        </p:nvSpPr>
+        <p:spPr>
+          <a:xfrm>
+            <a:off x="1965960" y="3319272"/>
+            <a:ext cx="9144000" cy="365760"/>
+          </a:xfrm>
+          <a:prstGeom prst="rect">
+            <a:avLst/>
+          </a:prstGeom>
+          <a:noFill/>
+        </p:spPr>
+        <p:txBody>
+          <a:bodyPr wrap="square" lIns="0" tIns="0" rIns="0" bIns="0">
+            <a:spAutoFit/>
+          </a:bodyPr>
+          <a:lstStyle/>
+          <a:p>
+            <a:pPr algn="l">
+              <a:spcBef>
+                <a:spcPts val="0"/>
+              </a:spcBef>
+              <a:spcAft>
+                <a:spcPts val="0"/>
+              </a:spcAft>
+            </a:pPr>
+            <a:r>
+              <a:rPr sz="1800" b="1" i="0">
+                <a:solidFill>
+                  <a:srgbClr val="F4F4F5"/>
+                </a:solidFill>
+                <a:latin typeface="Calibri"/>
+              </a:rPr>
+              <a:t>An IDOR caught during audit</a:t>
+            </a:r>
+          </a:p>
+        </p:txBody>
+      </p:sp>
+      <p:sp>
+        <p:nvSpPr>
+          <p:cNvPr id="11" name="TextBox 10"/>
+          <p:cNvSpPr txBox="1"/>
+          <p:nvPr/>
+        </p:nvSpPr>
+        <p:spPr>
+          <a:xfrm>
+            <a:off x="640080" y="3776472"/>
+            <a:ext cx="10515600" cy="777240"/>
+          </a:xfrm>
+          <a:prstGeom prst="rect">
+            <a:avLst/>
+          </a:prstGeom>
+          <a:noFill/>
+        </p:spPr>
+        <p:txBody>
+          <a:bodyPr wrap="square" lIns="0" tIns="0" rIns="0" bIns="0">
+            <a:spAutoFit/>
+          </a:bodyPr>
+          <a:lstStyle/>
+          <a:p>
+            <a:pPr algn="l">
+              <a:spcBef>
+                <a:spcPts val="0"/>
+              </a:spcBef>
+              <a:spcAft>
+                <a:spcPts val="0"/>
+              </a:spcAft>
+            </a:pPr>
+            <a:r>
+              <a:rPr sz="1200" b="0" i="0">
+                <a:solidFill>
+                  <a:srgbClr val="A1A1AA"/>
+                </a:solidFill>
+                <a:latin typeface="Calibri"/>
+              </a:rPr>
+              <a:t>authorId trusted from the body. We removed the field from the validator and read it from req.agent.id. The lesson stuck: every server-side write must answer "who is claiming what" — not just "is the user logged in".</a:t>
+            </a:r>
+          </a:p>
+        </p:txBody>
+      </p:sp>
+      <p:sp>
+        <p:nvSpPr>
+          <p:cNvPr id="12" name="Rounded Rectangle 11"/>
           <p:cNvSpPr/>
           <p:nvPr/>
         </p:nvSpPr>
         <p:spPr>
           <a:xfrm>
-            <a:off x="4572000" y="1737360"/>
-            <a:ext cx="822960" cy="320040"/>
+            <a:off x="457200" y="4718304"/>
+            <a:ext cx="11247120" cy="1417320"/>
           </a:xfrm>
           <a:prstGeom prst="roundRect">
             <a:avLst>
-              <a:gd name="adj" fmla="val 50000"/>
+              <a:gd name="adj" fmla="val 6000"/>
             </a:avLst>
           </a:prstGeom>
           <a:solidFill>
-            <a:srgbClr val="8B5CF6"/>
+            <a:srgbClr val="161922"/>
           </a:solidFill>
-          <a:ln>
-            <a:noFill/>
+          <a:ln w="9525">
+            <a:solidFill>
+              <a:srgbClr val="2A2E3A"/>
+            </a:solidFill>
           </a:ln>
+          <a:effectLst/>
         </p:spPr>
         <p:style>
           <a:lnRef idx="1">
@@ -8829,129 +9618,35 @@
           </a:fontRef>
         </p:style>
         <p:txBody>
-          <a:bodyPr rtlCol="0" anchor="ctr" tIns="18288" bIns="18288"/>
+          <a:bodyPr rtlCol="0" anchor="ctr"/>
           <a:lstStyle/>
           <a:p>
             <a:pPr algn="ctr"/>
-            <a:r>
-              <a:rPr sz="1100" b="1">
-                <a:solidFill>
-                  <a:srgbClr val="F4F4F5"/>
-                </a:solidFill>
-                <a:latin typeface="Calibri"/>
-              </a:rPr>
-              <a:t>#7</a:t>
-            </a:r>
-          </a:p>
-        </p:txBody>
-      </p:sp>
-      <p:sp>
-        <p:nvSpPr>
-          <p:cNvPr id="12" name="TextBox 11"/>
-          <p:cNvSpPr txBox="1"/>
-          <p:nvPr/>
-        </p:nvSpPr>
-        <p:spPr>
-          <a:xfrm>
-            <a:off x="5440679" y="1737360"/>
-            <a:ext cx="2560320" cy="365760"/>
-          </a:xfrm>
-          <a:prstGeom prst="rect">
-            <a:avLst/>
-          </a:prstGeom>
-          <a:noFill/>
-        </p:spPr>
-        <p:txBody>
-          <a:bodyPr wrap="square" lIns="0" rIns="0" tIns="0" bIns="0" anchor="ctr">
-            <a:spAutoFit/>
-          </a:bodyPr>
-          <a:lstStyle/>
-          <a:p>
-            <a:pPr algn="l">
-              <a:spcBef>
-                <a:spcPts val="0"/>
-              </a:spcBef>
-              <a:spcAft>
-                <a:spcPts val="0"/>
-              </a:spcAft>
-            </a:pPr>
-            <a:r>
-              <a:rPr sz="1600" b="1" i="0">
-                <a:solidFill>
-                  <a:srgbClr val="F4F4F5"/>
-                </a:solidFill>
-                <a:latin typeface="Calibri"/>
-              </a:rPr>
-              <a:t>Rate-limit on /login</a:t>
-            </a:r>
-          </a:p>
-        </p:txBody>
-      </p:sp>
-      <p:sp>
-        <p:nvSpPr>
-          <p:cNvPr id="13" name="TextBox 12"/>
-          <p:cNvSpPr txBox="1"/>
-          <p:nvPr/>
-        </p:nvSpPr>
-        <p:spPr>
-          <a:xfrm>
-            <a:off x="4572000" y="2194560"/>
-            <a:ext cx="3383279" cy="640080"/>
-          </a:xfrm>
-          <a:prstGeom prst="rect">
-            <a:avLst/>
-          </a:prstGeom>
-          <a:noFill/>
-        </p:spPr>
-        <p:txBody>
-          <a:bodyPr wrap="square" lIns="0" rIns="0" tIns="0" bIns="0">
-            <a:spAutoFit/>
-          </a:bodyPr>
-          <a:lstStyle/>
-          <a:p>
-            <a:pPr algn="l">
-              <a:spcBef>
-                <a:spcPts val="0"/>
-              </a:spcBef>
-              <a:spcAft>
-                <a:spcPts val="0"/>
-              </a:spcAft>
-            </a:pPr>
-            <a:r>
-              <a:rPr sz="1100" b="0" i="0">
-                <a:solidFill>
-                  <a:srgbClr val="A1A1AA"/>
-                </a:solidFill>
-                <a:latin typeface="Calibri"/>
-              </a:rPr>
-              <a:t>Caps brute-force attempts. After 10 requests in 15 minutes from the same IP, we return HTTP 429.</a:t>
-            </a:r>
-          </a:p>
-        </p:txBody>
-      </p:sp>
-      <p:sp>
-        <p:nvSpPr>
-          <p:cNvPr id="14" name="Rounded Rectangle 13"/>
+            <a:endParaRPr/>
+          </a:p>
+        </p:txBody>
+      </p:sp>
+      <p:sp>
+        <p:nvSpPr>
+          <p:cNvPr id="13" name="Rounded Rectangle 12"/>
           <p:cNvSpPr/>
           <p:nvPr/>
         </p:nvSpPr>
         <p:spPr>
           <a:xfrm>
-            <a:off x="4572000" y="2971800"/>
-            <a:ext cx="3383279" cy="2377440"/>
+            <a:off x="640080" y="4882896"/>
+            <a:ext cx="1188720" cy="365760"/>
           </a:xfrm>
           <a:prstGeom prst="roundRect">
             <a:avLst>
-              <a:gd name="adj" fmla="val 4000"/>
+              <a:gd name="adj" fmla="val 50000"/>
             </a:avLst>
           </a:prstGeom>
           <a:solidFill>
-            <a:srgbClr val="0D0F15"/>
+            <a:srgbClr val="22C55E"/>
           </a:solidFill>
-          <a:ln w="6350">
-            <a:solidFill>
-              <a:srgbClr val="2A2E3A"/>
-            </a:solidFill>
+          <a:ln>
+            <a:noFill/>
           </a:ln>
         </p:spPr>
         <p:style>
@@ -8969,272 +9664,60 @@
           </a:fontRef>
         </p:style>
         <p:txBody>
-          <a:bodyPr rtlCol="0" anchor="ctr" lIns="137160" rIns="137160" tIns="91440" bIns="91440" wrap="square"/>
-          <a:lstStyle/>
-          <a:p>
-            <a:pPr algn="l">
-              <a:spcBef>
-                <a:spcPts val="0"/>
-              </a:spcBef>
-              <a:spcAft>
-                <a:spcPts val="0"/>
-              </a:spcAft>
-            </a:pPr>
-            <a:r>
-              <a:rPr sz="1000">
+          <a:bodyPr tIns="18288" bIns="18288" rtlCol="0" anchor="ctr"/>
+          <a:lstStyle/>
+          <a:p>
+            <a:pPr algn="ctr"/>
+            <a:r>
+              <a:rPr sz="1100" b="1">
                 <a:solidFill>
                   <a:srgbClr val="F4F4F5"/>
                 </a:solidFill>
-                <a:latin typeface="Consolas"/>
-              </a:rPr>
-              <a:t>import rateLimit from</a:t>
-            </a:r>
-          </a:p>
-          <a:p>
-            <a:pPr algn="l">
-              <a:spcBef>
-                <a:spcPts val="0"/>
-              </a:spcBef>
-              <a:spcAft>
-                <a:spcPts val="0"/>
-              </a:spcAft>
-            </a:pPr>
-            <a:r>
-              <a:rPr sz="1000">
+                <a:latin typeface="Calibri"/>
+              </a:rPr>
+              <a:t>STATE</a:t>
+            </a:r>
+          </a:p>
+        </p:txBody>
+      </p:sp>
+      <p:sp>
+        <p:nvSpPr>
+          <p:cNvPr id="14" name="TextBox 13"/>
+          <p:cNvSpPr txBox="1"/>
+          <p:nvPr/>
+        </p:nvSpPr>
+        <p:spPr>
+          <a:xfrm>
+            <a:off x="1965960" y="4901184"/>
+            <a:ext cx="9144000" cy="365760"/>
+          </a:xfrm>
+          <a:prstGeom prst="rect">
+            <a:avLst/>
+          </a:prstGeom>
+          <a:noFill/>
+        </p:spPr>
+        <p:txBody>
+          <a:bodyPr wrap="square" lIns="0" tIns="0" rIns="0" bIns="0">
+            <a:spAutoFit/>
+          </a:bodyPr>
+          <a:lstStyle/>
+          <a:p>
+            <a:pPr algn="l">
+              <a:spcBef>
+                <a:spcPts val="0"/>
+              </a:spcBef>
+              <a:spcAft>
+                <a:spcPts val="0"/>
+              </a:spcAft>
+            </a:pPr>
+            <a:r>
+              <a:rPr sz="1800" b="1" i="0">
                 <a:solidFill>
                   <a:srgbClr val="F4F4F5"/>
                 </a:solidFill>
-                <a:latin typeface="Consolas"/>
-              </a:rPr>
-              <a:t>  "express-rate-limit";</a:t>
-            </a:r>
-          </a:p>
-          <a:p>
-            <a:pPr algn="l">
-              <a:spcBef>
-                <a:spcPts val="0"/>
-              </a:spcBef>
-              <a:spcAft>
-                <a:spcPts val="0"/>
-              </a:spcAft>
-            </a:pPr>
-            <a:r>
-              <a:rPr sz="1000">
-                <a:solidFill>
-                  <a:srgbClr val="F4F4F5"/>
-                </a:solidFill>
-                <a:latin typeface="Consolas"/>
-              </a:rPr>
-              <a:t/>
-            </a:r>
-          </a:p>
-          <a:p>
-            <a:pPr algn="l">
-              <a:spcBef>
-                <a:spcPts val="0"/>
-              </a:spcBef>
-              <a:spcAft>
-                <a:spcPts val="0"/>
-              </a:spcAft>
-            </a:pPr>
-            <a:r>
-              <a:rPr sz="1000">
-                <a:solidFill>
-                  <a:srgbClr val="F4F4F5"/>
-                </a:solidFill>
-                <a:latin typeface="Consolas"/>
-              </a:rPr>
-              <a:t>const loginLimiter = rateLimit({</a:t>
-            </a:r>
-          </a:p>
-          <a:p>
-            <a:pPr algn="l">
-              <a:spcBef>
-                <a:spcPts val="0"/>
-              </a:spcBef>
-              <a:spcAft>
-                <a:spcPts val="0"/>
-              </a:spcAft>
-            </a:pPr>
-            <a:r>
-              <a:rPr sz="1000">
-                <a:solidFill>
-                  <a:srgbClr val="F4F4F5"/>
-                </a:solidFill>
-                <a:latin typeface="Consolas"/>
-              </a:rPr>
-              <a:t>  windowMs: 15 * 60 * 1000,</a:t>
-            </a:r>
-          </a:p>
-          <a:p>
-            <a:pPr algn="l">
-              <a:spcBef>
-                <a:spcPts val="0"/>
-              </a:spcBef>
-              <a:spcAft>
-                <a:spcPts val="0"/>
-              </a:spcAft>
-            </a:pPr>
-            <a:r>
-              <a:rPr sz="1000">
-                <a:solidFill>
-                  <a:srgbClr val="F4F4F5"/>
-                </a:solidFill>
-                <a:latin typeface="Consolas"/>
-              </a:rPr>
-              <a:t>  max: 10,</a:t>
-            </a:r>
-          </a:p>
-          <a:p>
-            <a:pPr algn="l">
-              <a:spcBef>
-                <a:spcPts val="0"/>
-              </a:spcBef>
-              <a:spcAft>
-                <a:spcPts val="0"/>
-              </a:spcAft>
-            </a:pPr>
-            <a:r>
-              <a:rPr sz="1000">
-                <a:solidFill>
-                  <a:srgbClr val="F4F4F5"/>
-                </a:solidFill>
-                <a:latin typeface="Consolas"/>
-              </a:rPr>
-              <a:t>  standardHeaders: true,</a:t>
-            </a:r>
-          </a:p>
-          <a:p>
-            <a:pPr algn="l">
-              <a:spcBef>
-                <a:spcPts val="0"/>
-              </a:spcBef>
-              <a:spcAft>
-                <a:spcPts val="0"/>
-              </a:spcAft>
-            </a:pPr>
-            <a:r>
-              <a:rPr sz="1000">
-                <a:solidFill>
-                  <a:srgbClr val="F4F4F5"/>
-                </a:solidFill>
-                <a:latin typeface="Consolas"/>
-              </a:rPr>
-              <a:t>  legacyHeaders: false,</a:t>
-            </a:r>
-          </a:p>
-          <a:p>
-            <a:pPr algn="l">
-              <a:spcBef>
-                <a:spcPts val="0"/>
-              </a:spcBef>
-              <a:spcAft>
-                <a:spcPts val="0"/>
-              </a:spcAft>
-            </a:pPr>
-            <a:r>
-              <a:rPr sz="1000">
-                <a:solidFill>
-                  <a:srgbClr val="F4F4F5"/>
-                </a:solidFill>
-                <a:latin typeface="Consolas"/>
-              </a:rPr>
-              <a:t>  message: { error:</a:t>
-            </a:r>
-          </a:p>
-          <a:p>
-            <a:pPr algn="l">
-              <a:spcBef>
-                <a:spcPts val="0"/>
-              </a:spcBef>
-              <a:spcAft>
-                <a:spcPts val="0"/>
-              </a:spcAft>
-            </a:pPr>
-            <a:r>
-              <a:rPr sz="1000">
-                <a:solidFill>
-                  <a:srgbClr val="F4F4F5"/>
-                </a:solidFill>
-                <a:latin typeface="Consolas"/>
-              </a:rPr>
-              <a:t>    "Too many login attempts" }</a:t>
-            </a:r>
-          </a:p>
-          <a:p>
-            <a:pPr algn="l">
-              <a:spcBef>
-                <a:spcPts val="0"/>
-              </a:spcBef>
-              <a:spcAft>
-                <a:spcPts val="0"/>
-              </a:spcAft>
-            </a:pPr>
-            <a:r>
-              <a:rPr sz="1000">
-                <a:solidFill>
-                  <a:srgbClr val="F4F4F5"/>
-                </a:solidFill>
-                <a:latin typeface="Consolas"/>
-              </a:rPr>
-              <a:t>});</a:t>
-            </a:r>
-          </a:p>
-          <a:p>
-            <a:pPr algn="l">
-              <a:spcBef>
-                <a:spcPts val="0"/>
-              </a:spcBef>
-              <a:spcAft>
-                <a:spcPts val="0"/>
-              </a:spcAft>
-            </a:pPr>
-            <a:r>
-              <a:rPr sz="1000">
-                <a:solidFill>
-                  <a:srgbClr val="F4F4F5"/>
-                </a:solidFill>
-                <a:latin typeface="Consolas"/>
-              </a:rPr>
-              <a:t/>
-            </a:r>
-          </a:p>
-          <a:p>
-            <a:pPr algn="l">
-              <a:spcBef>
-                <a:spcPts val="0"/>
-              </a:spcBef>
-              <a:spcAft>
-                <a:spcPts val="0"/>
-              </a:spcAft>
-            </a:pPr>
-            <a:r>
-              <a:rPr sz="1000">
-                <a:solidFill>
-                  <a:srgbClr val="F4F4F5"/>
-                </a:solidFill>
-                <a:latin typeface="Consolas"/>
-              </a:rPr>
-              <a:t>router.post("/login",</a:t>
-            </a:r>
-          </a:p>
-          <a:p>
-            <a:pPr algn="l">
-              <a:spcBef>
-                <a:spcPts val="0"/>
-              </a:spcBef>
-              <a:spcAft>
-                <a:spcPts val="0"/>
-              </a:spcAft>
-            </a:pPr>
-            <a:r>
-              <a:rPr sz="1000">
-                <a:solidFill>
-                  <a:srgbClr val="F4F4F5"/>
-                </a:solidFill>
-                <a:latin typeface="Consolas"/>
-              </a:rPr>
-              <a:t>  loginLimiter, ...)</a:t>
+                <a:latin typeface="Calibri"/>
+              </a:rPr>
+              <a:t>Online status not synced</a:t>
             </a:r>
           </a:p>
         </p:txBody>
@@ -9247,8 +9730,8 @@
         </p:nvSpPr>
         <p:spPr>
           <a:xfrm>
-            <a:off x="4572000" y="5486400"/>
-            <a:ext cx="3383279" cy="822960"/>
+            <a:off x="640080" y="5358384"/>
+            <a:ext cx="10515600" cy="777240"/>
           </a:xfrm>
           <a:prstGeom prst="rect">
             <a:avLst/>
@@ -9256,7 +9739,7 @@
           <a:noFill/>
         </p:spPr>
         <p:txBody>
-          <a:bodyPr wrap="square" lIns="0" rIns="0" tIns="0" bIns="0">
+          <a:bodyPr wrap="square" lIns="0" tIns="0" rIns="0" bIns="0">
             <a:spAutoFit/>
           </a:bodyPr>
           <a:lstStyle/>
@@ -9270,13 +9753,13 @@
               </a:spcAft>
             </a:pPr>
             <a:r>
-              <a:rPr sz="1100" b="0" i="1">
-                <a:solidFill>
-                  <a:srgbClr val="F59E0B"/>
-                </a:solidFill>
-                <a:latin typeface="Calibri"/>
-              </a:rPr>
-              <a:t>Front-end maps http_429 → user-friendly toast.</a:t>
+              <a:rPr sz="1200" b="0" i="0">
+                <a:solidFill>
+                  <a:srgbClr val="A1A1AA"/>
+                </a:solidFill>
+                <a:latin typeface="Calibri"/>
+              </a:rPr>
+              <a:t>isOnline never updated → connected user appeared offline. Fixed by /login flipping it to true and adding a /logout endpoint that flips it back. Front-end logout is now async so the back-end ping fires before the token is dropped.</a:t>
             </a:r>
           </a:p>
         </p:txBody>
@@ -9289,8 +9772,8 @@
         </p:nvSpPr>
         <p:spPr>
           <a:xfrm>
-            <a:off x="8321040" y="1554480"/>
-            <a:ext cx="3749039" cy="4937760"/>
+            <a:off x="457200" y="5897880"/>
+            <a:ext cx="11247120" cy="502920"/>
           </a:xfrm>
           <a:prstGeom prst="roundRect">
             <a:avLst>
@@ -9298,11 +9781,11 @@
             </a:avLst>
           </a:prstGeom>
           <a:solidFill>
-            <a:srgbClr val="161922"/>
+            <a:srgbClr val="0D0F15"/>
           </a:solidFill>
-          <a:ln w="9525">
+          <a:ln w="12700">
             <a:solidFill>
-              <a:srgbClr val="2A2E3A"/>
+              <a:srgbClr val="8B5CF6"/>
             </a:solidFill>
           </a:ln>
           <a:effectLst/>
@@ -9326,59 +9809,48 @@
           <a:lstStyle/>
           <a:p>
             <a:pPr algn="ctr"/>
-          </a:p>
-        </p:txBody>
-      </p:sp>
-      <p:sp>
-        <p:nvSpPr>
-          <p:cNvPr id="17" name="Rounded Rectangle 16"/>
-          <p:cNvSpPr/>
+            <a:endParaRPr/>
+          </a:p>
+        </p:txBody>
+      </p:sp>
+      <p:sp>
+        <p:nvSpPr>
+          <p:cNvPr id="17" name="TextBox 16"/>
+          <p:cNvSpPr txBox="1"/>
           <p:nvPr/>
         </p:nvSpPr>
         <p:spPr>
           <a:xfrm>
-            <a:off x="8503919" y="1737360"/>
-            <a:ext cx="822960" cy="320040"/>
-          </a:xfrm>
-          <a:prstGeom prst="roundRect">
-            <a:avLst>
-              <a:gd name="adj" fmla="val 50000"/>
-            </a:avLst>
-          </a:prstGeom>
-          <a:solidFill>
-            <a:srgbClr val="EF4444"/>
-          </a:solidFill>
-          <a:ln>
-            <a:noFill/>
-          </a:ln>
-        </p:spPr>
-        <p:style>
-          <a:lnRef idx="1">
-            <a:schemeClr val="accent1"/>
-          </a:lnRef>
-          <a:fillRef idx="3">
-            <a:schemeClr val="accent1"/>
-          </a:fillRef>
-          <a:effectRef idx="2">
-            <a:schemeClr val="accent1"/>
-          </a:effectRef>
-          <a:fontRef idx="minor">
-            <a:schemeClr val="lt1"/>
-          </a:fontRef>
-        </p:style>
-        <p:txBody>
-          <a:bodyPr rtlCol="0" anchor="ctr" tIns="18288" bIns="18288"/>
-          <a:lstStyle/>
-          <a:p>
-            <a:pPr algn="ctr"/>
-            <a:r>
-              <a:rPr sz="1100" b="1">
+            <a:off x="640080" y="5989320"/>
+            <a:ext cx="10972800" cy="365760"/>
+          </a:xfrm>
+          <a:prstGeom prst="rect">
+            <a:avLst/>
+          </a:prstGeom>
+          <a:noFill/>
+        </p:spPr>
+        <p:txBody>
+          <a:bodyPr wrap="square" lIns="0" tIns="0" rIns="0" bIns="0">
+            <a:spAutoFit/>
+          </a:bodyPr>
+          <a:lstStyle/>
+          <a:p>
+            <a:pPr algn="ctr">
+              <a:spcBef>
+                <a:spcPts val="0"/>
+              </a:spcBef>
+              <a:spcAft>
+                <a:spcPts val="0"/>
+              </a:spcAft>
+            </a:pPr>
+            <a:r>
+              <a:rPr sz="1200" b="0" i="1">
                 <a:solidFill>
                   <a:srgbClr val="F4F4F5"/>
                 </a:solidFill>
                 <a:latin typeface="Calibri"/>
               </a:rPr>
-              <a:t>#10</a:t>
+              <a:t>Next time:  init Git on day 1.  ·  Agree on the data contract before P3.  ·  One integration test per route.</a:t>
             </a:r>
           </a:p>
         </p:txBody>
@@ -9391,8 +9863,8 @@
         </p:nvSpPr>
         <p:spPr>
           <a:xfrm>
-            <a:off x="9372600" y="1737360"/>
-            <a:ext cx="2560320" cy="365760"/>
+            <a:off x="457200" y="6446520"/>
+            <a:ext cx="5486400" cy="274320"/>
           </a:xfrm>
           <a:prstGeom prst="rect">
             <a:avLst/>
@@ -9400,7 +9872,7 @@
           <a:noFill/>
         </p:spPr>
         <p:txBody>
-          <a:bodyPr wrap="square" lIns="0" rIns="0" tIns="0" bIns="0" anchor="ctr">
+          <a:bodyPr wrap="square" lIns="0" tIns="0" rIns="0" bIns="0">
             <a:spAutoFit/>
           </a:bodyPr>
           <a:lstStyle/>
@@ -9414,13 +9886,13 @@
               </a:spcAft>
             </a:pPr>
             <a:r>
-              <a:rPr sz="1600" b="1" i="0">
-                <a:solidFill>
-                  <a:srgbClr val="F4F4F5"/>
-                </a:solidFill>
-                <a:latin typeface="Calibri"/>
-              </a:rPr>
-              <a:t>IDOR fix on intel POST</a:t>
+              <a:rPr sz="1000" b="0" i="0">
+                <a:solidFill>
+                  <a:srgbClr val="71717A"/>
+                </a:solidFill>
+                <a:latin typeface="Calibri"/>
+              </a:rPr>
+              <a:t>MOD8  ·  Milestone 3  ·  The Heist</a:t>
             </a:r>
           </a:p>
         </p:txBody>
@@ -9433,8 +9905,8 @@
         </p:nvSpPr>
         <p:spPr>
           <a:xfrm>
-            <a:off x="8503919" y="2194560"/>
-            <a:ext cx="3383279" cy="640080"/>
+            <a:off x="10972800" y="6446520"/>
+            <a:ext cx="914400" cy="274320"/>
           </a:xfrm>
           <a:prstGeom prst="rect">
             <a:avLst/>
@@ -9442,368 +9914,12 @@
           <a:noFill/>
         </p:spPr>
         <p:txBody>
-          <a:bodyPr wrap="square" lIns="0" rIns="0" tIns="0" bIns="0">
+          <a:bodyPr wrap="square" lIns="0" tIns="0" rIns="0" bIns="0">
             <a:spAutoFit/>
           </a:bodyPr>
           <a:lstStyle/>
           <a:p>
-            <a:pPr algn="l">
-              <a:spcBef>
-                <a:spcPts val="0"/>
-              </a:spcBef>
-              <a:spcAft>
-                <a:spcPts val="0"/>
-              </a:spcAft>
-            </a:pPr>
-            <a:r>
-              <a:rPr sz="1100" b="0" i="0">
-                <a:solidFill>
-                  <a:srgbClr val="A1A1AA"/>
-                </a:solidFill>
-                <a:latin typeface="Calibri"/>
-              </a:rPr>
-              <a:t>First version trusted authorId from the body. Any agent could post intel under another agent's name.</a:t>
-            </a:r>
-          </a:p>
-        </p:txBody>
-      </p:sp>
-      <p:sp>
-        <p:nvSpPr>
-          <p:cNvPr id="20" name="Rounded Rectangle 19"/>
-          <p:cNvSpPr/>
-          <p:nvPr/>
-        </p:nvSpPr>
-        <p:spPr>
-          <a:xfrm>
-            <a:off x="8503919" y="2971800"/>
-            <a:ext cx="3383279" cy="2377440"/>
-          </a:xfrm>
-          <a:prstGeom prst="roundRect">
-            <a:avLst>
-              <a:gd name="adj" fmla="val 4000"/>
-            </a:avLst>
-          </a:prstGeom>
-          <a:solidFill>
-            <a:srgbClr val="0D0F15"/>
-          </a:solidFill>
-          <a:ln w="6350">
-            <a:solidFill>
-              <a:srgbClr val="2A2E3A"/>
-            </a:solidFill>
-          </a:ln>
-        </p:spPr>
-        <p:style>
-          <a:lnRef idx="1">
-            <a:schemeClr val="accent1"/>
-          </a:lnRef>
-          <a:fillRef idx="3">
-            <a:schemeClr val="accent1"/>
-          </a:fillRef>
-          <a:effectRef idx="2">
-            <a:schemeClr val="accent1"/>
-          </a:effectRef>
-          <a:fontRef idx="minor">
-            <a:schemeClr val="lt1"/>
-          </a:fontRef>
-        </p:style>
-        <p:txBody>
-          <a:bodyPr rtlCol="0" anchor="ctr" lIns="137160" rIns="137160" tIns="91440" bIns="91440" wrap="square"/>
-          <a:lstStyle/>
-          <a:p>
-            <a:pPr algn="l">
-              <a:spcBef>
-                <a:spcPts val="0"/>
-              </a:spcBef>
-              <a:spcAft>
-                <a:spcPts val="0"/>
-              </a:spcAft>
-            </a:pPr>
-            <a:r>
-              <a:rPr sz="1000">
-                <a:solidFill>
-                  <a:srgbClr val="F4F4F5"/>
-                </a:solidFill>
-                <a:latin typeface="Consolas"/>
-              </a:rPr>
-              <a:t>// BEFORE  (vulnerable)</a:t>
-            </a:r>
-          </a:p>
-          <a:p>
-            <a:pPr algn="l">
-              <a:spcBef>
-                <a:spcPts val="0"/>
-              </a:spcBef>
-              <a:spcAft>
-                <a:spcPts val="0"/>
-              </a:spcAft>
-            </a:pPr>
-            <a:r>
-              <a:rPr sz="1000">
-                <a:solidFill>
-                  <a:srgbClr val="F4F4F5"/>
-                </a:solidFill>
-                <a:latin typeface="Consolas"/>
-              </a:rPr>
-              <a:t>data: {</a:t>
-            </a:r>
-          </a:p>
-          <a:p>
-            <a:pPr algn="l">
-              <a:spcBef>
-                <a:spcPts val="0"/>
-              </a:spcBef>
-              <a:spcAft>
-                <a:spcPts val="0"/>
-              </a:spcAft>
-            </a:pPr>
-            <a:r>
-              <a:rPr sz="1000">
-                <a:solidFill>
-                  <a:srgbClr val="F4F4F5"/>
-                </a:solidFill>
-                <a:latin typeface="Consolas"/>
-              </a:rPr>
-              <a:t>  ...,</a:t>
-            </a:r>
-          </a:p>
-          <a:p>
-            <a:pPr algn="l">
-              <a:spcBef>
-                <a:spcPts val="0"/>
-              </a:spcBef>
-              <a:spcAft>
-                <a:spcPts val="0"/>
-              </a:spcAft>
-            </a:pPr>
-            <a:r>
-              <a:rPr sz="1000">
-                <a:solidFill>
-                  <a:srgbClr val="F4F4F5"/>
-                </a:solidFill>
-                <a:latin typeface="Consolas"/>
-              </a:rPr>
-              <a:t>  authorId: req.body.authorId</a:t>
-            </a:r>
-          </a:p>
-          <a:p>
-            <a:pPr algn="l">
-              <a:spcBef>
-                <a:spcPts val="0"/>
-              </a:spcBef>
-              <a:spcAft>
-                <a:spcPts val="0"/>
-              </a:spcAft>
-            </a:pPr>
-            <a:r>
-              <a:rPr sz="1000">
-                <a:solidFill>
-                  <a:srgbClr val="F4F4F5"/>
-                </a:solidFill>
-                <a:latin typeface="Consolas"/>
-              </a:rPr>
-              <a:t>}</a:t>
-            </a:r>
-          </a:p>
-          <a:p>
-            <a:pPr algn="l">
-              <a:spcBef>
-                <a:spcPts val="0"/>
-              </a:spcBef>
-              <a:spcAft>
-                <a:spcPts val="0"/>
-              </a:spcAft>
-            </a:pPr>
-            <a:r>
-              <a:rPr sz="1000">
-                <a:solidFill>
-                  <a:srgbClr val="F4F4F5"/>
-                </a:solidFill>
-                <a:latin typeface="Consolas"/>
-              </a:rPr>
-              <a:t/>
-            </a:r>
-          </a:p>
-          <a:p>
-            <a:pPr algn="l">
-              <a:spcBef>
-                <a:spcPts val="0"/>
-              </a:spcBef>
-              <a:spcAft>
-                <a:spcPts val="0"/>
-              </a:spcAft>
-            </a:pPr>
-            <a:r>
-              <a:rPr sz="1000">
-                <a:solidFill>
-                  <a:srgbClr val="F4F4F5"/>
-                </a:solidFill>
-                <a:latin typeface="Consolas"/>
-              </a:rPr>
-              <a:t>// AFTER  (server-authoritative)</a:t>
-            </a:r>
-          </a:p>
-          <a:p>
-            <a:pPr algn="l">
-              <a:spcBef>
-                <a:spcPts val="0"/>
-              </a:spcBef>
-              <a:spcAft>
-                <a:spcPts val="0"/>
-              </a:spcAft>
-            </a:pPr>
-            <a:r>
-              <a:rPr sz="1000">
-                <a:solidFill>
-                  <a:srgbClr val="F4F4F5"/>
-                </a:solidFill>
-                <a:latin typeface="Consolas"/>
-              </a:rPr>
-              <a:t>data: {</a:t>
-            </a:r>
-          </a:p>
-          <a:p>
-            <a:pPr algn="l">
-              <a:spcBef>
-                <a:spcPts val="0"/>
-              </a:spcBef>
-              <a:spcAft>
-                <a:spcPts val="0"/>
-              </a:spcAft>
-            </a:pPr>
-            <a:r>
-              <a:rPr sz="1000">
-                <a:solidFill>
-                  <a:srgbClr val="F4F4F5"/>
-                </a:solidFill>
-                <a:latin typeface="Consolas"/>
-              </a:rPr>
-              <a:t>  ...,</a:t>
-            </a:r>
-          </a:p>
-          <a:p>
-            <a:pPr algn="l">
-              <a:spcBef>
-                <a:spcPts val="0"/>
-              </a:spcBef>
-              <a:spcAft>
-                <a:spcPts val="0"/>
-              </a:spcAft>
-            </a:pPr>
-            <a:r>
-              <a:rPr sz="1000">
-                <a:solidFill>
-                  <a:srgbClr val="F4F4F5"/>
-                </a:solidFill>
-                <a:latin typeface="Consolas"/>
-              </a:rPr>
-              <a:t>  authorId: req.agent.id</a:t>
-            </a:r>
-          </a:p>
-          <a:p>
-            <a:pPr algn="l">
-              <a:spcBef>
-                <a:spcPts val="0"/>
-              </a:spcBef>
-              <a:spcAft>
-                <a:spcPts val="0"/>
-              </a:spcAft>
-            </a:pPr>
-            <a:r>
-              <a:rPr sz="1000">
-                <a:solidFill>
-                  <a:srgbClr val="F4F4F5"/>
-                </a:solidFill>
-                <a:latin typeface="Consolas"/>
-              </a:rPr>
-              <a:t>  //  ^^^ from the JWT</a:t>
-            </a:r>
-          </a:p>
-          <a:p>
-            <a:pPr algn="l">
-              <a:spcBef>
-                <a:spcPts val="0"/>
-              </a:spcBef>
-              <a:spcAft>
-                <a:spcPts val="0"/>
-              </a:spcAft>
-            </a:pPr>
-            <a:r>
-              <a:rPr sz="1000">
-                <a:solidFill>
-                  <a:srgbClr val="F4F4F5"/>
-                </a:solidFill>
-                <a:latin typeface="Consolas"/>
-              </a:rPr>
-              <a:t>}</a:t>
-            </a:r>
-          </a:p>
-        </p:txBody>
-      </p:sp>
-      <p:sp>
-        <p:nvSpPr>
-          <p:cNvPr id="21" name="TextBox 20"/>
-          <p:cNvSpPr txBox="1"/>
-          <p:nvPr/>
-        </p:nvSpPr>
-        <p:spPr>
-          <a:xfrm>
-            <a:off x="8503919" y="5486400"/>
-            <a:ext cx="3383279" cy="822960"/>
-          </a:xfrm>
-          <a:prstGeom prst="rect">
-            <a:avLst/>
-          </a:prstGeom>
-          <a:noFill/>
-        </p:spPr>
-        <p:txBody>
-          <a:bodyPr wrap="square" lIns="0" rIns="0" tIns="0" bIns="0">
-            <a:spAutoFit/>
-          </a:bodyPr>
-          <a:lstStyle/>
-          <a:p>
-            <a:pPr algn="l">
-              <a:spcBef>
-                <a:spcPts val="0"/>
-              </a:spcBef>
-              <a:spcAft>
-                <a:spcPts val="0"/>
-              </a:spcAft>
-            </a:pPr>
-            <a:r>
-              <a:rPr sz="1100" b="0" i="1">
-                <a:solidFill>
-                  <a:srgbClr val="22C55E"/>
-                </a:solidFill>
-                <a:latin typeface="Calibri"/>
-              </a:rPr>
-              <a:t>Authenticated  ≠  authorized.  The server decides the author.</a:t>
-            </a:r>
-          </a:p>
-        </p:txBody>
-      </p:sp>
-      <p:sp>
-        <p:nvSpPr>
-          <p:cNvPr id="22" name="TextBox 21"/>
-          <p:cNvSpPr txBox="1"/>
-          <p:nvPr/>
-        </p:nvSpPr>
-        <p:spPr>
-          <a:xfrm>
-            <a:off x="457200" y="6446520"/>
-            <a:ext cx="5486400" cy="274320"/>
-          </a:xfrm>
-          <a:prstGeom prst="rect">
-            <a:avLst/>
-          </a:prstGeom>
-          <a:noFill/>
-        </p:spPr>
-        <p:txBody>
-          <a:bodyPr wrap="square" lIns="0" rIns="0" tIns="0" bIns="0">
-            <a:spAutoFit/>
-          </a:bodyPr>
-          <a:lstStyle/>
-          <a:p>
-            <a:pPr algn="l">
+            <a:pPr algn="r">
               <a:spcBef>
                 <a:spcPts val="0"/>
               </a:spcBef>
@@ -9818,49 +9934,7 @@
                 </a:solidFill>
                 <a:latin typeface="Calibri"/>
               </a:rPr>
-              <a:t>MOD8  ·  Milestone 3  ·  The Heist</a:t>
-            </a:r>
-          </a:p>
-        </p:txBody>
-      </p:sp>
-      <p:sp>
-        <p:nvSpPr>
-          <p:cNvPr id="23" name="TextBox 22"/>
-          <p:cNvSpPr txBox="1"/>
-          <p:nvPr/>
-        </p:nvSpPr>
-        <p:spPr>
-          <a:xfrm>
-            <a:off x="10972800" y="6446520"/>
-            <a:ext cx="914400" cy="274320"/>
-          </a:xfrm>
-          <a:prstGeom prst="rect">
-            <a:avLst/>
-          </a:prstGeom>
-          <a:noFill/>
-        </p:spPr>
-        <p:txBody>
-          <a:bodyPr wrap="square" lIns="0" rIns="0" tIns="0" bIns="0">
-            <a:spAutoFit/>
-          </a:bodyPr>
-          <a:lstStyle/>
-          <a:p>
-            <a:pPr algn="r">
-              <a:spcBef>
-                <a:spcPts val="0"/>
-              </a:spcBef>
-              <a:spcAft>
-                <a:spcPts val="0"/>
-              </a:spcAft>
-            </a:pPr>
-            <a:r>
-              <a:rPr sz="1000" b="0" i="0">
-                <a:solidFill>
-                  <a:srgbClr val="71717A"/>
-                </a:solidFill>
-                <a:latin typeface="Calibri"/>
-              </a:rPr>
-              <a:t>5 / 7</a:t>
+              <a:t>6 / 7</a:t>
             </a:r>
           </a:p>
         </p:txBody>
@@ -9874,7 +9948,7 @@
 </file>
 
 <file path=ppt/slides/slide6.xml><?xml version="1.0" encoding="utf-8"?>
-<p:sld xmlns:a="http://schemas.openxmlformats.org/drawingml/2006/main" xmlns:p="http://schemas.openxmlformats.org/presentationml/2006/main" xmlns:r="http://schemas.openxmlformats.org/officeDocument/2006/relationships">
+<p:sld xmlns:a="http://schemas.openxmlformats.org/drawingml/2006/main" xmlns:r="http://schemas.openxmlformats.org/officeDocument/2006/relationships" xmlns:p="http://schemas.openxmlformats.org/presentationml/2006/main">
   <p:cSld>
     <p:bg>
       <p:bgPr>
@@ -9890,7 +9964,14 @@
         <p:cNvGrpSpPr/>
         <p:nvPr/>
       </p:nvGrpSpPr>
-      <p:grpSpPr/>
+      <p:grpSpPr>
+        <a:xfrm>
+          <a:off x="0" y="0"/>
+          <a:ext cx="0" cy="0"/>
+          <a:chOff x="0" y="0"/>
+          <a:chExt cx="0" cy="0"/>
+        </a:xfrm>
+      </p:grpSpPr>
       <p:sp>
         <p:nvSpPr>
           <p:cNvPr id="2" name="TextBox 1"/>
@@ -9908,7 +9989,7 @@
           <a:noFill/>
         </p:spPr>
         <p:txBody>
-          <a:bodyPr wrap="square" lIns="0" rIns="0" tIns="0" bIns="0">
+          <a:bodyPr wrap="square" lIns="0" tIns="0" rIns="0" bIns="0">
             <a:spAutoFit/>
           </a:bodyPr>
           <a:lstStyle/>
@@ -9928,7 +10009,7 @@
                 </a:solidFill>
                 <a:latin typeface="Calibri"/>
               </a:rPr>
-              <a:t>What surprised us  ·  what we'd redo</a:t>
+              <a:t>Live demo  ·  what we'll show now</a:t>
             </a:r>
           </a:p>
         </p:txBody>
@@ -9950,7 +10031,7 @@
           <a:noFill/>
         </p:spPr>
         <p:txBody>
-          <a:bodyPr wrap="square" lIns="0" rIns="0" tIns="0" bIns="0">
+          <a:bodyPr wrap="square" lIns="0" tIns="0" rIns="0" bIns="0">
             <a:spAutoFit/>
           </a:bodyPr>
           <a:lstStyle/>
@@ -9964,27 +10045,51 @@
               </a:spcAft>
             </a:pPr>
             <a:r>
-              <a:rPr sz="1400" b="0" i="1">
+              <a:rPr sz="1400" b="0" i="1" dirty="0">
                 <a:solidFill>
                   <a:srgbClr val="A1A1AA"/>
                 </a:solidFill>
                 <a:latin typeface="Calibri"/>
               </a:rPr>
-              <a:t>Three real moments that shaped the codebase.</a:t>
-            </a:r>
-          </a:p>
-        </p:txBody>
-      </p:sp>
-      <p:sp>
-        <p:nvSpPr>
-          <p:cNvPr id="4" name="Rounded Rectangle 3"/>
+              <a:t>Two minutes. Watch the toasts and the green dot on the connected agent.</a:t>
+            </a:r>
+          </a:p>
+        </p:txBody>
+      </p:sp>
+      <p:pic>
+        <p:nvPicPr>
+          <p:cNvPr id="4" name="Picture 3" descr="Board.png"/>
+          <p:cNvPicPr>
+            <a:picLocks noChangeAspect="1"/>
+          </p:cNvPicPr>
+          <p:nvPr/>
+        </p:nvPicPr>
+        <p:blipFill>
+          <a:blip r:embed="rId3"/>
+          <a:stretch>
+            <a:fillRect/>
+          </a:stretch>
+        </p:blipFill>
+        <p:spPr>
+          <a:xfrm>
+            <a:off x="457200" y="1554480"/>
+            <a:ext cx="7772400" cy="4401137"/>
+          </a:xfrm>
+          <a:prstGeom prst="rect">
+            <a:avLst/>
+          </a:prstGeom>
+        </p:spPr>
+      </p:pic>
+      <p:sp>
+        <p:nvSpPr>
+          <p:cNvPr id="5" name="Rounded Rectangle 4"/>
           <p:cNvSpPr/>
           <p:nvPr/>
         </p:nvSpPr>
         <p:spPr>
           <a:xfrm>
-            <a:off x="457200" y="1554480"/>
-            <a:ext cx="11247120" cy="1417320"/>
+            <a:off x="8595360" y="1554480"/>
+            <a:ext cx="3108960" cy="4572000"/>
           </a:xfrm>
           <a:prstGeom prst="roundRect">
             <a:avLst>
@@ -10020,60 +10125,7 @@
           <a:lstStyle/>
           <a:p>
             <a:pPr algn="ctr"/>
-          </a:p>
-        </p:txBody>
-      </p:sp>
-      <p:sp>
-        <p:nvSpPr>
-          <p:cNvPr id="5" name="Rounded Rectangle 4"/>
-          <p:cNvSpPr/>
-          <p:nvPr/>
-        </p:nvSpPr>
-        <p:spPr>
-          <a:xfrm>
-            <a:off x="640080" y="1719072"/>
-            <a:ext cx="1188720" cy="365760"/>
-          </a:xfrm>
-          <a:prstGeom prst="roundRect">
-            <a:avLst>
-              <a:gd name="adj" fmla="val 50000"/>
-            </a:avLst>
-          </a:prstGeom>
-          <a:solidFill>
-            <a:srgbClr val="38BDF8"/>
-          </a:solidFill>
-          <a:ln>
-            <a:noFill/>
-          </a:ln>
-        </p:spPr>
-        <p:style>
-          <a:lnRef idx="1">
-            <a:schemeClr val="accent1"/>
-          </a:lnRef>
-          <a:fillRef idx="3">
-            <a:schemeClr val="accent1"/>
-          </a:fillRef>
-          <a:effectRef idx="2">
-            <a:schemeClr val="accent1"/>
-          </a:effectRef>
-          <a:fontRef idx="minor">
-            <a:schemeClr val="lt1"/>
-          </a:fontRef>
-        </p:style>
-        <p:txBody>
-          <a:bodyPr rtlCol="0" anchor="ctr" tIns="18288" bIns="18288"/>
-          <a:lstStyle/>
-          <a:p>
-            <a:pPr algn="ctr"/>
-            <a:r>
-              <a:rPr sz="1100" b="1">
-                <a:solidFill>
-                  <a:srgbClr val="F4F4F5"/>
-                </a:solidFill>
-                <a:latin typeface="Calibri"/>
-              </a:rPr>
-              <a:t>MAPPING</a:t>
-            </a:r>
+            <a:endParaRPr/>
           </a:p>
         </p:txBody>
       </p:sp>
@@ -10085,8 +10137,8 @@
         </p:nvSpPr>
         <p:spPr>
           <a:xfrm>
-            <a:off x="1965960" y="1737360"/>
-            <a:ext cx="9144000" cy="365760"/>
+            <a:off x="8778240" y="1691640"/>
+            <a:ext cx="2743200" cy="365760"/>
           </a:xfrm>
           <a:prstGeom prst="rect">
             <a:avLst/>
@@ -10094,7 +10146,7 @@
           <a:noFill/>
         </p:spPr>
         <p:txBody>
-          <a:bodyPr wrap="square" lIns="0" rIns="0" tIns="0" bIns="0">
+          <a:bodyPr wrap="square" lIns="0" tIns="0" rIns="0" bIns="0">
             <a:spAutoFit/>
           </a:bodyPr>
           <a:lstStyle/>
@@ -10108,13 +10160,13 @@
               </a:spcAft>
             </a:pPr>
             <a:r>
-              <a:rPr sz="1800" b="1" i="0">
-                <a:solidFill>
-                  <a:srgbClr val="F4F4F5"/>
-                </a:solidFill>
-                <a:latin typeface="Calibri"/>
-              </a:rPr>
-              <a:t>Front-end labels  ≠  Prisma enums</a:t>
+              <a:rPr sz="1100" b="1" i="0">
+                <a:solidFill>
+                  <a:srgbClr val="71717A"/>
+                </a:solidFill>
+                <a:latin typeface="Calibri"/>
+              </a:rPr>
+              <a:t>DEMO SCRIPT</a:t>
             </a:r>
           </a:p>
         </p:txBody>
@@ -10127,8 +10179,8 @@
         </p:nvSpPr>
         <p:spPr>
           <a:xfrm>
-            <a:off x="640080" y="2194560"/>
-            <a:ext cx="10515600" cy="777240"/>
+            <a:off x="8778240" y="2148840"/>
+            <a:ext cx="274320" cy="274320"/>
           </a:xfrm>
           <a:prstGeom prst="rect">
             <a:avLst/>
@@ -10136,7 +10188,7 @@
           <a:noFill/>
         </p:spPr>
         <p:txBody>
-          <a:bodyPr wrap="square" lIns="0" rIns="0" tIns="0" bIns="0">
+          <a:bodyPr wrap="square" lIns="0" tIns="0" rIns="0" bIns="0">
             <a:spAutoFit/>
           </a:bodyPr>
           <a:lstStyle/>
@@ -10150,115 +10202,97 @@
               </a:spcAft>
             </a:pPr>
             <a:r>
-              <a:rPr sz="1200" b="0" i="0">
+              <a:rPr sz="1400" b="1" i="0">
+                <a:solidFill>
+                  <a:srgbClr val="8B5CF6"/>
+                </a:solidFill>
+                <a:latin typeface="Calibri"/>
+              </a:rPr>
+              <a:t>1</a:t>
+            </a:r>
+          </a:p>
+        </p:txBody>
+      </p:sp>
+      <p:sp>
+        <p:nvSpPr>
+          <p:cNvPr id="8" name="TextBox 7"/>
+          <p:cNvSpPr txBox="1"/>
+          <p:nvPr/>
+        </p:nvSpPr>
+        <p:spPr>
+          <a:xfrm>
+            <a:off x="9098280" y="2148840"/>
+            <a:ext cx="2468880" cy="274320"/>
+          </a:xfrm>
+          <a:prstGeom prst="rect">
+            <a:avLst/>
+          </a:prstGeom>
+          <a:noFill/>
+        </p:spPr>
+        <p:txBody>
+          <a:bodyPr wrap="square" lIns="0" tIns="0" rIns="0" bIns="0">
+            <a:spAutoFit/>
+          </a:bodyPr>
+          <a:lstStyle/>
+          <a:p>
+            <a:pPr algn="l">
+              <a:spcBef>
+                <a:spcPts val="0"/>
+              </a:spcBef>
+              <a:spcAft>
+                <a:spcPts val="0"/>
+              </a:spcAft>
+            </a:pPr>
+            <a:r>
+              <a:rPr sz="1400" b="1" i="0">
+                <a:solidFill>
+                  <a:srgbClr val="F4F4F5"/>
+                </a:solidFill>
+                <a:latin typeface="Calibri"/>
+              </a:rPr>
+              <a:t>Login</a:t>
+            </a:r>
+          </a:p>
+        </p:txBody>
+      </p:sp>
+      <p:sp>
+        <p:nvSpPr>
+          <p:cNvPr id="9" name="TextBox 8"/>
+          <p:cNvSpPr txBox="1"/>
+          <p:nvPr/>
+        </p:nvSpPr>
+        <p:spPr>
+          <a:xfrm>
+            <a:off x="9098280" y="2395728"/>
+            <a:ext cx="2468880" cy="274320"/>
+          </a:xfrm>
+          <a:prstGeom prst="rect">
+            <a:avLst/>
+          </a:prstGeom>
+          <a:noFill/>
+        </p:spPr>
+        <p:txBody>
+          <a:bodyPr wrap="square" lIns="0" tIns="0" rIns="0" bIns="0">
+            <a:spAutoFit/>
+          </a:bodyPr>
+          <a:lstStyle/>
+          <a:p>
+            <a:pPr algn="l">
+              <a:spcBef>
+                <a:spcPts val="0"/>
+              </a:spcBef>
+              <a:spcAft>
+                <a:spcPts val="0"/>
+              </a:spcAft>
+            </a:pPr>
+            <a:r>
+              <a:rPr sz="1000" b="0" i="0">
                 <a:solidFill>
                   <a:srgbClr val="A1A1AA"/>
                 </a:solidFill>
                 <a:latin typeface="Calibri"/>
               </a:rPr>
-              <a:t>Milestone 2 hardcoded "The Plan", "Godfather" in 30+ components. The API uses SCREAMING_SNAKE. We added one mappers.js file — components stay untouched, the boundary is the only thing that knows about both.</a:t>
-            </a:r>
-          </a:p>
-        </p:txBody>
-      </p:sp>
-      <p:sp>
-        <p:nvSpPr>
-          <p:cNvPr id="8" name="Rounded Rectangle 7"/>
-          <p:cNvSpPr/>
-          <p:nvPr/>
-        </p:nvSpPr>
-        <p:spPr>
-          <a:xfrm>
-            <a:off x="457200" y="3136391"/>
-            <a:ext cx="11247120" cy="1417320"/>
-          </a:xfrm>
-          <a:prstGeom prst="roundRect">
-            <a:avLst>
-              <a:gd name="adj" fmla="val 6000"/>
-            </a:avLst>
-          </a:prstGeom>
-          <a:solidFill>
-            <a:srgbClr val="161922"/>
-          </a:solidFill>
-          <a:ln w="9525">
-            <a:solidFill>
-              <a:srgbClr val="2A2E3A"/>
-            </a:solidFill>
-          </a:ln>
-          <a:effectLst/>
-        </p:spPr>
-        <p:style>
-          <a:lnRef idx="1">
-            <a:schemeClr val="accent1"/>
-          </a:lnRef>
-          <a:fillRef idx="3">
-            <a:schemeClr val="accent1"/>
-          </a:fillRef>
-          <a:effectRef idx="2">
-            <a:schemeClr val="accent1"/>
-          </a:effectRef>
-          <a:fontRef idx="minor">
-            <a:schemeClr val="lt1"/>
-          </a:fontRef>
-        </p:style>
-        <p:txBody>
-          <a:bodyPr rtlCol="0" anchor="ctr"/>
-          <a:lstStyle/>
-          <a:p>
-            <a:pPr algn="ctr"/>
-          </a:p>
-        </p:txBody>
-      </p:sp>
-      <p:sp>
-        <p:nvSpPr>
-          <p:cNvPr id="9" name="Rounded Rectangle 8"/>
-          <p:cNvSpPr/>
-          <p:nvPr/>
-        </p:nvSpPr>
-        <p:spPr>
-          <a:xfrm>
-            <a:off x="640080" y="3300984"/>
-            <a:ext cx="1188720" cy="365760"/>
-          </a:xfrm>
-          <a:prstGeom prst="roundRect">
-            <a:avLst>
-              <a:gd name="adj" fmla="val 50000"/>
-            </a:avLst>
-          </a:prstGeom>
-          <a:solidFill>
-            <a:srgbClr val="EF4444"/>
-          </a:solidFill>
-          <a:ln>
-            <a:noFill/>
-          </a:ln>
-        </p:spPr>
-        <p:style>
-          <a:lnRef idx="1">
-            <a:schemeClr val="accent1"/>
-          </a:lnRef>
-          <a:fillRef idx="3">
-            <a:schemeClr val="accent1"/>
-          </a:fillRef>
-          <a:effectRef idx="2">
-            <a:schemeClr val="accent1"/>
-          </a:effectRef>
-          <a:fontRef idx="minor">
-            <a:schemeClr val="lt1"/>
-          </a:fontRef>
-        </p:style>
-        <p:txBody>
-          <a:bodyPr rtlCol="0" anchor="ctr" tIns="18288" bIns="18288"/>
-          <a:lstStyle/>
-          <a:p>
-            <a:pPr algn="ctr"/>
-            <a:r>
-              <a:rPr sz="1100" b="1">
-                <a:solidFill>
-                  <a:srgbClr val="F4F4F5"/>
-                </a:solidFill>
-                <a:latin typeface="Calibri"/>
-              </a:rPr>
-              <a:t>SECURITY</a:t>
+              <a:t>the_godfather / heist2026</a:t>
             </a:r>
           </a:p>
         </p:txBody>
@@ -10271,8 +10305,8 @@
         </p:nvSpPr>
         <p:spPr>
           <a:xfrm>
-            <a:off x="1965960" y="3319272"/>
-            <a:ext cx="9144000" cy="365760"/>
+            <a:off x="8778240" y="2697480"/>
+            <a:ext cx="274320" cy="274320"/>
           </a:xfrm>
           <a:prstGeom prst="rect">
             <a:avLst/>
@@ -10280,7 +10314,7 @@
           <a:noFill/>
         </p:spPr>
         <p:txBody>
-          <a:bodyPr wrap="square" lIns="0" rIns="0" tIns="0" bIns="0">
+          <a:bodyPr wrap="square" lIns="0" tIns="0" rIns="0" bIns="0">
             <a:spAutoFit/>
           </a:bodyPr>
           <a:lstStyle/>
@@ -10294,13 +10328,13 @@
               </a:spcAft>
             </a:pPr>
             <a:r>
-              <a:rPr sz="1800" b="1" i="0">
-                <a:solidFill>
-                  <a:srgbClr val="F4F4F5"/>
-                </a:solidFill>
-                <a:latin typeface="Calibri"/>
-              </a:rPr>
-              <a:t>An IDOR caught during audit</a:t>
+              <a:rPr sz="1400" b="1" i="0">
+                <a:solidFill>
+                  <a:srgbClr val="8B5CF6"/>
+                </a:solidFill>
+                <a:latin typeface="Calibri"/>
+              </a:rPr>
+              <a:t>2</a:t>
             </a:r>
           </a:p>
         </p:txBody>
@@ -10313,8 +10347,8 @@
         </p:nvSpPr>
         <p:spPr>
           <a:xfrm>
-            <a:off x="640080" y="3776472"/>
-            <a:ext cx="10515600" cy="777240"/>
+            <a:off x="9098280" y="2697480"/>
+            <a:ext cx="2468880" cy="274320"/>
           </a:xfrm>
           <a:prstGeom prst="rect">
             <a:avLst/>
@@ -10322,7 +10356,7 @@
           <a:noFill/>
         </p:spPr>
         <p:txBody>
-          <a:bodyPr wrap="square" lIns="0" rIns="0" tIns="0" bIns="0">
+          <a:bodyPr wrap="square" lIns="0" tIns="0" rIns="0" bIns="0">
             <a:spAutoFit/>
           </a:bodyPr>
           <a:lstStyle/>
@@ -10336,115 +10370,97 @@
               </a:spcAft>
             </a:pPr>
             <a:r>
-              <a:rPr sz="1200" b="0" i="0">
+              <a:rPr sz="1400" b="1" i="0">
+                <a:solidFill>
+                  <a:srgbClr val="F4F4F5"/>
+                </a:solidFill>
+                <a:latin typeface="Calibri"/>
+              </a:rPr>
+              <a:t>Board</a:t>
+            </a:r>
+          </a:p>
+        </p:txBody>
+      </p:sp>
+      <p:sp>
+        <p:nvSpPr>
+          <p:cNvPr id="12" name="TextBox 11"/>
+          <p:cNvSpPr txBox="1"/>
+          <p:nvPr/>
+        </p:nvSpPr>
+        <p:spPr>
+          <a:xfrm>
+            <a:off x="9098280" y="2944368"/>
+            <a:ext cx="2468880" cy="274320"/>
+          </a:xfrm>
+          <a:prstGeom prst="rect">
+            <a:avLst/>
+          </a:prstGeom>
+          <a:noFill/>
+        </p:spPr>
+        <p:txBody>
+          <a:bodyPr wrap="square" lIns="0" tIns="0" rIns="0" bIns="0">
+            <a:spAutoFit/>
+          </a:bodyPr>
+          <a:lstStyle/>
+          <a:p>
+            <a:pPr algn="l">
+              <a:spcBef>
+                <a:spcPts val="0"/>
+              </a:spcBef>
+              <a:spcAft>
+                <a:spcPts val="0"/>
+              </a:spcAft>
+            </a:pPr>
+            <a:r>
+              <a:rPr sz="1000" b="0" i="0">
                 <a:solidFill>
                   <a:srgbClr val="A1A1AA"/>
                 </a:solidFill>
                 <a:latin typeface="Calibri"/>
               </a:rPr>
-              <a:t>authorId trusted from the body. We removed the field from the validator and read it from req.agent.id. The lesson stuck: every server-side write must answer "who is claiming what" — not just "is the user logged in".</a:t>
-            </a:r>
-          </a:p>
-        </p:txBody>
-      </p:sp>
-      <p:sp>
-        <p:nvSpPr>
-          <p:cNvPr id="12" name="Rounded Rectangle 11"/>
-          <p:cNvSpPr/>
+              <a:t>create + edit a mission</a:t>
+            </a:r>
+          </a:p>
+        </p:txBody>
+      </p:sp>
+      <p:sp>
+        <p:nvSpPr>
+          <p:cNvPr id="13" name="TextBox 12"/>
+          <p:cNvSpPr txBox="1"/>
           <p:nvPr/>
         </p:nvSpPr>
         <p:spPr>
           <a:xfrm>
-            <a:off x="457200" y="4718304"/>
-            <a:ext cx="11247120" cy="1417320"/>
-          </a:xfrm>
-          <a:prstGeom prst="roundRect">
-            <a:avLst>
-              <a:gd name="adj" fmla="val 6000"/>
-            </a:avLst>
-          </a:prstGeom>
-          <a:solidFill>
-            <a:srgbClr val="161922"/>
-          </a:solidFill>
-          <a:ln w="9525">
-            <a:solidFill>
-              <a:srgbClr val="2A2E3A"/>
-            </a:solidFill>
-          </a:ln>
-          <a:effectLst/>
-        </p:spPr>
-        <p:style>
-          <a:lnRef idx="1">
-            <a:schemeClr val="accent1"/>
-          </a:lnRef>
-          <a:fillRef idx="3">
-            <a:schemeClr val="accent1"/>
-          </a:fillRef>
-          <a:effectRef idx="2">
-            <a:schemeClr val="accent1"/>
-          </a:effectRef>
-          <a:fontRef idx="minor">
-            <a:schemeClr val="lt1"/>
-          </a:fontRef>
-        </p:style>
-        <p:txBody>
-          <a:bodyPr rtlCol="0" anchor="ctr"/>
-          <a:lstStyle/>
-          <a:p>
-            <a:pPr algn="ctr"/>
-          </a:p>
-        </p:txBody>
-      </p:sp>
-      <p:sp>
-        <p:nvSpPr>
-          <p:cNvPr id="13" name="Rounded Rectangle 12"/>
-          <p:cNvSpPr/>
-          <p:nvPr/>
-        </p:nvSpPr>
-        <p:spPr>
-          <a:xfrm>
-            <a:off x="640080" y="4882896"/>
-            <a:ext cx="1188720" cy="365760"/>
-          </a:xfrm>
-          <a:prstGeom prst="roundRect">
-            <a:avLst>
-              <a:gd name="adj" fmla="val 50000"/>
-            </a:avLst>
-          </a:prstGeom>
-          <a:solidFill>
-            <a:srgbClr val="22C55E"/>
-          </a:solidFill>
-          <a:ln>
-            <a:noFill/>
-          </a:ln>
-        </p:spPr>
-        <p:style>
-          <a:lnRef idx="1">
-            <a:schemeClr val="accent1"/>
-          </a:lnRef>
-          <a:fillRef idx="3">
-            <a:schemeClr val="accent1"/>
-          </a:fillRef>
-          <a:effectRef idx="2">
-            <a:schemeClr val="accent1"/>
-          </a:effectRef>
-          <a:fontRef idx="minor">
-            <a:schemeClr val="lt1"/>
-          </a:fontRef>
-        </p:style>
-        <p:txBody>
-          <a:bodyPr rtlCol="0" anchor="ctr" tIns="18288" bIns="18288"/>
-          <a:lstStyle/>
-          <a:p>
-            <a:pPr algn="ctr"/>
-            <a:r>
-              <a:rPr sz="1100" b="1">
-                <a:solidFill>
-                  <a:srgbClr val="F4F4F5"/>
-                </a:solidFill>
-                <a:latin typeface="Calibri"/>
-              </a:rPr>
-              <a:t>STATE</a:t>
+            <a:off x="8778240" y="3246120"/>
+            <a:ext cx="274320" cy="274320"/>
+          </a:xfrm>
+          <a:prstGeom prst="rect">
+            <a:avLst/>
+          </a:prstGeom>
+          <a:noFill/>
+        </p:spPr>
+        <p:txBody>
+          <a:bodyPr wrap="square" lIns="0" tIns="0" rIns="0" bIns="0">
+            <a:spAutoFit/>
+          </a:bodyPr>
+          <a:lstStyle/>
+          <a:p>
+            <a:pPr algn="l">
+              <a:spcBef>
+                <a:spcPts val="0"/>
+              </a:spcBef>
+              <a:spcAft>
+                <a:spcPts val="0"/>
+              </a:spcAft>
+            </a:pPr>
+            <a:r>
+              <a:rPr sz="1400" b="1" i="0">
+                <a:solidFill>
+                  <a:srgbClr val="8B5CF6"/>
+                </a:solidFill>
+                <a:latin typeface="Calibri"/>
+              </a:rPr>
+              <a:t>3</a:t>
             </a:r>
           </a:p>
         </p:txBody>
@@ -10457,8 +10473,8 @@
         </p:nvSpPr>
         <p:spPr>
           <a:xfrm>
-            <a:off x="1965960" y="4901184"/>
-            <a:ext cx="9144000" cy="365760"/>
+            <a:off x="9098280" y="3246120"/>
+            <a:ext cx="2468880" cy="274320"/>
           </a:xfrm>
           <a:prstGeom prst="rect">
             <a:avLst/>
@@ -10466,7 +10482,7 @@
           <a:noFill/>
         </p:spPr>
         <p:txBody>
-          <a:bodyPr wrap="square" lIns="0" rIns="0" tIns="0" bIns="0">
+          <a:bodyPr wrap="square" lIns="0" tIns="0" rIns="0" bIns="0">
             <a:spAutoFit/>
           </a:bodyPr>
           <a:lstStyle/>
@@ -10480,13 +10496,13 @@
               </a:spcAft>
             </a:pPr>
             <a:r>
-              <a:rPr sz="1800" b="1" i="0">
+              <a:rPr sz="1400" b="1" i="0">
                 <a:solidFill>
                   <a:srgbClr val="F4F4F5"/>
                 </a:solidFill>
                 <a:latin typeface="Calibri"/>
               </a:rPr>
-              <a:t>Online status not synced</a:t>
+              <a:t>Crew</a:t>
             </a:r>
           </a:p>
         </p:txBody>
@@ -10499,8 +10515,8 @@
         </p:nvSpPr>
         <p:spPr>
           <a:xfrm>
-            <a:off x="640080" y="5358384"/>
-            <a:ext cx="10515600" cy="777240"/>
+            <a:off x="9098280" y="3493008"/>
+            <a:ext cx="2468880" cy="274320"/>
           </a:xfrm>
           <a:prstGeom prst="rect">
             <a:avLst/>
@@ -10508,7 +10524,7 @@
           <a:noFill/>
         </p:spPr>
         <p:txBody>
-          <a:bodyPr wrap="square" lIns="0" rIns="0" tIns="0" bIns="0">
+          <a:bodyPr wrap="square" lIns="0" tIns="0" rIns="0" bIns="0">
             <a:spAutoFit/>
           </a:bodyPr>
           <a:lstStyle/>
@@ -10522,62 +10538,56 @@
               </a:spcAft>
             </a:pPr>
             <a:r>
-              <a:rPr sz="1200" b="0" i="0">
+              <a:rPr sz="1000" b="0" i="0">
                 <a:solidFill>
                   <a:srgbClr val="A1A1AA"/>
                 </a:solidFill>
                 <a:latin typeface="Calibri"/>
               </a:rPr>
-              <a:t>isOnline never updated → connected user appeared offline. Fixed by /login flipping it to true and adding a /logout endpoint that flips it back. Front-end logout is now async so the back-end ping fires before the token is dropped.</a:t>
-            </a:r>
-          </a:p>
-        </p:txBody>
-      </p:sp>
-      <p:sp>
-        <p:nvSpPr>
-          <p:cNvPr id="16" name="Rounded Rectangle 15"/>
-          <p:cNvSpPr/>
+              <a:t>online dot turns green</a:t>
+            </a:r>
+          </a:p>
+        </p:txBody>
+      </p:sp>
+      <p:sp>
+        <p:nvSpPr>
+          <p:cNvPr id="16" name="TextBox 15"/>
+          <p:cNvSpPr txBox="1"/>
           <p:nvPr/>
         </p:nvSpPr>
         <p:spPr>
           <a:xfrm>
-            <a:off x="457200" y="5897880"/>
-            <a:ext cx="11247120" cy="502920"/>
-          </a:xfrm>
-          <a:prstGeom prst="roundRect">
-            <a:avLst>
-              <a:gd name="adj" fmla="val 6000"/>
-            </a:avLst>
-          </a:prstGeom>
-          <a:solidFill>
-            <a:srgbClr val="0D0F15"/>
-          </a:solidFill>
-          <a:ln w="12700">
-            <a:solidFill>
-              <a:srgbClr val="8B5CF6"/>
-            </a:solidFill>
-          </a:ln>
-          <a:effectLst/>
-        </p:spPr>
-        <p:style>
-          <a:lnRef idx="1">
-            <a:schemeClr val="accent1"/>
-          </a:lnRef>
-          <a:fillRef idx="3">
-            <a:schemeClr val="accent1"/>
-          </a:fillRef>
-          <a:effectRef idx="2">
-            <a:schemeClr val="accent1"/>
-          </a:effectRef>
-          <a:fontRef idx="minor">
-            <a:schemeClr val="lt1"/>
-          </a:fontRef>
-        </p:style>
-        <p:txBody>
-          <a:bodyPr rtlCol="0" anchor="ctr"/>
-          <a:lstStyle/>
-          <a:p>
-            <a:pPr algn="ctr"/>
+            <a:off x="8778240" y="3794760"/>
+            <a:ext cx="274320" cy="274320"/>
+          </a:xfrm>
+          <a:prstGeom prst="rect">
+            <a:avLst/>
+          </a:prstGeom>
+          <a:noFill/>
+        </p:spPr>
+        <p:txBody>
+          <a:bodyPr wrap="square" lIns="0" tIns="0" rIns="0" bIns="0">
+            <a:spAutoFit/>
+          </a:bodyPr>
+          <a:lstStyle/>
+          <a:p>
+            <a:pPr algn="l">
+              <a:spcBef>
+                <a:spcPts val="0"/>
+              </a:spcBef>
+              <a:spcAft>
+                <a:spcPts val="0"/>
+              </a:spcAft>
+            </a:pPr>
+            <a:r>
+              <a:rPr sz="1400" b="1" i="0">
+                <a:solidFill>
+                  <a:srgbClr val="8B5CF6"/>
+                </a:solidFill>
+                <a:latin typeface="Calibri"/>
+              </a:rPr>
+              <a:t>4</a:t>
+            </a:r>
           </a:p>
         </p:txBody>
       </p:sp>
@@ -10589,8 +10599,8 @@
         </p:nvSpPr>
         <p:spPr>
           <a:xfrm>
-            <a:off x="640080" y="5989320"/>
-            <a:ext cx="10972800" cy="365760"/>
+            <a:off x="9098280" y="3794760"/>
+            <a:ext cx="2468880" cy="274320"/>
           </a:xfrm>
           <a:prstGeom prst="rect">
             <a:avLst/>
@@ -10598,27 +10608,27 @@
           <a:noFill/>
         </p:spPr>
         <p:txBody>
-          <a:bodyPr wrap="square" lIns="0" rIns="0" tIns="0" bIns="0">
+          <a:bodyPr wrap="square" lIns="0" tIns="0" rIns="0" bIns="0">
             <a:spAutoFit/>
           </a:bodyPr>
           <a:lstStyle/>
           <a:p>
-            <a:pPr algn="ctr">
-              <a:spcBef>
-                <a:spcPts val="0"/>
-              </a:spcBef>
-              <a:spcAft>
-                <a:spcPts val="0"/>
-              </a:spcAft>
-            </a:pPr>
-            <a:r>
-              <a:rPr sz="1200" b="0" i="1">
+            <a:pPr algn="l">
+              <a:spcBef>
+                <a:spcPts val="0"/>
+              </a:spcBef>
+              <a:spcAft>
+                <a:spcPts val="0"/>
+              </a:spcAft>
+            </a:pPr>
+            <a:r>
+              <a:rPr sz="1400" b="1" i="0">
                 <a:solidFill>
                   <a:srgbClr val="F4F4F5"/>
                 </a:solidFill>
                 <a:latin typeface="Calibri"/>
               </a:rPr>
-              <a:t>Next time:  init Git on day 1.  ·  Agree on the data contract before P3.  ·  One integration test per route.</a:t>
+              <a:t>Recruit</a:t>
             </a:r>
           </a:p>
         </p:txBody>
@@ -10631,8 +10641,8 @@
         </p:nvSpPr>
         <p:spPr>
           <a:xfrm>
-            <a:off x="457200" y="6446520"/>
-            <a:ext cx="5486400" cy="274320"/>
+            <a:off x="9098280" y="4041648"/>
+            <a:ext cx="2468880" cy="274320"/>
           </a:xfrm>
           <a:prstGeom prst="rect">
             <a:avLst/>
@@ -10640,7 +10650,7 @@
           <a:noFill/>
         </p:spPr>
         <p:txBody>
-          <a:bodyPr wrap="square" lIns="0" rIns="0" tIns="0" bIns="0">
+          <a:bodyPr wrap="square" lIns="0" tIns="0" rIns="0" bIns="0">
             <a:spAutoFit/>
           </a:bodyPr>
           <a:lstStyle/>
@@ -10656,11 +10666,11 @@
             <a:r>
               <a:rPr sz="1000" b="0" i="0">
                 <a:solidFill>
-                  <a:srgbClr val="71717A"/>
-                </a:solidFill>
-                <a:latin typeface="Calibri"/>
-              </a:rPr>
-              <a:t>MOD8  ·  Milestone 3  ·  The Heist</a:t>
+                  <a:srgbClr val="A1A1AA"/>
+                </a:solidFill>
+                <a:latin typeface="Calibri"/>
+              </a:rPr>
+              <a:t>new agent in the grid</a:t>
             </a:r>
           </a:p>
         </p:txBody>
@@ -10673,6 +10683,426 @@
         </p:nvSpPr>
         <p:spPr>
           <a:xfrm>
+            <a:off x="8778240" y="4343400"/>
+            <a:ext cx="274320" cy="274320"/>
+          </a:xfrm>
+          <a:prstGeom prst="rect">
+            <a:avLst/>
+          </a:prstGeom>
+          <a:noFill/>
+        </p:spPr>
+        <p:txBody>
+          <a:bodyPr wrap="square" lIns="0" tIns="0" rIns="0" bIns="0">
+            <a:spAutoFit/>
+          </a:bodyPr>
+          <a:lstStyle/>
+          <a:p>
+            <a:pPr algn="l">
+              <a:spcBef>
+                <a:spcPts val="0"/>
+              </a:spcBef>
+              <a:spcAft>
+                <a:spcPts val="0"/>
+              </a:spcAft>
+            </a:pPr>
+            <a:r>
+              <a:rPr sz="1400" b="1" i="0">
+                <a:solidFill>
+                  <a:srgbClr val="8B5CF6"/>
+                </a:solidFill>
+                <a:latin typeface="Calibri"/>
+              </a:rPr>
+              <a:t>5</a:t>
+            </a:r>
+          </a:p>
+        </p:txBody>
+      </p:sp>
+      <p:sp>
+        <p:nvSpPr>
+          <p:cNvPr id="20" name="TextBox 19"/>
+          <p:cNvSpPr txBox="1"/>
+          <p:nvPr/>
+        </p:nvSpPr>
+        <p:spPr>
+          <a:xfrm>
+            <a:off x="9098280" y="4343400"/>
+            <a:ext cx="2468880" cy="274320"/>
+          </a:xfrm>
+          <a:prstGeom prst="rect">
+            <a:avLst/>
+          </a:prstGeom>
+          <a:noFill/>
+        </p:spPr>
+        <p:txBody>
+          <a:bodyPr wrap="square" lIns="0" tIns="0" rIns="0" bIns="0">
+            <a:spAutoFit/>
+          </a:bodyPr>
+          <a:lstStyle/>
+          <a:p>
+            <a:pPr algn="l">
+              <a:spcBef>
+                <a:spcPts val="0"/>
+              </a:spcBef>
+              <a:spcAft>
+                <a:spcPts val="0"/>
+              </a:spcAft>
+            </a:pPr>
+            <a:r>
+              <a:rPr sz="1400" b="1" i="0">
+                <a:solidFill>
+                  <a:srgbClr val="F4F4F5"/>
+                </a:solidFill>
+                <a:latin typeface="Calibri"/>
+              </a:rPr>
+              <a:t>Garage</a:t>
+            </a:r>
+          </a:p>
+        </p:txBody>
+      </p:sp>
+      <p:sp>
+        <p:nvSpPr>
+          <p:cNvPr id="21" name="TextBox 20"/>
+          <p:cNvSpPr txBox="1"/>
+          <p:nvPr/>
+        </p:nvSpPr>
+        <p:spPr>
+          <a:xfrm>
+            <a:off x="9098280" y="4590288"/>
+            <a:ext cx="2468880" cy="274320"/>
+          </a:xfrm>
+          <a:prstGeom prst="rect">
+            <a:avLst/>
+          </a:prstGeom>
+          <a:noFill/>
+        </p:spPr>
+        <p:txBody>
+          <a:bodyPr wrap="square" lIns="0" tIns="0" rIns="0" bIns="0">
+            <a:spAutoFit/>
+          </a:bodyPr>
+          <a:lstStyle/>
+          <a:p>
+            <a:pPr algn="l">
+              <a:spcBef>
+                <a:spcPts val="0"/>
+              </a:spcBef>
+              <a:spcAft>
+                <a:spcPts val="0"/>
+              </a:spcAft>
+            </a:pPr>
+            <a:r>
+              <a:rPr sz="1000" b="0" i="0">
+                <a:solidFill>
+                  <a:srgbClr val="A1A1AA"/>
+                </a:solidFill>
+                <a:latin typeface="Calibri"/>
+              </a:rPr>
+              <a:t>edit vehicle, color picker</a:t>
+            </a:r>
+          </a:p>
+        </p:txBody>
+      </p:sp>
+      <p:sp>
+        <p:nvSpPr>
+          <p:cNvPr id="22" name="TextBox 21"/>
+          <p:cNvSpPr txBox="1"/>
+          <p:nvPr/>
+        </p:nvSpPr>
+        <p:spPr>
+          <a:xfrm>
+            <a:off x="8778240" y="4892040"/>
+            <a:ext cx="274320" cy="274320"/>
+          </a:xfrm>
+          <a:prstGeom prst="rect">
+            <a:avLst/>
+          </a:prstGeom>
+          <a:noFill/>
+        </p:spPr>
+        <p:txBody>
+          <a:bodyPr wrap="square" lIns="0" tIns="0" rIns="0" bIns="0">
+            <a:spAutoFit/>
+          </a:bodyPr>
+          <a:lstStyle/>
+          <a:p>
+            <a:pPr algn="l">
+              <a:spcBef>
+                <a:spcPts val="0"/>
+              </a:spcBef>
+              <a:spcAft>
+                <a:spcPts val="0"/>
+              </a:spcAft>
+            </a:pPr>
+            <a:r>
+              <a:rPr sz="1400" b="1" i="0">
+                <a:solidFill>
+                  <a:srgbClr val="8B5CF6"/>
+                </a:solidFill>
+                <a:latin typeface="Calibri"/>
+              </a:rPr>
+              <a:t>6</a:t>
+            </a:r>
+          </a:p>
+        </p:txBody>
+      </p:sp>
+      <p:sp>
+        <p:nvSpPr>
+          <p:cNvPr id="23" name="TextBox 22"/>
+          <p:cNvSpPr txBox="1"/>
+          <p:nvPr/>
+        </p:nvSpPr>
+        <p:spPr>
+          <a:xfrm>
+            <a:off x="9098280" y="4892040"/>
+            <a:ext cx="2468880" cy="274320"/>
+          </a:xfrm>
+          <a:prstGeom prst="rect">
+            <a:avLst/>
+          </a:prstGeom>
+          <a:noFill/>
+        </p:spPr>
+        <p:txBody>
+          <a:bodyPr wrap="square" lIns="0" tIns="0" rIns="0" bIns="0">
+            <a:spAutoFit/>
+          </a:bodyPr>
+          <a:lstStyle/>
+          <a:p>
+            <a:pPr algn="l">
+              <a:spcBef>
+                <a:spcPts val="0"/>
+              </a:spcBef>
+              <a:spcAft>
+                <a:spcPts val="0"/>
+              </a:spcAft>
+            </a:pPr>
+            <a:r>
+              <a:rPr sz="1400" b="1" i="0">
+                <a:solidFill>
+                  <a:srgbClr val="F4F4F5"/>
+                </a:solidFill>
+                <a:latin typeface="Calibri"/>
+              </a:rPr>
+              <a:t>Intel</a:t>
+            </a:r>
+          </a:p>
+        </p:txBody>
+      </p:sp>
+      <p:sp>
+        <p:nvSpPr>
+          <p:cNvPr id="24" name="TextBox 23"/>
+          <p:cNvSpPr txBox="1"/>
+          <p:nvPr/>
+        </p:nvSpPr>
+        <p:spPr>
+          <a:xfrm>
+            <a:off x="9098280" y="5138927"/>
+            <a:ext cx="2468880" cy="274320"/>
+          </a:xfrm>
+          <a:prstGeom prst="rect">
+            <a:avLst/>
+          </a:prstGeom>
+          <a:noFill/>
+        </p:spPr>
+        <p:txBody>
+          <a:bodyPr wrap="square" lIns="0" tIns="0" rIns="0" bIns="0">
+            <a:spAutoFit/>
+          </a:bodyPr>
+          <a:lstStyle/>
+          <a:p>
+            <a:pPr algn="l">
+              <a:spcBef>
+                <a:spcPts val="0"/>
+              </a:spcBef>
+              <a:spcAft>
+                <a:spcPts val="0"/>
+              </a:spcAft>
+            </a:pPr>
+            <a:r>
+              <a:rPr sz="1000" b="0" i="0">
+                <a:solidFill>
+                  <a:srgbClr val="A1A1AA"/>
+                </a:solidFill>
+                <a:latin typeface="Calibri"/>
+              </a:rPr>
+              <a:t>pin a file (optimistic)</a:t>
+            </a:r>
+          </a:p>
+        </p:txBody>
+      </p:sp>
+      <p:sp>
+        <p:nvSpPr>
+          <p:cNvPr id="25" name="TextBox 24"/>
+          <p:cNvSpPr txBox="1"/>
+          <p:nvPr/>
+        </p:nvSpPr>
+        <p:spPr>
+          <a:xfrm>
+            <a:off x="8778240" y="5440679"/>
+            <a:ext cx="274320" cy="274320"/>
+          </a:xfrm>
+          <a:prstGeom prst="rect">
+            <a:avLst/>
+          </a:prstGeom>
+          <a:noFill/>
+        </p:spPr>
+        <p:txBody>
+          <a:bodyPr wrap="square" lIns="0" tIns="0" rIns="0" bIns="0">
+            <a:spAutoFit/>
+          </a:bodyPr>
+          <a:lstStyle/>
+          <a:p>
+            <a:pPr algn="l">
+              <a:spcBef>
+                <a:spcPts val="0"/>
+              </a:spcBef>
+              <a:spcAft>
+                <a:spcPts val="0"/>
+              </a:spcAft>
+            </a:pPr>
+            <a:r>
+              <a:rPr sz="1400" b="1" i="0">
+                <a:solidFill>
+                  <a:srgbClr val="8B5CF6"/>
+                </a:solidFill>
+                <a:latin typeface="Calibri"/>
+              </a:rPr>
+              <a:t>7</a:t>
+            </a:r>
+          </a:p>
+        </p:txBody>
+      </p:sp>
+      <p:sp>
+        <p:nvSpPr>
+          <p:cNvPr id="26" name="TextBox 25"/>
+          <p:cNvSpPr txBox="1"/>
+          <p:nvPr/>
+        </p:nvSpPr>
+        <p:spPr>
+          <a:xfrm>
+            <a:off x="9098280" y="5440679"/>
+            <a:ext cx="2468880" cy="274320"/>
+          </a:xfrm>
+          <a:prstGeom prst="rect">
+            <a:avLst/>
+          </a:prstGeom>
+          <a:noFill/>
+        </p:spPr>
+        <p:txBody>
+          <a:bodyPr wrap="square" lIns="0" tIns="0" rIns="0" bIns="0">
+            <a:spAutoFit/>
+          </a:bodyPr>
+          <a:lstStyle/>
+          <a:p>
+            <a:pPr algn="l">
+              <a:spcBef>
+                <a:spcPts val="0"/>
+              </a:spcBef>
+              <a:spcAft>
+                <a:spcPts val="0"/>
+              </a:spcAft>
+            </a:pPr>
+            <a:r>
+              <a:rPr sz="1400" b="1" i="0">
+                <a:solidFill>
+                  <a:srgbClr val="F4F4F5"/>
+                </a:solidFill>
+                <a:latin typeface="Calibri"/>
+              </a:rPr>
+              <a:t>Theme</a:t>
+            </a:r>
+          </a:p>
+        </p:txBody>
+      </p:sp>
+      <p:sp>
+        <p:nvSpPr>
+          <p:cNvPr id="27" name="TextBox 26"/>
+          <p:cNvSpPr txBox="1"/>
+          <p:nvPr/>
+        </p:nvSpPr>
+        <p:spPr>
+          <a:xfrm>
+            <a:off x="9098280" y="5687567"/>
+            <a:ext cx="2468880" cy="274320"/>
+          </a:xfrm>
+          <a:prstGeom prst="rect">
+            <a:avLst/>
+          </a:prstGeom>
+          <a:noFill/>
+        </p:spPr>
+        <p:txBody>
+          <a:bodyPr wrap="square" lIns="0" tIns="0" rIns="0" bIns="0">
+            <a:spAutoFit/>
+          </a:bodyPr>
+          <a:lstStyle/>
+          <a:p>
+            <a:pPr algn="l">
+              <a:spcBef>
+                <a:spcPts val="0"/>
+              </a:spcBef>
+              <a:spcAft>
+                <a:spcPts val="0"/>
+              </a:spcAft>
+            </a:pPr>
+            <a:r>
+              <a:rPr sz="1000" b="0" i="0">
+                <a:solidFill>
+                  <a:srgbClr val="A1A1AA"/>
+                </a:solidFill>
+                <a:latin typeface="Calibri"/>
+              </a:rPr>
+              <a:t>Sun / Moon toggle</a:t>
+            </a:r>
+          </a:p>
+        </p:txBody>
+      </p:sp>
+      <p:sp>
+        <p:nvSpPr>
+          <p:cNvPr id="28" name="TextBox 27"/>
+          <p:cNvSpPr txBox="1"/>
+          <p:nvPr/>
+        </p:nvSpPr>
+        <p:spPr>
+          <a:xfrm>
+            <a:off x="457200" y="6446520"/>
+            <a:ext cx="5486400" cy="274320"/>
+          </a:xfrm>
+          <a:prstGeom prst="rect">
+            <a:avLst/>
+          </a:prstGeom>
+          <a:noFill/>
+        </p:spPr>
+        <p:txBody>
+          <a:bodyPr wrap="square" lIns="0" tIns="0" rIns="0" bIns="0">
+            <a:spAutoFit/>
+          </a:bodyPr>
+          <a:lstStyle/>
+          <a:p>
+            <a:pPr algn="l">
+              <a:spcBef>
+                <a:spcPts val="0"/>
+              </a:spcBef>
+              <a:spcAft>
+                <a:spcPts val="0"/>
+              </a:spcAft>
+            </a:pPr>
+            <a:r>
+              <a:rPr sz="1000" b="0" i="0">
+                <a:solidFill>
+                  <a:srgbClr val="71717A"/>
+                </a:solidFill>
+                <a:latin typeface="Calibri"/>
+              </a:rPr>
+              <a:t>MOD8  ·  Milestone 3  ·  The Heist</a:t>
+            </a:r>
+          </a:p>
+        </p:txBody>
+      </p:sp>
+      <p:sp>
+        <p:nvSpPr>
+          <p:cNvPr id="29" name="TextBox 28"/>
+          <p:cNvSpPr txBox="1"/>
+          <p:nvPr/>
+        </p:nvSpPr>
+        <p:spPr>
+          <a:xfrm>
             <a:off x="10972800" y="6446520"/>
             <a:ext cx="914400" cy="274320"/>
           </a:xfrm>
@@ -10682,7 +11112,7 @@
           <a:noFill/>
         </p:spPr>
         <p:txBody>
-          <a:bodyPr wrap="square" lIns="0" rIns="0" tIns="0" bIns="0">
+          <a:bodyPr wrap="square" lIns="0" tIns="0" rIns="0" bIns="0">
             <a:spAutoFit/>
           </a:bodyPr>
           <a:lstStyle/>
@@ -10702,7 +11132,7 @@
                 </a:solidFill>
                 <a:latin typeface="Calibri"/>
               </a:rPr>
-              <a:t>6 / 7</a:t>
+              <a:t>4 / 7</a:t>
             </a:r>
           </a:p>
         </p:txBody>
@@ -10716,7 +11146,7 @@
 </file>
 
 <file path=ppt/slides/slide7.xml><?xml version="1.0" encoding="utf-8"?>
-<p:sld xmlns:a="http://schemas.openxmlformats.org/drawingml/2006/main" xmlns:p="http://schemas.openxmlformats.org/presentationml/2006/main" xmlns:r="http://schemas.openxmlformats.org/officeDocument/2006/relationships">
+<p:sld xmlns:a="http://schemas.openxmlformats.org/drawingml/2006/main" xmlns:r="http://schemas.openxmlformats.org/officeDocument/2006/relationships" xmlns:p="http://schemas.openxmlformats.org/presentationml/2006/main">
   <p:cSld>
     <p:bg>
       <p:bgPr>
@@ -10732,7 +11162,14 @@
         <p:cNvGrpSpPr/>
         <p:nvPr/>
       </p:nvGrpSpPr>
-      <p:grpSpPr/>
+      <p:grpSpPr>
+        <a:xfrm>
+          <a:off x="0" y="0"/>
+          <a:ext cx="0" cy="0"/>
+          <a:chOff x="0" y="0"/>
+          <a:chExt cx="0" cy="0"/>
+        </a:xfrm>
+      </p:grpSpPr>
       <p:sp>
         <p:nvSpPr>
           <p:cNvPr id="2" name="TextBox 1"/>
@@ -10750,7 +11187,7 @@
           <a:noFill/>
         </p:spPr>
         <p:txBody>
-          <a:bodyPr wrap="square" lIns="0" rIns="0" tIns="0" bIns="0">
+          <a:bodyPr wrap="square" lIns="0" tIns="0" rIns="0" bIns="0">
             <a:spAutoFit/>
           </a:bodyPr>
           <a:lstStyle/>
@@ -10792,7 +11229,7 @@
           <a:noFill/>
         </p:spPr>
         <p:txBody>
-          <a:bodyPr wrap="square" lIns="0" rIns="0" tIns="0" bIns="0">
+          <a:bodyPr wrap="square" lIns="0" tIns="0" rIns="0" bIns="0">
             <a:spAutoFit/>
           </a:bodyPr>
           <a:lstStyle/>
@@ -10825,8 +11262,8 @@
         </p:nvSpPr>
         <p:spPr>
           <a:xfrm>
-            <a:off x="4114800" y="3657600"/>
-            <a:ext cx="3931920" cy="502920"/>
+            <a:off x="3976576" y="3611880"/>
+            <a:ext cx="4208367" cy="502920"/>
           </a:xfrm>
           <a:prstGeom prst="roundRect">
             <a:avLst>
@@ -10855,7 +11292,7 @@
           </a:fontRef>
         </p:style>
         <p:txBody>
-          <a:bodyPr rtlCol="0" anchor="ctr" tIns="18288" bIns="18288"/>
+          <a:bodyPr tIns="18288" bIns="18288" rtlCol="0" anchor="ctr"/>
           <a:lstStyle/>
           <a:p>
             <a:pPr algn="ctr"/>
@@ -10916,6 +11353,7 @@
           <a:lstStyle/>
           <a:p>
             <a:pPr algn="ctr"/>
+            <a:endParaRPr/>
           </a:p>
         </p:txBody>
       </p:sp>
@@ -10936,7 +11374,7 @@
           <a:noFill/>
         </p:spPr>
         <p:txBody>
-          <a:bodyPr wrap="square" lIns="0" rIns="0" tIns="0" bIns="0">
+          <a:bodyPr wrap="square" lIns="0" tIns="0" rIns="0" bIns="0">
             <a:spAutoFit/>
           </a:bodyPr>
           <a:lstStyle/>
@@ -10978,7 +11416,7 @@
           <a:noFill/>
         </p:spPr>
         <p:txBody>
-          <a:bodyPr wrap="square" lIns="0" rIns="0" tIns="0" bIns="0">
+          <a:bodyPr wrap="square" lIns="0" tIns="0" rIns="0" bIns="0">
             <a:spAutoFit/>
           </a:bodyPr>
           <a:lstStyle/>
@@ -11039,7 +11477,7 @@
           <a:noFill/>
         </p:spPr>
         <p:txBody>
-          <a:bodyPr wrap="square" lIns="0" rIns="0" tIns="0" bIns="0">
+          <a:bodyPr wrap="square" lIns="0" tIns="0" rIns="0" bIns="0">
             <a:spAutoFit/>
           </a:bodyPr>
           <a:lstStyle/>
@@ -11081,7 +11519,7 @@
           <a:noFill/>
         </p:spPr>
         <p:txBody>
-          <a:bodyPr wrap="square" lIns="0" rIns="0" tIns="0" bIns="0">
+          <a:bodyPr wrap="square" lIns="0" tIns="0" rIns="0" bIns="0">
             <a:spAutoFit/>
           </a:bodyPr>
           <a:lstStyle/>
@@ -11123,7 +11561,7 @@
           <a:noFill/>
         </p:spPr>
         <p:txBody>
-          <a:bodyPr wrap="square" lIns="0" rIns="0" tIns="0" bIns="0">
+          <a:bodyPr wrap="square" lIns="0" tIns="0" rIns="0" bIns="0">
             <a:spAutoFit/>
           </a:bodyPr>
           <a:lstStyle/>
@@ -11477,7 +11915,7 @@
 </file>
 
 <file path=ppt/theme/theme2.xml><?xml version="1.0" encoding="utf-8"?>
-<a:theme xmlns:a="http://schemas.openxmlformats.org/drawingml/2006/main" name="Office Theme">
+<a:theme xmlns:a="http://schemas.openxmlformats.org/drawingml/2006/main" name="Thème Office">
   <a:themeElements>
     <a:clrScheme name="Office">
       <a:dk1>
@@ -11487,44 +11925,44 @@
         <a:sysClr val="window" lastClr="FFFFFF"/>
       </a:lt1>
       <a:dk2>
-        <a:srgbClr val="1F497D"/>
+        <a:srgbClr val="0E2841"/>
       </a:dk2>
       <a:lt2>
-        <a:srgbClr val="EEECE1"/>
+        <a:srgbClr val="E8E8E8"/>
       </a:lt2>
       <a:accent1>
-        <a:srgbClr val="4F81BD"/>
+        <a:srgbClr val="156082"/>
       </a:accent1>
       <a:accent2>
-        <a:srgbClr val="C0504D"/>
+        <a:srgbClr val="E97132"/>
       </a:accent2>
       <a:accent3>
-        <a:srgbClr val="9BBB59"/>
+        <a:srgbClr val="196B24"/>
       </a:accent3>
       <a:accent4>
-        <a:srgbClr val="8064A2"/>
+        <a:srgbClr val="0F9ED5"/>
       </a:accent4>
       <a:accent5>
-        <a:srgbClr val="4BACC6"/>
+        <a:srgbClr val="A02B93"/>
       </a:accent5>
       <a:accent6>
-        <a:srgbClr val="F79646"/>
+        <a:srgbClr val="4EA72E"/>
       </a:accent6>
       <a:hlink>
-        <a:srgbClr val="0000FF"/>
+        <a:srgbClr val="467886"/>
       </a:hlink>
       <a:folHlink>
-        <a:srgbClr val="800080"/>
+        <a:srgbClr val="96607D"/>
       </a:folHlink>
     </a:clrScheme>
     <a:fontScheme name="Office">
       <a:majorFont>
-        <a:latin typeface="Calibri"/>
+        <a:latin typeface="Aptos Display" panose="02110004020202020204"/>
         <a:ea typeface=""/>
         <a:cs typeface=""/>
-        <a:font script="Jpan" typeface="ＭＳ Ｐゴシック"/>
+        <a:font script="Jpan" typeface="游ゴシック Light"/>
         <a:font script="Hang" typeface="맑은 고딕"/>
-        <a:font script="Hans" typeface="宋体"/>
+        <a:font script="Hans" typeface="等线 Light"/>
         <a:font script="Hant" typeface="新細明體"/>
         <a:font script="Arab" typeface="Times New Roman"/>
         <a:font script="Hebr" typeface="Times New Roman"/>
@@ -11552,14 +11990,31 @@
         <a:font script="Viet" typeface="Times New Roman"/>
         <a:font script="Uigh" typeface="Microsoft Uighur"/>
         <a:font script="Geor" typeface="Sylfaen"/>
+        <a:font script="Armn" typeface="Arial"/>
+        <a:font script="Bugi" typeface="Leelawadee UI"/>
+        <a:font script="Bopo" typeface="Microsoft JhengHei"/>
+        <a:font script="Java" typeface="Javanese Text"/>
+        <a:font script="Lisu" typeface="Segoe UI"/>
+        <a:font script="Mymr" typeface="Myanmar Text"/>
+        <a:font script="Nkoo" typeface="Ebrima"/>
+        <a:font script="Olck" typeface="Nirmala UI"/>
+        <a:font script="Osma" typeface="Ebrima"/>
+        <a:font script="Phag" typeface="Phagspa"/>
+        <a:font script="Syrn" typeface="Estrangelo Edessa"/>
+        <a:font script="Syrj" typeface="Estrangelo Edessa"/>
+        <a:font script="Syre" typeface="Estrangelo Edessa"/>
+        <a:font script="Sora" typeface="Nirmala UI"/>
+        <a:font script="Tale" typeface="Microsoft Tai Le"/>
+        <a:font script="Talu" typeface="Microsoft New Tai Lue"/>
+        <a:font script="Tfng" typeface="Ebrima"/>
       </a:majorFont>
       <a:minorFont>
-        <a:latin typeface="Calibri"/>
+        <a:latin typeface="Aptos" panose="02110004020202020204"/>
         <a:ea typeface=""/>
         <a:cs typeface=""/>
-        <a:font script="Jpan" typeface="ＭＳ Ｐゴシック"/>
+        <a:font script="Jpan" typeface="游ゴシック"/>
         <a:font script="Hang" typeface="맑은 고딕"/>
-        <a:font script="Hans" typeface="宋体"/>
+        <a:font script="Hans" typeface="等线"/>
         <a:font script="Hant" typeface="新細明體"/>
         <a:font script="Arab" typeface="Arial"/>
         <a:font script="Hebr" typeface="Arial"/>
@@ -11587,6 +12042,23 @@
         <a:font script="Viet" typeface="Arial"/>
         <a:font script="Uigh" typeface="Microsoft Uighur"/>
         <a:font script="Geor" typeface="Sylfaen"/>
+        <a:font script="Armn" typeface="Arial"/>
+        <a:font script="Bugi" typeface="Leelawadee UI"/>
+        <a:font script="Bopo" typeface="Microsoft JhengHei"/>
+        <a:font script="Java" typeface="Javanese Text"/>
+        <a:font script="Lisu" typeface="Segoe UI"/>
+        <a:font script="Mymr" typeface="Myanmar Text"/>
+        <a:font script="Nkoo" typeface="Ebrima"/>
+        <a:font script="Olck" typeface="Nirmala UI"/>
+        <a:font script="Osma" typeface="Ebrima"/>
+        <a:font script="Phag" typeface="Phagspa"/>
+        <a:font script="Syrn" typeface="Estrangelo Edessa"/>
+        <a:font script="Syrj" typeface="Estrangelo Edessa"/>
+        <a:font script="Syre" typeface="Estrangelo Edessa"/>
+        <a:font script="Sora" typeface="Nirmala UI"/>
+        <a:font script="Tale" typeface="Microsoft Tai Le"/>
+        <a:font script="Talu" typeface="Microsoft New Tai Lue"/>
+        <a:font script="Tfng" typeface="Ebrima"/>
       </a:minorFont>
     </a:fontScheme>
     <a:fmtScheme name="Office">
@@ -11598,180 +12070,136 @@
           <a:gsLst>
             <a:gs pos="0">
               <a:schemeClr val="phClr">
-                <a:tint val="50000"/>
-                <a:satMod val="300000"/>
+                <a:lumMod val="110000"/>
+                <a:satMod val="105000"/>
+                <a:tint val="67000"/>
               </a:schemeClr>
             </a:gs>
-            <a:gs pos="35000">
+            <a:gs pos="50000">
               <a:schemeClr val="phClr">
-                <a:tint val="37000"/>
-                <a:satMod val="300000"/>
+                <a:lumMod val="105000"/>
+                <a:satMod val="103000"/>
+                <a:tint val="73000"/>
               </a:schemeClr>
             </a:gs>
             <a:gs pos="100000">
               <a:schemeClr val="phClr">
-                <a:tint val="15000"/>
-                <a:satMod val="350000"/>
+                <a:lumMod val="105000"/>
+                <a:satMod val="109000"/>
+                <a:tint val="81000"/>
               </a:schemeClr>
             </a:gs>
           </a:gsLst>
-          <a:lin ang="16200000" scaled="1"/>
+          <a:lin ang="5400000" scaled="0"/>
         </a:gradFill>
         <a:gradFill rotWithShape="1">
           <a:gsLst>
             <a:gs pos="0">
               <a:schemeClr val="phClr">
-                <a:tint val="100000"/>
+                <a:satMod val="103000"/>
+                <a:lumMod val="102000"/>
+                <a:tint val="94000"/>
+              </a:schemeClr>
+            </a:gs>
+            <a:gs pos="50000">
+              <a:schemeClr val="phClr">
+                <a:satMod val="110000"/>
+                <a:lumMod val="100000"/>
                 <a:shade val="100000"/>
-                <a:satMod val="130000"/>
               </a:schemeClr>
             </a:gs>
             <a:gs pos="100000">
               <a:schemeClr val="phClr">
-                <a:tint val="50000"/>
-                <a:shade val="100000"/>
-                <a:satMod val="350000"/>
+                <a:lumMod val="99000"/>
+                <a:satMod val="120000"/>
+                <a:shade val="78000"/>
               </a:schemeClr>
             </a:gs>
           </a:gsLst>
-          <a:lin ang="16200000" scaled="0"/>
+          <a:lin ang="5400000" scaled="0"/>
         </a:gradFill>
       </a:fillStyleLst>
       <a:lnStyleLst>
-        <a:ln w="9525" cap="flat" cmpd="sng" algn="ctr">
+        <a:ln w="12700" cap="flat" cmpd="sng" algn="ctr">
           <a:solidFill>
-            <a:schemeClr val="phClr">
-              <a:shade val="95000"/>
-              <a:satMod val="105000"/>
-            </a:schemeClr>
+            <a:schemeClr val="phClr"/>
           </a:solidFill>
           <a:prstDash val="solid"/>
+          <a:miter lim="800000"/>
+        </a:ln>
+        <a:ln w="19050" cap="flat" cmpd="sng" algn="ctr">
+          <a:solidFill>
+            <a:schemeClr val="phClr"/>
+          </a:solidFill>
+          <a:prstDash val="solid"/>
+          <a:miter lim="800000"/>
         </a:ln>
         <a:ln w="25400" cap="flat" cmpd="sng" algn="ctr">
           <a:solidFill>
             <a:schemeClr val="phClr"/>
           </a:solidFill>
           <a:prstDash val="solid"/>
-        </a:ln>
-        <a:ln w="38100" cap="flat" cmpd="sng" algn="ctr">
-          <a:solidFill>
-            <a:schemeClr val="phClr"/>
-          </a:solidFill>
-          <a:prstDash val="solid"/>
+          <a:miter lim="800000"/>
         </a:ln>
       </a:lnStyleLst>
       <a:effectStyleLst>
         <a:effectStyle>
+          <a:effectLst/>
+        </a:effectStyle>
+        <a:effectStyle>
+          <a:effectLst/>
+        </a:effectStyle>
+        <a:effectStyle>
           <a:effectLst>
-            <a:outerShdw blurRad="40000" dist="20000" dir="5400000" rotWithShape="0">
+            <a:outerShdw blurRad="57150" dist="19050" dir="5400000" algn="ctr" rotWithShape="0">
               <a:srgbClr val="000000">
-                <a:alpha val="38000"/>
+                <a:alpha val="63000"/>
               </a:srgbClr>
             </a:outerShdw>
           </a:effectLst>
-        </a:effectStyle>
-        <a:effectStyle>
-          <a:effectLst>
-            <a:outerShdw blurRad="40000" dist="23000" dir="5400000" rotWithShape="0">
-              <a:srgbClr val="000000">
-                <a:alpha val="35000"/>
-              </a:srgbClr>
-            </a:outerShdw>
-          </a:effectLst>
-        </a:effectStyle>
-        <a:effectStyle>
-          <a:effectLst>
-            <a:outerShdw blurRad="40000" dist="23000" dir="5400000" rotWithShape="0">
-              <a:srgbClr val="000000">
-                <a:alpha val="35000"/>
-              </a:srgbClr>
-            </a:outerShdw>
-          </a:effectLst>
-          <a:scene3d>
-            <a:camera prst="orthographicFront">
-              <a:rot lat="0" lon="0" rev="0"/>
-            </a:camera>
-            <a:lightRig rig="threePt" dir="t">
-              <a:rot lat="0" lon="0" rev="1200000"/>
-            </a:lightRig>
-          </a:scene3d>
-          <a:sp3d>
-            <a:bevelT w="63500" h="25400"/>
-          </a:sp3d>
         </a:effectStyle>
       </a:effectStyleLst>
       <a:bgFillStyleLst>
         <a:solidFill>
           <a:schemeClr val="phClr"/>
         </a:solidFill>
+        <a:solidFill>
+          <a:schemeClr val="phClr">
+            <a:tint val="95000"/>
+            <a:satMod val="170000"/>
+          </a:schemeClr>
+        </a:solidFill>
         <a:gradFill rotWithShape="1">
           <a:gsLst>
             <a:gs pos="0">
               <a:schemeClr val="phClr">
-                <a:tint val="40000"/>
-                <a:satMod val="350000"/>
+                <a:tint val="93000"/>
+                <a:satMod val="150000"/>
+                <a:shade val="98000"/>
+                <a:lumMod val="102000"/>
               </a:schemeClr>
             </a:gs>
-            <a:gs pos="40000">
+            <a:gs pos="50000">
               <a:schemeClr val="phClr">
-                <a:tint val="45000"/>
-                <a:shade val="99000"/>
-                <a:satMod val="350000"/>
+                <a:tint val="98000"/>
+                <a:satMod val="130000"/>
+                <a:shade val="90000"/>
+                <a:lumMod val="103000"/>
               </a:schemeClr>
             </a:gs>
             <a:gs pos="100000">
               <a:schemeClr val="phClr">
-                <a:shade val="20000"/>
-                <a:satMod val="255000"/>
+                <a:shade val="63000"/>
+                <a:satMod val="120000"/>
               </a:schemeClr>
             </a:gs>
           </a:gsLst>
-          <a:path path="circle">
-            <a:fillToRect l="50000" t="-80000" r="50000" b="180000"/>
-          </a:path>
-        </a:gradFill>
-        <a:gradFill rotWithShape="1">
-          <a:gsLst>
-            <a:gs pos="0">
-              <a:schemeClr val="phClr">
-                <a:tint val="80000"/>
-                <a:satMod val="300000"/>
-              </a:schemeClr>
-            </a:gs>
-            <a:gs pos="100000">
-              <a:schemeClr val="phClr">
-                <a:shade val="30000"/>
-                <a:satMod val="200000"/>
-              </a:schemeClr>
-            </a:gs>
-          </a:gsLst>
-          <a:path path="circle">
-            <a:fillToRect l="50000" t="50000" r="50000" b="50000"/>
-          </a:path>
+          <a:lin ang="5400000" scaled="0"/>
         </a:gradFill>
       </a:bgFillStyleLst>
     </a:fmtScheme>
   </a:themeElements>
   <a:objectDefaults>
-    <a:spDef>
-      <a:spPr/>
-      <a:bodyPr/>
-      <a:lstStyle/>
-      <a:style>
-        <a:lnRef idx="1">
-          <a:schemeClr val="accent1"/>
-        </a:lnRef>
-        <a:fillRef idx="3">
-          <a:schemeClr val="accent1"/>
-        </a:fillRef>
-        <a:effectRef idx="2">
-          <a:schemeClr val="accent1"/>
-        </a:effectRef>
-        <a:fontRef idx="minor">
-          <a:schemeClr val="lt1"/>
-        </a:fontRef>
-      </a:style>
-    </a:spDef>
     <a:lnDef>
       <a:spPr/>
       <a:bodyPr/>
@@ -11793,5 +12221,10 @@
     </a:lnDef>
   </a:objectDefaults>
   <a:extraClrSchemeLst/>
+  <a:extLst>
+    <a:ext uri="{05A4C25C-085E-4340-85A3-A5531E510DB2}">
+      <thm15:themeFamily xmlns:thm15="http://schemas.microsoft.com/office/thememl/2012/main" name="Office Theme" id="{2E142A2C-CD16-42D6-873A-C26D2A0506FA}" vid="{1BDDFF52-6CD6-40A5-AB3C-68EB2F1E4D0A}"/>
+    </a:ext>
+  </a:extLst>
 </a:theme>
 </file>